--- a/deck/INK_IT_Visa_and_Permits_GCC.pptx
+++ b/deck/INK_IT_Visa_and_Permits_GCC.pptx
@@ -511,7 +511,7 @@
           <a:p>
             <a:r>
               <a:rPr lang="en-US" dirty="0"/>
-              <a:t>Opening frame. The pitch: this is not a concept — it is a live SAP BTP application running work permit, renewal and cancellation lifecycles in production in the UAE, with configured country packs for the rest of the GCC and Libya. Emphasise three words: owned, visible, reconciled.</a:t>
+              <a:t>Opening frame. The pitch: a pre-built SAP BTP application covering the work permit, renewal and cancellation lifecycles, with configured country packs across the GCC and Libya. Emphasise three words: owned, visible, reconciled.</a:t>
             </a:r>
             <a:endParaRPr lang="en-US" dirty="0"/>
           </a:p>
@@ -775,7 +775,7 @@
           <a:p>
             <a:r>
               <a:rPr lang="en-US" dirty="0"/>
-              <a:t>Anchor on the screenshot — this is a real system, not a mock-up. The five capability tiles are what makes it a governance tool rather than a tracker.</a:t>
+              <a:t>Anchor on the screenshot — this is the built application, not a mock-up. The five capability tiles are what makes it a governance tool rather than a tracker.</a:t>
             </a:r>
             <a:endParaRPr lang="en-US" dirty="0"/>
           </a:p>
@@ -1127,7 +1127,7 @@
           <a:p>
             <a:r>
               <a:rPr lang="en-US" dirty="0"/>
-              <a:t>The GCC-ready slide. Be straight about live versus pack — credibility here is worth more than an overclaim, and the honesty usually earns the follow-up meeting. For KSA note the three-authority split: Qiwa for labour, Muqeem for the Iqama, Absher as the employee-facing mirror.</a:t>
+              <a:t>The GCC-ready slide. The message is breadth from one engine: each pack is configuration, not a rebuild, which is why deployment is weeks rather than quarters. For KSA note the three-authority split: Qiwa for labour, Muqeem for the Iqama, Absher as the employee-facing mirror.</a:t>
             </a:r>
             <a:endParaRPr lang="en-US" dirty="0"/>
           </a:p>
@@ -1904,11 +1904,11 @@
             </a:avLst>
           </a:prstGeom>
           <a:solidFill>
-            <a:srgbClr val="12756F"/>
+            <a:srgbClr val="16304C"/>
           </a:solidFill>
           <a:ln w="9525">
             <a:solidFill>
-              <a:srgbClr val="20A098"/>
+              <a:srgbClr val="2C4A6A"/>
             </a:solidFill>
             <a:prstDash val="solid"/>
           </a:ln>
@@ -1941,7 +1941,7 @@
             <a:r>
               <a:rPr lang="en-US" sz="1150" b="1" dirty="0">
                 <a:solidFill>
-                  <a:srgbClr val="FFFFFF"/>
+                  <a:srgbClr val="BFD6EC"/>
                 </a:solidFill>
                 <a:latin typeface="Calibri" pitchFamily="34" charset="0"/>
                 <a:ea typeface="Calibri" pitchFamily="34" charset="-122"/>
@@ -4503,7 +4503,7 @@
                 <a:ea typeface="Calibri" pitchFamily="34" charset="-122"/>
                 <a:cs typeface="Calibri" pitchFamily="34" charset="-120"/>
               </a:rPr>
-              <a:t>Live in the UAE  ·  Country packs for KSA, Qatar, Kuwait, Oman, Bahrain and Libya  ·  Work permits, healthcare licences and any industry-grade permit</a:t>
+              <a:t>Country packs for the UAE, KSA, Qatar, Kuwait, Oman, Bahrain and Libya  ·  Work permits, healthcare licences and any industry-grade permit</a:t>
             </a:r>
             <a:endParaRPr lang="en-US" sz="1000" dirty="0"/>
           </a:p>
@@ -6027,7 +6027,7 @@
                 <a:ea typeface="Calibri" pitchFamily="34" charset="-122"/>
                 <a:cs typeface="Calibri" pitchFamily="34" charset="-120"/>
               </a:rPr>
-              <a:t>Three governed lifecycles, twenty-two milestones, one task inbox — running in production today.</a:t>
+              <a:t>Three governed lifecycles, twenty-two milestones, one task inbox.</a:t>
             </a:r>
             <a:endParaRPr lang="en-US" sz="1350" dirty="0"/>
           </a:p>
@@ -6607,7 +6607,7 @@
                 <a:ea typeface="Calibri" pitchFamily="34" charset="-122"/>
                 <a:cs typeface="Calibri" pitchFamily="34" charset="-120"/>
               </a:rPr>
-              <a:t>The home dashboard — running, completed and cancelled counts across all three lifecycles, over a live queue of initiated cases with priority, status and assigned agent.</a:t>
+              <a:t>The home dashboard — running, completed and cancelled counts across all three lifecycles, over a queue of initiated cases with priority, status and assigned agent.</a:t>
             </a:r>
             <a:endParaRPr lang="en-US" sz="1000" dirty="0"/>
           </a:p>
@@ -12331,11 +12331,11 @@
             </a:avLst>
           </a:prstGeom>
           <a:solidFill>
-            <a:srgbClr val="123A4E"/>
+            <a:srgbClr val="13314C"/>
           </a:solidFill>
           <a:ln w="9525">
             <a:solidFill>
-              <a:srgbClr val="12756F"/>
+              <a:srgbClr val="27415C"/>
             </a:solidFill>
             <a:prstDash val="solid"/>
           </a:ln>
@@ -12397,7 +12397,7 @@
             </a:avLst>
           </a:prstGeom>
           <a:solidFill>
-            <a:srgbClr val="17795E"/>
+            <a:srgbClr val="C9A227"/>
           </a:solidFill>
           <a:ln/>
         </p:spPr>
@@ -12429,13 +12429,13 @@
             <a:r>
               <a:rPr lang="en-US" sz="750" b="1" dirty="0">
                 <a:solidFill>
-                  <a:srgbClr val="FFFFFF"/>
-                </a:solidFill>
-                <a:latin typeface="Calibri" pitchFamily="34" charset="0"/>
-                <a:ea typeface="Calibri" pitchFamily="34" charset="-122"/>
-                <a:cs typeface="Calibri" pitchFamily="34" charset="-120"/>
-              </a:rPr>
-              <a:t>LIVE</a:t>
+                  <a:srgbClr val="0C1E33"/>
+                </a:solidFill>
+                <a:latin typeface="Calibri" pitchFamily="34" charset="0"/>
+                <a:ea typeface="Calibri" pitchFamily="34" charset="-122"/>
+                <a:cs typeface="Calibri" pitchFamily="34" charset="-120"/>
+              </a:rPr>
+              <a:t>PACK</a:t>
             </a:r>
             <a:endParaRPr lang="en-US" sz="750" dirty="0"/>
           </a:p>
@@ -12753,7 +12753,7 @@
             </a:avLst>
           </a:prstGeom>
           <a:solidFill>
-            <a:srgbClr val="16304C"/>
+            <a:srgbClr val="13314C"/>
           </a:solidFill>
           <a:ln w="9525">
             <a:solidFill>
@@ -13175,7 +13175,7 @@
             </a:avLst>
           </a:prstGeom>
           <a:solidFill>
-            <a:srgbClr val="16304C"/>
+            <a:srgbClr val="13314C"/>
           </a:solidFill>
           <a:ln w="9525">
             <a:solidFill>
@@ -13597,7 +13597,7 @@
             </a:avLst>
           </a:prstGeom>
           <a:solidFill>
-            <a:srgbClr val="16304C"/>
+            <a:srgbClr val="13314C"/>
           </a:solidFill>
           <a:ln w="9525">
             <a:solidFill>
@@ -13938,13 +13938,13 @@
             <a:r>
               <a:rPr lang="en-US" sz="950" b="1" dirty="0">
                 <a:solidFill>
-                  <a:srgbClr val="17795E"/>
-                </a:solidFill>
-                <a:latin typeface="Calibri" pitchFamily="34" charset="0"/>
-                <a:ea typeface="Calibri" pitchFamily="34" charset="-122"/>
-                <a:cs typeface="Calibri" pitchFamily="34" charset="-120"/>
-              </a:rPr>
-              <a:t>LIVE</a:t>
+                  <a:srgbClr val="C9A227"/>
+                </a:solidFill>
+                <a:latin typeface="Calibri" pitchFamily="34" charset="0"/>
+                <a:ea typeface="Calibri" pitchFamily="34" charset="-122"/>
+                <a:cs typeface="Calibri" pitchFamily="34" charset="-120"/>
+              </a:rPr>
+              <a:t>PACK</a:t>
             </a:r>
             <a:pPr indent="0" marL="0">
               <a:lnSpc>
@@ -13961,41 +13961,7 @@
                 <a:ea typeface="Calibri" pitchFamily="34" charset="-122"/>
                 <a:cs typeface="Calibri" pitchFamily="34" charset="-120"/>
               </a:rPr>
-              <a:t> = running in production today.   </a:t>
-            </a:r>
-            <a:pPr indent="0" marL="0">
-              <a:lnSpc>
-                <a:spcPts val="1300"/>
-              </a:lnSpc>
-              <a:buNone/>
-            </a:pPr>
-            <a:r>
-              <a:rPr lang="en-US" sz="950" b="1" dirty="0">
-                <a:solidFill>
-                  <a:srgbClr val="C9A227"/>
-                </a:solidFill>
-                <a:latin typeface="Calibri" pitchFamily="34" charset="0"/>
-                <a:ea typeface="Calibri" pitchFamily="34" charset="-122"/>
-                <a:cs typeface="Calibri" pitchFamily="34" charset="-120"/>
-              </a:rPr>
-              <a:t>PACK</a:t>
-            </a:r>
-            <a:pPr indent="0" marL="0">
-              <a:lnSpc>
-                <a:spcPts val="1300"/>
-              </a:lnSpc>
-              <a:buNone/>
-            </a:pPr>
-            <a:r>
-              <a:rPr lang="en-US" sz="950" dirty="0">
-                <a:solidFill>
-                  <a:srgbClr val="A9C2DA"/>
-                </a:solidFill>
-                <a:latin typeface="Calibri" pitchFamily="34" charset="0"/>
-                <a:ea typeface="Calibri" pitchFamily="34" charset="-122"/>
-                <a:cs typeface="Calibri" pitchFamily="34" charset="-120"/>
-              </a:rPr>
-              <a:t> = designed against that country’s statutory flow and configured from the same engine, with a localisation workshop confirming document names, fees and thresholds before go-live.</a:t>
+              <a:t> = the country’s statutory flow expressed as configuration on the shared engine — milestones, authorities, document checklist, mandatory fields, payment types and alert thresholds. Pre-built rather than custom-developed, with a localisation workshop confirming document names, fees and thresholds before go-live.</a:t>
             </a:r>
             <a:endParaRPr lang="en-US" sz="950" dirty="0"/>
           </a:p>
@@ -17620,7 +17586,7 @@
                 <a:ea typeface="Calibri" pitchFamily="34" charset="-122"/>
                 <a:cs typeface="Calibri" pitchFamily="34" charset="-120"/>
               </a:rPr>
-              <a:t>— and this is how the system runs in production today — the government step stays a tracked manual PRO activity, with reference number, receipt and status captured in the milestone.</a:t>
+              <a:t>the government step stays a tracked manual PRO activity, with reference number, receipt and status captured in the milestone — which is how the application is designed to operate from day one, with or without a portal connection.</a:t>
             </a:r>
             <a:endParaRPr lang="en-US" sz="840" dirty="0"/>
           </a:p>

--- a/deck/INK_IT_Visa_and_Permits_GCC.pptx
+++ b/deck/INK_IT_Visa_and_Permits_GCC.pptx
@@ -1881,7 +1881,7 @@
                 <a:ea typeface="Calibri" pitchFamily="34" charset="-122"/>
                 <a:cs typeface="Calibri" pitchFamily="34" charset="-120"/>
               </a:rPr>
-              <a:t>End-to-end governance of work permits, residency and professional licences — with every task owned, every deadline visible, and every government payment matched to a receipt and a GL account.</a:t>
+              <a:t>We govern work permits, residency and professional licences end to end. Every task has an owner, every deadline shows up early, and every government payment has a receipt and a GL code against it.</a:t>
             </a:r>
             <a:endParaRPr lang="en-US" sz="1450" dirty="0"/>
           </a:p>
@@ -2421,7 +2421,7 @@
                 <a:ea typeface="Calibri" pitchFamily="34" charset="-122"/>
                 <a:cs typeface="Calibri" pitchFamily="34" charset="-120"/>
               </a:rPr>
-              <a:t>A sales and solution overview for SAP and enterprise customers across the GCC</a:t>
+              <a:t>An overview for SAP and enterprise customers across the GCC</a:t>
             </a:r>
             <a:endParaRPr lang="en-US" sz="1050" dirty="0"/>
           </a:p>
@@ -2553,7 +2553,7 @@
                 <a:ea typeface="Arial" pitchFamily="34" charset="-122"/>
                 <a:cs typeface="Arial" pitchFamily="34" charset="-120"/>
               </a:rPr>
-              <a:t>SAP BTP services required.</a:t>
+              <a:t>What you will need on SAP BTP.</a:t>
             </a:r>
             <a:endParaRPr lang="en-US" sz="3000" dirty="0"/>
           </a:p>
@@ -4263,7 +4263,7 @@
                 <a:ea typeface="Calibri" pitchFamily="34" charset="-122"/>
                 <a:cs typeface="Calibri" pitchFamily="34" charset="-120"/>
               </a:rPr>
-              <a:t>You subscribe and operate the runtime and portal — or INK IT manages the subscription and operations entirely, removing separate developer licences.</a:t>
+              <a:t>Either you subscribe and run the runtime and portal yourself, or we manage the whole thing, which means no separate developer licences.</a:t>
             </a:r>
             <a:endParaRPr lang="en-US" sz="840" dirty="0"/>
           </a:p>
@@ -4344,7 +4344,7 @@
                 <a:ea typeface="Calibri" pitchFamily="34" charset="-122"/>
                 <a:cs typeface="Calibri" pitchFamily="34" charset="-120"/>
               </a:rPr>
-              <a:t>System-agnostic within BTP. If SF is not live yet, the non-integrated deployment still delivers full governance from day one.</a:t>
+              <a:t>If your SuccessFactors modules are not live yet, that is fine. The non-integrated version still gives you full governance from day one.</a:t>
             </a:r>
             <a:endParaRPr lang="en-US" sz="840" dirty="0"/>
           </a:p>
@@ -4425,7 +4425,7 @@
                 <a:ea typeface="Calibri" pitchFamily="34" charset="-122"/>
                 <a:cs typeface="Calibri" pitchFamily="34" charset="-120"/>
               </a:rPr>
-              <a:t>Pre-built and configurable rather than custom-developed — environment and configuration, then integration, then localisation.</a:t>
+              <a:t>Pre-built and configured rather than written from scratch: environment and configuration, then integration, then localisation.</a:t>
             </a:r>
             <a:endParaRPr lang="en-US" sz="840" dirty="0"/>
           </a:p>
@@ -4464,7 +4464,7 @@
                 <a:ea typeface="Arial" pitchFamily="34" charset="-122"/>
                 <a:cs typeface="Arial" pitchFamily="34" charset="-120"/>
               </a:rPr>
-              <a:t>Ready for the GCC, today.</a:t>
+              <a:t>Ready for the GCC.</a:t>
             </a:r>
             <a:endParaRPr lang="en-US" sz="2000" dirty="0"/>
           </a:p>
@@ -4676,7 +4676,7 @@
                 <a:ea typeface="Arial" pitchFamily="34" charset="-122"/>
                 <a:cs typeface="Arial" pitchFamily="34" charset="-120"/>
               </a:rPr>
-              <a:t>One permit. Six teams. No shared clock.</a:t>
+              <a:t>One permit, six teams, no shared clock.</a:t>
             </a:r>
             <a:endParaRPr lang="en-US" sz="3000" dirty="0"/>
           </a:p>
@@ -4718,7 +4718,7 @@
                 <a:ea typeface="Calibri" pitchFamily="34" charset="-122"/>
                 <a:cs typeface="Calibri" pitchFamily="34" charset="-120"/>
               </a:rPr>
-              <a:t>A single work permit crosses recruitment, onboarding, the PRO desk, the employee, HR and finance — and touches a government portal at least five times. Miss one hand-off and it stalls silently, usually until a fine arrives.</a:t>
+              <a:t>One work permit crosses recruitment, onboarding, the PRO desk, the employee, HR and finance, and touches a government portal at least five times. Miss a single hand-off and it just stops. Usually nobody notices until a fine turns up.</a:t>
             </a:r>
             <a:endParaRPr lang="en-US" sz="1350" dirty="0"/>
           </a:p>
@@ -4885,7 +4885,7 @@
                 <a:ea typeface="Calibri" pitchFamily="34" charset="-122"/>
                 <a:cs typeface="Calibri" pitchFamily="34" charset="-120"/>
               </a:rPr>
-              <a:t>Expiry dates sit in one person’s file. When they are on leave the company is blind — and overstay fines start at the border, not in the system.</a:t>
+              <a:t>Expiry dates sit in one person’s file. When they go on leave, the company is blind. And overstay fines start at the border, not in your system.</a:t>
             </a:r>
             <a:endParaRPr lang="en-US" sz="1050" dirty="0"/>
           </a:p>
@@ -5052,7 +5052,7 @@
                 <a:ea typeface="Calibri" pitchFamily="34" charset="-122"/>
                 <a:cs typeface="Calibri" pitchFamily="34" charset="-120"/>
               </a:rPr>
-              <a:t>Government relations officers run everything from WhatsApp, email and memory. No queue, no due date, no proof of who was asked what.</a:t>
+              <a:t>Your GROs run all of it from WhatsApp, email and memory. No queue, no due dates, no proof of who was asked what, or when.</a:t>
             </a:r>
             <a:endParaRPr lang="en-US" sz="1050" dirty="0"/>
           </a:p>
@@ -5219,7 +5219,7 @@
                 <a:ea typeface="Calibri" pitchFamily="34" charset="-122"/>
                 <a:cs typeface="Calibri" pitchFamily="34" charset="-120"/>
               </a:rPr>
-              <a:t>Typing fees, medicals, insurance and ID charges paid on cards and petty cash. Receipts arrive late, or never. Duplicates surface at audit.</a:t>
+              <a:t>Typing fees, medicals, insurance and ID charges go on cards and petty cash. Receipts turn up late, or never. You find the duplicates at audit.</a:t>
             </a:r>
             <a:endParaRPr lang="en-US" sz="1050" dirty="0"/>
           </a:p>
@@ -5386,7 +5386,7 @@
                 <a:ea typeface="Calibri" pitchFamily="34" charset="-122"/>
                 <a:cs typeface="Calibri" pitchFamily="34" charset="-120"/>
               </a:rPr>
-              <a:t>Onboarding promises a joining date. The PRO has not been told the file exists. The candidate waits abroad for a permit nobody started.</a:t>
+              <a:t>Onboarding promises a joining date. Nobody told the PRO the file exists. The candidate waits abroad for a permit that was never started.</a:t>
             </a:r>
             <a:endParaRPr lang="en-US" sz="1050" dirty="0"/>
           </a:p>
@@ -5553,7 +5553,7 @@
                 <a:ea typeface="Calibri" pitchFamily="34" charset="-122"/>
                 <a:cs typeface="Calibri" pitchFamily="34" charset="-120"/>
               </a:rPr>
-              <a:t>Quota, skill classification, profession matching, work-location alignment — rules a human must recall correctly, every time, under pressure.</a:t>
+              <a:t>Quota, skill classification, profession matching, work location. Every one is a rule somebody has to remember correctly, every time, in a hurry.</a:t>
             </a:r>
             <a:endParaRPr lang="en-US" sz="1050" dirty="0"/>
           </a:p>
@@ -5720,7 +5720,7 @@
                 <a:ea typeface="Calibri" pitchFamily="34" charset="-122"/>
                 <a:cs typeface="Calibri" pitchFamily="34" charset="-120"/>
               </a:rPr>
-              <a:t>One employee query takes three calls and a day. Multiply that across thousands of permits and several operating countries.</a:t>
+              <a:t>One employee query takes three calls and a day. Now multiply that across thousands of permits and several countries.</a:t>
             </a:r>
             <a:endParaRPr lang="en-US" sz="1050" dirty="0"/>
           </a:p>
@@ -5786,7 +5786,7 @@
                 <a:ea typeface="Calibri" pitchFamily="34" charset="-122"/>
                 <a:cs typeface="Calibri" pitchFamily="34" charset="-120"/>
               </a:rPr>
-              <a:t>The cost of getting this wrong:  </a:t>
+              <a:t>What it costs you:  </a:t>
             </a:r>
             <a:pPr indent="0" marL="0">
               <a:buNone/>
@@ -5800,7 +5800,7 @@
                 <a:ea typeface="Calibri" pitchFamily="34" charset="-122"/>
                 <a:cs typeface="Calibri" pitchFamily="34" charset="-120"/>
               </a:rPr>
-              <a:t>overstay and labour fines, blocked quotas, employees who cannot legally be rostered, and a compliance position no one can evidence to a regulator or an auditor.</a:t>
+              <a:t>overstay and labour fines, blocked quotas, employees you cannot legally roster, and a compliance position nobody can actually prove to a regulator or an auditor.</a:t>
             </a:r>
             <a:endParaRPr lang="en-US" sz="1150" dirty="0"/>
           </a:p>
@@ -5988,7 +5988,7 @@
                 <a:ea typeface="Arial" pitchFamily="34" charset="-122"/>
                 <a:cs typeface="Arial" pitchFamily="34" charset="-120"/>
               </a:rPr>
-              <a:t>A tracked runway for every permit.</a:t>
+              <a:t>Every permit on one track.</a:t>
             </a:r>
             <a:endParaRPr lang="en-US" sz="3000" dirty="0"/>
           </a:p>
@@ -6196,7 +6196,7 @@
                 <a:ea typeface="Calibri" pitchFamily="34" charset="-122"/>
                 <a:cs typeface="Calibri" pitchFamily="34" charset="-120"/>
               </a:rPr>
-              <a:t>Candidate to legally employed — offer, labour card, entry permit or status change, medical, Emirates ID.</a:t>
+              <a:t>From candidate to legally employed: offer, labour card, entry permit or status change, medical, Emirates ID.</a:t>
             </a:r>
             <a:endParaRPr lang="en-US" sz="1100" dirty="0"/>
           </a:p>
@@ -6365,7 +6365,7 @@
                 <a:ea typeface="Calibri" pitchFamily="34" charset="-122"/>
                 <a:cs typeface="Calibri" pitchFamily="34" charset="-120"/>
               </a:rPr>
-              <a:t>Driven by expiry alerts six weeks ahead — medical, contract, stamping, ID renewal and collection.</a:t>
+              <a:t>Starts from an expiry alert six weeks out: medical, contract, stamping, ID renewal and collection.</a:t>
             </a:r>
             <a:endParaRPr lang="en-US" sz="1100" dirty="0"/>
           </a:p>
@@ -6534,7 +6534,7 @@
                 <a:ea typeface="Calibri" pitchFamily="34" charset="-122"/>
                 <a:cs typeface="Calibri" pitchFamily="34" charset="-120"/>
               </a:rPr>
-              <a:t>Gated behind end-of-service settlement — cancellation forms, ministry submission, residence cancellation.</a:t>
+              <a:t>Held until end-of-service is settled: cancellation forms, ministry submission, residence cancellation.</a:t>
             </a:r>
             <a:endParaRPr lang="en-US" sz="1100" dirty="0"/>
           </a:p>
@@ -7374,7 +7374,7 @@
                 <a:ea typeface="Calibri" pitchFamily="34" charset="-122"/>
                 <a:cs typeface="Calibri" pitchFamily="34" charset="-120"/>
               </a:rPr>
-              <a:t>Each role sees only what is theirs to do, with a due date against it — which is how the PRO desk, recruitment, onboarding and employee relations stay coordinated.</a:t>
+              <a:t>Each role only sees what is actually theirs, with a due date on it. That is how the PRO desk, recruitment, onboarding and employee relations stay in step.</a:t>
             </a:r>
             <a:endParaRPr lang="en-US" sz="1300" dirty="0"/>
           </a:p>
@@ -9415,7 +9415,7 @@
                 <a:ea typeface="Arial" pitchFamily="34" charset="-122"/>
                 <a:cs typeface="Arial" pitchFamily="34" charset="-120"/>
               </a:rPr>
-              <a:t>A task with a name on it behaves differently.</a:t>
+              <a:t>Put a name on a task and it behaves differently.</a:t>
             </a:r>
             <a:endParaRPr lang="en-US" sz="3000" dirty="0"/>
           </a:p>
@@ -9454,7 +9454,7 @@
                 <a:ea typeface="Calibri" pitchFamily="34" charset="-122"/>
                 <a:cs typeface="Calibri" pitchFamily="34" charset="-120"/>
               </a:rPr>
-              <a:t>Every milestone becomes a real task with an assignee, a due date and an escalation path. Nothing sits in a grey zone where everybody assumes somebody else has it.</a:t>
+              <a:t>Every step becomes a real task with a person, a due date and somewhere to escalate. Nothing sits in that grey area where everyone assumes someone else picked it up.</a:t>
             </a:r>
             <a:endParaRPr lang="en-US" sz="1300" dirty="0"/>
           </a:p>
@@ -9635,7 +9635,7 @@
                 <a:ea typeface="Calibri" pitchFamily="34" charset="-122"/>
                 <a:cs typeface="Calibri" pitchFamily="34" charset="-120"/>
               </a:rPr>
-              <a:t>Routed to a role, then claimed by a named officer with "Assign To Yourself" — or pushed by a supervisor with "Assign Agent". Priority and due date are stamped at that moment.</a:t>
+              <a:t>It goes to a role, then a named officer picks it up with "Assign To Yourself", or a supervisor sends it over with "Assign Agent". Priority and due date are set right then.</a:t>
             </a:r>
             <a:endParaRPr lang="en-US" sz="980" dirty="0"/>
           </a:p>
@@ -9816,7 +9816,7 @@
                 <a:ea typeface="Calibri" pitchFamily="34" charset="-122"/>
                 <a:cs typeface="Calibri" pitchFamily="34" charset="-120"/>
               </a:rPr>
-              <a:t>Open tasks re-notify the assignee on a two-day cycle. Document expiries fire six weeks ahead, to the employee, the PRO and the HRBP together.</a:t>
+              <a:t>Anything still open pings the owner again every two days. Document expiries go out six weeks ahead, to the employee, the PRO and the HRBP at once.</a:t>
             </a:r>
             <a:endParaRPr lang="en-US" sz="980" dirty="0"/>
           </a:p>
@@ -9997,7 +9997,7 @@
                 <a:ea typeface="Calibri" pitchFamily="34" charset="-122"/>
                 <a:cs typeface="Calibri" pitchFamily="34" charset="-120"/>
               </a:rPr>
-              <a:t>At two weeks before expiry, or when a task passes its due date, the line escalates automatically to the HR Manager and the line manager.</a:t>
+              <a:t>Two weeks before expiry, or the moment a task goes past its due date, it escalates on its own to the HR manager and the line manager.</a:t>
             </a:r>
             <a:endParaRPr lang="en-US" sz="980" dirty="0"/>
           </a:p>
@@ -10178,7 +10178,7 @@
                 <a:ea typeface="Calibri" pitchFamily="34" charset="-122"/>
                 <a:cs typeface="Calibri" pitchFamily="34" charset="-120"/>
               </a:rPr>
-              <a:t>Who was assigned, when they were reminded, what they uploaded and when they submitted is written to the record. Audits become a report, not an investigation.</a:t>
+              <a:t>Who had it, when they were reminded, what they uploaded and when they submitted. An audit turns into a report instead of a dig through old emails.</a:t>
             </a:r>
             <a:endParaRPr lang="en-US" sz="980" dirty="0"/>
           </a:p>
@@ -10611,7 +10611,7 @@
                 <a:ea typeface="Arial" pitchFamily="34" charset="-122"/>
                 <a:cs typeface="Arial" pitchFamily="34" charset="-120"/>
               </a:rPr>
-              <a:t>No payment without a receipt and a GL account.</a:t>
+              <a:t>Nothing gets paid without a receipt and a GL code.</a:t>
             </a:r>
             <a:endParaRPr lang="en-US" sz="3000" dirty="0"/>
           </a:p>
@@ -10650,7 +10650,7 @@
                 <a:ea typeface="Calibri" pitchFamily="34" charset="-122"/>
                 <a:cs typeface="Calibri" pitchFamily="34" charset="-120"/>
               </a:rPr>
-              <a:t>Government fees are the leakiest part of permit management. Making the payment part of the task means the money cannot move without leaving a record.</a:t>
+              <a:t>Government fees are where the money leaks. Make the payment part of the task and it cannot move without leaving a trace.</a:t>
             </a:r>
             <a:endParaRPr lang="en-US" sz="1300" dirty="0"/>
           </a:p>
@@ -10817,7 +10817,7 @@
                 <a:ea typeface="Calibri" pitchFamily="34" charset="-122"/>
                 <a:cs typeface="Calibri" pitchFamily="34" charset="-120"/>
               </a:rPr>
-              <a:t>Amount, VAT, mode, date and reference are mandatory fields on the milestone form itself.</a:t>
+              <a:t>Amount, VAT, how it was paid, the date and the reference are all compulsory on the step itself.</a:t>
             </a:r>
             <a:endParaRPr lang="en-US" sz="930" dirty="0"/>
           </a:p>
@@ -10984,7 +10984,7 @@
                 <a:ea typeface="Calibri" pitchFamily="34" charset="-122"/>
                 <a:cs typeface="Calibri" pitchFamily="34" charset="-120"/>
               </a:rPr>
-              <a:t>The scanned receipt is a required attachment. No file, no submit — the milestone stays open.</a:t>
+              <a:t>The scanned receipt has to be attached. No file, no submit, and the step stays open.</a:t>
             </a:r>
             <a:endParaRPr lang="en-US" sz="930" dirty="0"/>
           </a:p>
@@ -11151,7 +11151,7 @@
                 <a:ea typeface="Calibri" pitchFamily="34" charset="-122"/>
                 <a:cs typeface="Calibri" pitchFamily="34" charset="-120"/>
               </a:rPr>
-              <a:t>Who paid, on whose card, and whether the company or the employee bears the cost.</a:t>
+              <a:t>Which card, whose card, and whether the company or the employee carries the cost.</a:t>
             </a:r>
             <a:endParaRPr lang="en-US" sz="930" dirty="0"/>
           </a:p>
@@ -11318,7 +11318,7 @@
                 <a:ea typeface="Calibri" pitchFamily="34" charset="-122"/>
                 <a:cs typeface="Calibri" pitchFamily="34" charset="-120"/>
               </a:rPr>
-              <a:t>Published to the correct GL account with a payment document number for journal posting.</a:t>
+              <a:t>Goes to the right GL account with a document number, ready to post.</a:t>
             </a:r>
             <a:endParaRPr lang="en-US" sz="930" dirty="0"/>
           </a:p>
@@ -11485,7 +11485,7 @@
                 <a:ea typeface="Calibri" pitchFamily="34" charset="-122"/>
                 <a:cs typeface="Calibri" pitchFamily="34" charset="-120"/>
               </a:rPr>
-              <a:t>Filterable by process, company, employee, date, mode or card holder — then exported.</a:t>
+              <a:t>Filter by process, company, employee, date, mode or card holder, then export it.</a:t>
             </a:r>
             <a:endParaRPr lang="en-US" sz="930" dirty="0"/>
           </a:p>
@@ -11652,7 +11652,7 @@
                 <a:ea typeface="Calibri" pitchFamily="34" charset="-122"/>
                 <a:cs typeface="Calibri" pitchFamily="34" charset="-120"/>
               </a:rPr>
-              <a:t>A reference is captured against a specific milestone of a specific case, so the same fee cannot be recorded twice against the same step.</a:t>
+              <a:t>Every reference is tied to one step of one case, so the same fee cannot be recorded twice against the same step.</a:t>
             </a:r>
             <a:endParaRPr lang="en-US" sz="900" dirty="0"/>
           </a:p>
@@ -11819,7 +11819,7 @@
                 <a:ea typeface="Calibri" pitchFamily="34" charset="-122"/>
                 <a:cs typeface="Calibri" pitchFamily="34" charset="-120"/>
               </a:rPr>
-              <a:t>Every payment leaves with a GL account and a document number. Finance reconciles from the report, not a shoebox of receipts.</a:t>
+              <a:t>Every payment leaves with a GL account and a document number. Finance reconciles from a report, not a shoebox of receipts.</a:t>
             </a:r>
             <a:endParaRPr lang="en-US" sz="900" dirty="0"/>
           </a:p>
@@ -11986,7 +11986,7 @@
                 <a:ea typeface="Calibri" pitchFamily="34" charset="-122"/>
                 <a:cs typeface="Calibri" pitchFamily="34" charset="-120"/>
               </a:rPr>
-              <a:t>Overstay, traffic, labour and immigration fines are raised by the PRO, routed via the HRBP to payroll, and stored as a deduction.</a:t>
+              <a:t>Overstay, traffic, labour and immigration fines get raised by the PRO, go through the HRBP to payroll, and sit as a deduction.</a:t>
             </a:r>
             <a:endParaRPr lang="en-US" sz="900" dirty="0"/>
           </a:p>
@@ -12269,7 +12269,7 @@
                 <a:ea typeface="Arial" pitchFamily="34" charset="-122"/>
                 <a:cs typeface="Arial" pitchFamily="34" charset="-120"/>
               </a:rPr>
-              <a:t>One engine. Seven rulebooks.</a:t>
+              <a:t>One engine, seven rulebooks.</a:t>
             </a:r>
             <a:endParaRPr lang="en-US" sz="3000" dirty="0"/>
           </a:p>
@@ -12308,7 +12308,7 @@
                 <a:ea typeface="Calibri" pitchFamily="34" charset="-122"/>
                 <a:cs typeface="Calibri" pitchFamily="34" charset="-120"/>
               </a:rPr>
-              <a:t>Labour law is national, so the process must be too. The workflow engine, task model, payment capture and reporting stay identical — what changes per country is the milestone set, the authorities, the document checklist and the alert thresholds.</a:t>
+              <a:t>Labour law is national, so the process has to be too. The engine underneath stays the same everywhere. What changes country by country is the steps, the authorities, the document checklist and when the alerts fire.</a:t>
             </a:r>
             <a:endParaRPr lang="en-US" sz="1250" dirty="0"/>
           </a:p>
@@ -14188,7 +14188,7 @@
                 <a:ea typeface="Calibri" pitchFamily="34" charset="-122"/>
                 <a:cs typeface="Calibri" pitchFamily="34" charset="-120"/>
               </a:rPr>
-              <a:t>A clinician cannot legally practise until a health regulator has verified their credentials and issued a professional licence — on its own clock, with its own renewal cycle. The application runs that as a parallel lane on the same case.</a:t>
+              <a:t>A clinician cannot legally treat anyone until a health regulator has checked their credentials and issued a professional licence. That runs on its own clock, with its own renewal cycle. We run it as a second lane on the same case.</a:t>
             </a:r>
             <a:endParaRPr lang="en-US" sz="1300" dirty="0"/>
           </a:p>
@@ -14254,7 +14254,7 @@
                 <a:ea typeface="Arial" pitchFamily="34" charset="-122"/>
                 <a:cs typeface="Arial" pitchFamily="34" charset="-120"/>
               </a:rPr>
-              <a:t>The professional licensing lane</a:t>
+              <a:t>The licensing lane, running alongside</a:t>
             </a:r>
             <a:endParaRPr lang="en-US" sz="1400" dirty="0"/>
           </a:p>
@@ -14486,7 +14486,7 @@
                 <a:ea typeface="Arial" pitchFamily="34" charset="-122"/>
                 <a:cs typeface="Arial" pitchFamily="34" charset="-120"/>
               </a:rPr>
-              <a:t>Why it fails without a system</a:t>
+              <a:t>What goes wrong without it</a:t>
             </a:r>
             <a:endParaRPr lang="en-US" sz="1400" dirty="0"/>
           </a:p>
@@ -16031,7 +16031,7 @@
                 <a:ea typeface="Arial" pitchFamily="34" charset="-122"/>
                 <a:cs typeface="Arial" pitchFamily="34" charset="-120"/>
               </a:rPr>
-              <a:t>Between the government portal and SuccessFactors.</a:t>
+              <a:t>We sit between government and SuccessFactors.</a:t>
             </a:r>
             <a:endParaRPr lang="en-US" sz="3000" dirty="0"/>
           </a:p>
@@ -16070,7 +16070,7 @@
                 <a:ea typeface="Calibri" pitchFamily="34" charset="-122"/>
                 <a:cs typeface="Calibri" pitchFamily="34" charset="-120"/>
               </a:rPr>
-              <a:t>The application sits exactly where the gap is: it takes candidates from Recruiting, drives the government-facing work, writes permit data back into Employee Central, and posts the money to finance.</a:t>
+              <a:t>That gap is where the problem lives. We take candidates from Recruiting, drive the government-facing work, write the permit details back into Employee Central, and send the money to finance.</a:t>
             </a:r>
             <a:endParaRPr lang="en-US" sz="1300" dirty="0"/>
           </a:p>
@@ -17457,7 +17457,7 @@
                 <a:ea typeface="Arial" pitchFamily="34" charset="-122"/>
                 <a:cs typeface="Arial" pitchFamily="34" charset="-120"/>
               </a:rPr>
-              <a:t>API integration — read this carefully</a:t>
+              <a:t>About government APIs</a:t>
             </a:r>
             <a:endParaRPr lang="en-US" sz="1200" dirty="0"/>
           </a:p>
@@ -17499,7 +17499,7 @@
                 <a:ea typeface="Calibri" pitchFamily="34" charset="-122"/>
                 <a:cs typeface="Calibri" pitchFamily="34" charset="-120"/>
               </a:rPr>
-              <a:t>The application is API-ready by design. </a:t>
+              <a:t>We built this ready for APIs. </a:t>
             </a:r>
             <a:pPr indent="0" marL="0">
               <a:lnSpc>
@@ -17516,7 +17516,7 @@
                 <a:ea typeface="Calibri" pitchFamily="34" charset="-122"/>
                 <a:cs typeface="Calibri" pitchFamily="34" charset="-120"/>
               </a:rPr>
-              <a:t>Every government-facing milestone is an abstracted service call, so a portal integration drops into an existing slot rather than requiring the workflow to be rebuilt.
+              <a:t>Every government-facing step is a service call with a slot waiting behind it, so connecting a portal means plugging it in rather than rebuilding the process.
 </a:t>
             </a:r>
             <a:pPr indent="0" marL="0">
@@ -17534,7 +17534,7 @@
                 <a:ea typeface="Calibri" pitchFamily="34" charset="-122"/>
                 <a:cs typeface="Calibri" pitchFamily="34" charset="-120"/>
               </a:rPr>
-              <a:t>What the customer must obtain. </a:t>
+              <a:t>What we will need from you. </a:t>
             </a:r>
             <a:pPr indent="0" marL="0">
               <a:lnSpc>
@@ -17551,7 +17551,7 @@
                 <a:ea typeface="Calibri" pitchFamily="34" charset="-122"/>
                 <a:cs typeface="Calibri" pitchFamily="34" charset="-120"/>
               </a:rPr>
-              <a:t>GCC governments do not publish open APIs, and access is granted to the employer — not to the software vendor. The customer approaches each authority directly (Qiwa and Muqeem in KSA, MOHRE and ICP in the UAE, LMRA in Bahrain) for API credentials, a specification and a sandbox under their own establishment registration. We build the connector from those.
+              <a:t>GCC governments do not publish open APIs, and when they do give access they give it to the employer, not to a software vendor. So you go to each authority yourself (Qiwa and Muqeem in Saudi, MOHRE and ICP in the UAE, LMRA in Bahrain) and ask for API credentials, the specification and a sandbox under your own establishment registration. Hand those to us and we build the connector.
 </a:t>
             </a:r>
             <a:pPr indent="0" marL="0">

--- a/deck/INK_IT_Visa_and_Permits_GCC.pptx
+++ b/deck/INK_IT_Visa_and_Permits_GCC.pptx
@@ -15,9 +15,10 @@
     <p:sldId id="263" r:id="rId9"/>
     <p:sldId id="264" r:id="rId10"/>
     <p:sldId id="265" r:id="rId11"/>
+    <p:sldId id="266" r:id="rId12"/>
   </p:sldIdLst>
   <p:notesMasterIdLst>
-    <p:notesMasterId r:id="rId12"/>
+    <p:notesMasterId r:id="rId13"/>
   </p:notesMasterIdLst>
   <p:sldSz cx="12192000" cy="6858000"/>
   <p:notesSz cx="6858000" cy="12192000"/>
@@ -599,7 +600,7 @@
           <a:p>
             <a:r>
               <a:rPr lang="en-US" dirty="0"/>
-              <a:t>Close on provisioning and commercials. The core six are non-negotiable; the rest scale with ambition. Two licensing routes matters — INK IT-managed operation is materially cheaper and is often the deciding factor.</a:t>
+              <a:t>Handle the API question head-on before the customer raises it. The value is not automating the click on the government site — it is knowing the click happened, who made it, when, what it cost and what came back.</a:t>
             </a:r>
             <a:endParaRPr lang="en-US" dirty="0"/>
           </a:p>
@@ -623,6 +624,94 @@
             <a:fld id="{F7021451-1387-4CA6-816F-3879F97B5CBC}" type="slidenum">
               <a:rPr lang="en-US"/>
               <a:t>10</a:t>
+            </a:fld>
+            <a:endParaRPr lang="en-US"/>
+          </a:p>
+        </p:txBody>
+      </p:sp>
+    </p:spTree>
+    <p:extLst>
+      <p:ext uri="{BB962C8B-B14F-4D97-AF65-F5344CB8AC3E}">
+        <p14:creationId xmlns:p14="http://schemas.microsoft.com/office/powerpoint/2010/main" val="1024086991"/>
+      </p:ext>
+    </p:extLst>
+  </p:cSld>
+  <p:clrMapOvr>
+    <a:masterClrMapping/>
+  </p:clrMapOvr>
+</p:notes>
+</file>
+
+<file path=ppt/notesSlides/notesSlide11.xml><?xml version="1.0" encoding="utf-8"?>
+<p:notes xmlns:a="http://schemas.openxmlformats.org/drawingml/2006/main" xmlns:r="http://schemas.openxmlformats.org/officeDocument/2006/relationships" xmlns:p="http://schemas.openxmlformats.org/presentationml/2006/main">
+  <p:cSld>
+    <p:spTree>
+      <p:nvGrpSpPr>
+        <p:cNvPr id="1" name=""/>
+        <p:cNvGrpSpPr/>
+        <p:nvPr/>
+      </p:nvGrpSpPr>
+      <p:grpSpPr>
+        <a:xfrm>
+          <a:off x="0" y="0"/>
+          <a:ext cx="0" cy="0"/>
+          <a:chOff x="0" y="0"/>
+          <a:chExt cx="0" cy="0"/>
+        </a:xfrm>
+      </p:grpSpPr>
+      <p:sp>
+        <p:nvSpPr>
+          <p:cNvPr id="2" name="Slide Image Placeholder 1"/>
+          <p:cNvSpPr>
+            <a:spLocks noGrp="1" noRot="1" noChangeAspect="1"/>
+          </p:cNvSpPr>
+          <p:nvPr>
+            <p:ph type="sldImg"/>
+          </p:nvPr>
+        </p:nvSpPr>
+        <p:spPr/>
+      </p:sp>
+      <p:sp>
+        <p:nvSpPr>
+          <p:cNvPr id="3" name="Notes Placeholder 2"/>
+          <p:cNvSpPr>
+            <a:spLocks noGrp="1"/>
+          </p:cNvSpPr>
+          <p:nvPr>
+            <p:ph type="body" idx="1"/>
+          </p:nvPr>
+        </p:nvSpPr>
+        <p:spPr/>
+        <p:txBody>
+          <a:bodyPr/>
+          <a:lstStyle/>
+          <a:p>
+            <a:r>
+              <a:rPr lang="en-US" dirty="0"/>
+              <a:t>Close on provisioning and commercials. The core six are non-negotiable; the rest scale with ambition. Two licensing routes matters — INK IT-managed operation is materially cheaper and is often the deciding factor.</a:t>
+            </a:r>
+            <a:endParaRPr lang="en-US" dirty="0"/>
+          </a:p>
+        </p:txBody>
+      </p:sp>
+      <p:sp>
+        <p:nvSpPr>
+          <p:cNvPr id="4" name="Slide Number Placeholder 3"/>
+          <p:cNvSpPr>
+            <a:spLocks noGrp="1"/>
+          </p:cNvSpPr>
+          <p:nvPr>
+            <p:ph type="sldNum" sz="quarter" idx="10"/>
+          </p:nvPr>
+        </p:nvSpPr>
+        <p:spPr/>
+        <p:txBody>
+          <a:bodyPr/>
+          <a:lstStyle/>
+          <a:p>
+            <a:fld id="{F7021451-1387-4CA6-816F-3879F97B5CBC}" type="slidenum">
+              <a:rPr lang="en-US"/>
+              <a:t>11</a:t>
             </a:fld>
             <a:endParaRPr lang="en-US"/>
           </a:p>
@@ -1303,7 +1392,7 @@
           <a:p>
             <a:r>
               <a:rPr lang="en-US" dirty="0"/>
-              <a:t>Handle the API question head-on before the customer raises it. The value is not automating the click on the government site — it is knowing the click happened, who made it, when, what it cost and what came back.</a:t>
+              <a:t>Walk the four sides: SuccessFactors at the top stays the system of record, the people on the left, the government on the right, finance at the bottom. Then land the dashed arrows — that is the honest part of the picture and it is usually what a technical audience is waiting to hear.</a:t>
             </a:r>
             <a:endParaRPr lang="en-US" dirty="0"/>
           </a:p>
@@ -2441,6 +2530,1749 @@
     <p:bg>
       <p:bgPr>
         <a:solidFill>
+          <a:srgbClr val="FFFFFF"/>
+        </a:solidFill>
+      </p:bgPr>
+    </p:bg>
+    <p:spTree>
+      <p:nvGrpSpPr>
+        <p:cNvPr id="1" name=""/>
+        <p:cNvGrpSpPr/>
+        <p:nvPr/>
+      </p:nvGrpSpPr>
+      <p:grpSpPr>
+        <a:xfrm>
+          <a:off x="0" y="0"/>
+          <a:ext cx="0" cy="0"/>
+          <a:chOff x="0" y="0"/>
+          <a:chExt cx="0" cy="0"/>
+        </a:xfrm>
+      </p:grpSpPr>
+      <p:sp>
+        <p:nvSpPr>
+          <p:cNvPr id="2" name="Text 0"/>
+          <p:cNvSpPr txBox="1"/>
+          <p:nvPr/>
+        </p:nvSpPr>
+        <p:spPr>
+          <a:xfrm>
+            <a:off x="548640" y="402336"/>
+            <a:ext cx="11064240" cy="237744"/>
+          </a:xfrm>
+          <a:prstGeom prst="rect">
+            <a:avLst/>
+          </a:prstGeom>
+          <a:noFill/>
+          <a:ln/>
+        </p:spPr>
+        <p:txBody>
+          <a:bodyPr wrap="square" lIns="0" tIns="0" rIns="0" bIns="0" rtlCol="0" anchor="ctr"/>
+          <a:lstStyle/>
+          <a:p>
+            <a:pPr indent="0" marL="0">
+              <a:buNone/>
+            </a:pPr>
+            <a:r>
+              <a:rPr lang="en-US" sz="1100" b="1" spc="220" kern="0" dirty="0">
+                <a:solidFill>
+                  <a:srgbClr val="20A098"/>
+                </a:solidFill>
+                <a:latin typeface="Calibri" pitchFamily="34" charset="0"/>
+                <a:ea typeface="Calibri" pitchFamily="34" charset="-122"/>
+                <a:cs typeface="Calibri" pitchFamily="34" charset="-120"/>
+              </a:rPr>
+              <a:t>ARCHITECTURE &amp; INTEGRATION</a:t>
+            </a:r>
+            <a:endParaRPr lang="en-US" sz="1100" dirty="0"/>
+          </a:p>
+        </p:txBody>
+      </p:sp>
+      <p:sp>
+        <p:nvSpPr>
+          <p:cNvPr id="3" name="Text 1"/>
+          <p:cNvSpPr txBox="1"/>
+          <p:nvPr/>
+        </p:nvSpPr>
+        <p:spPr>
+          <a:xfrm>
+            <a:off x="548640" y="658368"/>
+            <a:ext cx="11064240" cy="566928"/>
+          </a:xfrm>
+          <a:prstGeom prst="rect">
+            <a:avLst/>
+          </a:prstGeom>
+          <a:noFill/>
+          <a:ln/>
+        </p:spPr>
+        <p:txBody>
+          <a:bodyPr wrap="square" lIns="0" tIns="0" rIns="0" bIns="0" rtlCol="0" anchor="ctr"/>
+          <a:lstStyle/>
+          <a:p>
+            <a:pPr indent="0" marL="0">
+              <a:buNone/>
+            </a:pPr>
+            <a:r>
+              <a:rPr lang="en-US" sz="3000" b="1" dirty="0">
+                <a:solidFill>
+                  <a:srgbClr val="0C1E33"/>
+                </a:solidFill>
+                <a:latin typeface="Arial" pitchFamily="34" charset="0"/>
+                <a:ea typeface="Arial" pitchFamily="34" charset="-122"/>
+                <a:cs typeface="Arial" pitchFamily="34" charset="-120"/>
+              </a:rPr>
+              <a:t>We sit between government and SuccessFactors.</a:t>
+            </a:r>
+            <a:endParaRPr lang="en-US" sz="3000" dirty="0"/>
+          </a:p>
+        </p:txBody>
+      </p:sp>
+      <p:sp>
+        <p:nvSpPr>
+          <p:cNvPr id="4" name="Text 2"/>
+          <p:cNvSpPr txBox="1"/>
+          <p:nvPr/>
+        </p:nvSpPr>
+        <p:spPr>
+          <a:xfrm>
+            <a:off x="548640" y="1243584"/>
+            <a:ext cx="10424160" cy="420624"/>
+          </a:xfrm>
+          <a:prstGeom prst="rect">
+            <a:avLst/>
+          </a:prstGeom>
+          <a:noFill/>
+          <a:ln/>
+        </p:spPr>
+        <p:txBody>
+          <a:bodyPr wrap="square" lIns="0" tIns="0" rIns="0" bIns="0" rtlCol="0" anchor="ctr"/>
+          <a:lstStyle/>
+          <a:p>
+            <a:pPr indent="0" marL="0">
+              <a:buNone/>
+            </a:pPr>
+            <a:r>
+              <a:rPr lang="en-US" sz="1300" dirty="0">
+                <a:solidFill>
+                  <a:srgbClr val="5A6C82"/>
+                </a:solidFill>
+                <a:latin typeface="Calibri" pitchFamily="34" charset="0"/>
+                <a:ea typeface="Calibri" pitchFamily="34" charset="-122"/>
+                <a:cs typeface="Calibri" pitchFamily="34" charset="-120"/>
+              </a:rPr>
+              <a:t>That gap is where the problem lives. We take candidates from Recruiting, drive the government-facing work, write the permit details back into Employee Central, and send the money to finance.</a:t>
+            </a:r>
+            <a:endParaRPr lang="en-US" sz="1300" dirty="0"/>
+          </a:p>
+        </p:txBody>
+      </p:sp>
+      <p:sp>
+        <p:nvSpPr>
+          <p:cNvPr id="5" name="Shape 3"/>
+          <p:cNvSpPr/>
+          <p:nvPr/>
+        </p:nvSpPr>
+        <p:spPr>
+          <a:xfrm>
+            <a:off x="548640" y="1792224"/>
+            <a:ext cx="6903720" cy="859536"/>
+          </a:xfrm>
+          <a:prstGeom prst="roundRect">
+            <a:avLst>
+              <a:gd name="adj" fmla="val 7447"/>
+            </a:avLst>
+          </a:prstGeom>
+          <a:solidFill>
+            <a:srgbClr val="F4F6F7"/>
+          </a:solidFill>
+          <a:ln w="11430">
+            <a:solidFill>
+              <a:srgbClr val="E3E7EA"/>
+            </a:solidFill>
+            <a:prstDash val="solid"/>
+          </a:ln>
+        </p:spPr>
+      </p:sp>
+      <p:sp>
+        <p:nvSpPr>
+          <p:cNvPr id="6" name="Text 4"/>
+          <p:cNvSpPr txBox="1"/>
+          <p:nvPr/>
+        </p:nvSpPr>
+        <p:spPr>
+          <a:xfrm>
+            <a:off x="749808" y="1883664"/>
+            <a:ext cx="4572000" cy="237744"/>
+          </a:xfrm>
+          <a:prstGeom prst="rect">
+            <a:avLst/>
+          </a:prstGeom>
+          <a:noFill/>
+          <a:ln/>
+        </p:spPr>
+        <p:txBody>
+          <a:bodyPr wrap="square" lIns="0" tIns="0" rIns="0" bIns="0" rtlCol="0" anchor="ctr"/>
+          <a:lstStyle/>
+          <a:p>
+            <a:pPr indent="0" marL="0">
+              <a:buNone/>
+            </a:pPr>
+            <a:r>
+              <a:rPr lang="en-US" sz="1250" b="1" dirty="0">
+                <a:solidFill>
+                  <a:srgbClr val="0C1E33"/>
+                </a:solidFill>
+                <a:latin typeface="Arial" pitchFamily="34" charset="0"/>
+                <a:ea typeface="Arial" pitchFamily="34" charset="-122"/>
+                <a:cs typeface="Arial" pitchFamily="34" charset="-120"/>
+              </a:rPr>
+              <a:t>SAP SuccessFactors</a:t>
+            </a:r>
+            <a:endParaRPr lang="en-US" sz="1250" dirty="0"/>
+          </a:p>
+        </p:txBody>
+      </p:sp>
+      <p:sp>
+        <p:nvSpPr>
+          <p:cNvPr id="7" name="Text 5"/>
+          <p:cNvSpPr txBox="1"/>
+          <p:nvPr/>
+        </p:nvSpPr>
+        <p:spPr>
+          <a:xfrm>
+            <a:off x="749808" y="2103120"/>
+            <a:ext cx="6309360" cy="182880"/>
+          </a:xfrm>
+          <a:prstGeom prst="rect">
+            <a:avLst/>
+          </a:prstGeom>
+          <a:noFill/>
+          <a:ln/>
+        </p:spPr>
+        <p:txBody>
+          <a:bodyPr wrap="square" lIns="0" tIns="0" rIns="0" bIns="0" rtlCol="0" anchor="ctr"/>
+          <a:lstStyle/>
+          <a:p>
+            <a:pPr indent="0" marL="0">
+              <a:buNone/>
+            </a:pPr>
+            <a:r>
+              <a:rPr lang="en-US" sz="880" i="1" dirty="0">
+                <a:solidFill>
+                  <a:srgbClr val="5A6C82"/>
+                </a:solidFill>
+                <a:latin typeface="Calibri" pitchFamily="34" charset="0"/>
+                <a:ea typeface="Calibri" pitchFamily="34" charset="-122"/>
+                <a:cs typeface="Calibri" pitchFamily="34" charset="-120"/>
+              </a:rPr>
+              <a:t>Candidates, employee master, separations and expiry dates flow in</a:t>
+            </a:r>
+            <a:endParaRPr lang="en-US" sz="880" dirty="0"/>
+          </a:p>
+        </p:txBody>
+      </p:sp>
+      <p:sp>
+        <p:nvSpPr>
+          <p:cNvPr id="8" name="Shape 6"/>
+          <p:cNvSpPr/>
+          <p:nvPr/>
+        </p:nvSpPr>
+        <p:spPr>
+          <a:xfrm>
+            <a:off x="749808" y="2322576"/>
+            <a:ext cx="1175918" cy="237744"/>
+          </a:xfrm>
+          <a:prstGeom prst="roundRect">
+            <a:avLst>
+              <a:gd name="adj" fmla="val 46154"/>
+            </a:avLst>
+          </a:prstGeom>
+          <a:solidFill>
+            <a:srgbClr val="FFFFFF"/>
+          </a:solidFill>
+          <a:ln w="7620">
+            <a:solidFill>
+              <a:srgbClr val="E3E7EA"/>
+            </a:solidFill>
+            <a:prstDash val="solid"/>
+          </a:ln>
+        </p:spPr>
+      </p:sp>
+      <p:sp>
+        <p:nvSpPr>
+          <p:cNvPr id="9" name="Text 7"/>
+          <p:cNvSpPr txBox="1"/>
+          <p:nvPr/>
+        </p:nvSpPr>
+        <p:spPr>
+          <a:xfrm>
+            <a:off x="749808" y="2322576"/>
+            <a:ext cx="1175918" cy="237744"/>
+          </a:xfrm>
+          <a:prstGeom prst="rect">
+            <a:avLst/>
+          </a:prstGeom>
+          <a:noFill/>
+          <a:ln/>
+        </p:spPr>
+        <p:txBody>
+          <a:bodyPr wrap="square" lIns="0" tIns="0" rIns="0" bIns="0" rtlCol="0" anchor="ctr"/>
+          <a:lstStyle/>
+          <a:p>
+            <a:pPr algn="ctr" indent="0" marL="0">
+              <a:buNone/>
+            </a:pPr>
+            <a:r>
+              <a:rPr lang="en-US" sz="860" b="1" dirty="0">
+                <a:solidFill>
+                  <a:srgbClr val="12756F"/>
+                </a:solidFill>
+                <a:latin typeface="Calibri" pitchFamily="34" charset="0"/>
+                <a:ea typeface="Calibri" pitchFamily="34" charset="-122"/>
+                <a:cs typeface="Calibri" pitchFamily="34" charset="-120"/>
+              </a:rPr>
+              <a:t>SF Recruiting</a:t>
+            </a:r>
+            <a:endParaRPr lang="en-US" sz="860" dirty="0"/>
+          </a:p>
+        </p:txBody>
+      </p:sp>
+      <p:sp>
+        <p:nvSpPr>
+          <p:cNvPr id="10" name="Shape 8"/>
+          <p:cNvSpPr/>
+          <p:nvPr/>
+        </p:nvSpPr>
+        <p:spPr>
+          <a:xfrm>
+            <a:off x="2017166" y="2322576"/>
+            <a:ext cx="1475842" cy="237744"/>
+          </a:xfrm>
+          <a:prstGeom prst="roundRect">
+            <a:avLst>
+              <a:gd name="adj" fmla="val 46154"/>
+            </a:avLst>
+          </a:prstGeom>
+          <a:solidFill>
+            <a:srgbClr val="FFFFFF"/>
+          </a:solidFill>
+          <a:ln w="7620">
+            <a:solidFill>
+              <a:srgbClr val="E3E7EA"/>
+            </a:solidFill>
+            <a:prstDash val="solid"/>
+          </a:ln>
+        </p:spPr>
+      </p:sp>
+      <p:sp>
+        <p:nvSpPr>
+          <p:cNvPr id="11" name="Text 9"/>
+          <p:cNvSpPr txBox="1"/>
+          <p:nvPr/>
+        </p:nvSpPr>
+        <p:spPr>
+          <a:xfrm>
+            <a:off x="2017166" y="2322576"/>
+            <a:ext cx="1475842" cy="237744"/>
+          </a:xfrm>
+          <a:prstGeom prst="rect">
+            <a:avLst/>
+          </a:prstGeom>
+          <a:noFill/>
+          <a:ln/>
+        </p:spPr>
+        <p:txBody>
+          <a:bodyPr wrap="square" lIns="0" tIns="0" rIns="0" bIns="0" rtlCol="0" anchor="ctr"/>
+          <a:lstStyle/>
+          <a:p>
+            <a:pPr algn="ctr" indent="0" marL="0">
+              <a:buNone/>
+            </a:pPr>
+            <a:r>
+              <a:rPr lang="en-US" sz="860" b="1" dirty="0">
+                <a:solidFill>
+                  <a:srgbClr val="12756F"/>
+                </a:solidFill>
+                <a:latin typeface="Calibri" pitchFamily="34" charset="0"/>
+                <a:ea typeface="Calibri" pitchFamily="34" charset="-122"/>
+                <a:cs typeface="Calibri" pitchFamily="34" charset="-120"/>
+              </a:rPr>
+              <a:t>SF Onboarding 2.0</a:t>
+            </a:r>
+            <a:endParaRPr lang="en-US" sz="860" dirty="0"/>
+          </a:p>
+        </p:txBody>
+      </p:sp>
+      <p:sp>
+        <p:nvSpPr>
+          <p:cNvPr id="12" name="Shape 10"/>
+          <p:cNvSpPr/>
+          <p:nvPr/>
+        </p:nvSpPr>
+        <p:spPr>
+          <a:xfrm>
+            <a:off x="3584448" y="2322576"/>
+            <a:ext cx="1400861" cy="237744"/>
+          </a:xfrm>
+          <a:prstGeom prst="roundRect">
+            <a:avLst>
+              <a:gd name="adj" fmla="val 46154"/>
+            </a:avLst>
+          </a:prstGeom>
+          <a:solidFill>
+            <a:srgbClr val="FFFFFF"/>
+          </a:solidFill>
+          <a:ln w="7620">
+            <a:solidFill>
+              <a:srgbClr val="E3E7EA"/>
+            </a:solidFill>
+            <a:prstDash val="solid"/>
+          </a:ln>
+        </p:spPr>
+      </p:sp>
+      <p:sp>
+        <p:nvSpPr>
+          <p:cNvPr id="13" name="Text 11"/>
+          <p:cNvSpPr txBox="1"/>
+          <p:nvPr/>
+        </p:nvSpPr>
+        <p:spPr>
+          <a:xfrm>
+            <a:off x="3584448" y="2322576"/>
+            <a:ext cx="1400861" cy="237744"/>
+          </a:xfrm>
+          <a:prstGeom prst="rect">
+            <a:avLst/>
+          </a:prstGeom>
+          <a:noFill/>
+          <a:ln/>
+        </p:spPr>
+        <p:txBody>
+          <a:bodyPr wrap="square" lIns="0" tIns="0" rIns="0" bIns="0" rtlCol="0" anchor="ctr"/>
+          <a:lstStyle/>
+          <a:p>
+            <a:pPr algn="ctr" indent="0" marL="0">
+              <a:buNone/>
+            </a:pPr>
+            <a:r>
+              <a:rPr lang="en-US" sz="860" b="1" dirty="0">
+                <a:solidFill>
+                  <a:srgbClr val="12756F"/>
+                </a:solidFill>
+                <a:latin typeface="Calibri" pitchFamily="34" charset="0"/>
+                <a:ea typeface="Calibri" pitchFamily="34" charset="-122"/>
+                <a:cs typeface="Calibri" pitchFamily="34" charset="-120"/>
+              </a:rPr>
+              <a:t>Employee Central</a:t>
+            </a:r>
+            <a:endParaRPr lang="en-US" sz="860" dirty="0"/>
+          </a:p>
+        </p:txBody>
+      </p:sp>
+      <p:sp>
+        <p:nvSpPr>
+          <p:cNvPr id="14" name="Shape 12"/>
+          <p:cNvSpPr/>
+          <p:nvPr/>
+        </p:nvSpPr>
+        <p:spPr>
+          <a:xfrm>
+            <a:off x="5076749" y="2322576"/>
+            <a:ext cx="1100938" cy="237744"/>
+          </a:xfrm>
+          <a:prstGeom prst="roundRect">
+            <a:avLst>
+              <a:gd name="adj" fmla="val 46154"/>
+            </a:avLst>
+          </a:prstGeom>
+          <a:solidFill>
+            <a:srgbClr val="FFFFFF"/>
+          </a:solidFill>
+          <a:ln w="7620">
+            <a:solidFill>
+              <a:srgbClr val="E3E7EA"/>
+            </a:solidFill>
+            <a:prstDash val="solid"/>
+          </a:ln>
+        </p:spPr>
+      </p:sp>
+      <p:sp>
+        <p:nvSpPr>
+          <p:cNvPr id="15" name="Text 13"/>
+          <p:cNvSpPr txBox="1"/>
+          <p:nvPr/>
+        </p:nvSpPr>
+        <p:spPr>
+          <a:xfrm>
+            <a:off x="5076749" y="2322576"/>
+            <a:ext cx="1100938" cy="237744"/>
+          </a:xfrm>
+          <a:prstGeom prst="rect">
+            <a:avLst/>
+          </a:prstGeom>
+          <a:noFill/>
+          <a:ln/>
+        </p:spPr>
+        <p:txBody>
+          <a:bodyPr wrap="square" lIns="0" tIns="0" rIns="0" bIns="0" rtlCol="0" anchor="ctr"/>
+          <a:lstStyle/>
+          <a:p>
+            <a:pPr algn="ctr" indent="0" marL="0">
+              <a:buNone/>
+            </a:pPr>
+            <a:r>
+              <a:rPr lang="en-US" sz="860" b="1" dirty="0">
+                <a:solidFill>
+                  <a:srgbClr val="12756F"/>
+                </a:solidFill>
+                <a:latin typeface="Calibri" pitchFamily="34" charset="0"/>
+                <a:ea typeface="Calibri" pitchFamily="34" charset="-122"/>
+                <a:cs typeface="Calibri" pitchFamily="34" charset="-120"/>
+              </a:rPr>
+              <a:t>SF Work Zone</a:t>
+            </a:r>
+            <a:endParaRPr lang="en-US" sz="860" dirty="0"/>
+          </a:p>
+        </p:txBody>
+      </p:sp>
+      <p:sp>
+        <p:nvSpPr>
+          <p:cNvPr id="16" name="Shape 14"/>
+          <p:cNvSpPr/>
+          <p:nvPr/>
+        </p:nvSpPr>
+        <p:spPr>
+          <a:xfrm rot="5400000">
+            <a:off x="3703320" y="2683764"/>
+            <a:ext cx="566928" cy="201168"/>
+          </a:xfrm>
+          <a:prstGeom prst="chevron">
+            <a:avLst/>
+          </a:prstGeom>
+          <a:solidFill>
+            <a:srgbClr val="C3CDD4"/>
+          </a:solidFill>
+          <a:ln/>
+        </p:spPr>
+      </p:sp>
+      <p:sp>
+        <p:nvSpPr>
+          <p:cNvPr id="17" name="Shape 15"/>
+          <p:cNvSpPr/>
+          <p:nvPr/>
+        </p:nvSpPr>
+        <p:spPr>
+          <a:xfrm>
+            <a:off x="548640" y="2926080"/>
+            <a:ext cx="6903720" cy="1042416"/>
+          </a:xfrm>
+          <a:prstGeom prst="roundRect">
+            <a:avLst>
+              <a:gd name="adj" fmla="val 6140"/>
+            </a:avLst>
+          </a:prstGeom>
+          <a:solidFill>
+            <a:srgbClr val="20A098"/>
+          </a:solidFill>
+          <a:ln w="11430">
+            <a:solidFill>
+              <a:srgbClr val="12756F"/>
+            </a:solidFill>
+            <a:prstDash val="solid"/>
+          </a:ln>
+        </p:spPr>
+      </p:sp>
+      <p:sp>
+        <p:nvSpPr>
+          <p:cNvPr id="18" name="Text 16"/>
+          <p:cNvSpPr txBox="1"/>
+          <p:nvPr/>
+        </p:nvSpPr>
+        <p:spPr>
+          <a:xfrm>
+            <a:off x="749808" y="3017520"/>
+            <a:ext cx="4572000" cy="237744"/>
+          </a:xfrm>
+          <a:prstGeom prst="rect">
+            <a:avLst/>
+          </a:prstGeom>
+          <a:noFill/>
+          <a:ln/>
+        </p:spPr>
+        <p:txBody>
+          <a:bodyPr wrap="square" lIns="0" tIns="0" rIns="0" bIns="0" rtlCol="0" anchor="ctr"/>
+          <a:lstStyle/>
+          <a:p>
+            <a:pPr indent="0" marL="0">
+              <a:buNone/>
+            </a:pPr>
+            <a:r>
+              <a:rPr lang="en-US" sz="1250" b="1" dirty="0">
+                <a:solidFill>
+                  <a:srgbClr val="FFFFFF"/>
+                </a:solidFill>
+                <a:latin typeface="Arial" pitchFamily="34" charset="0"/>
+                <a:ea typeface="Arial" pitchFamily="34" charset="-122"/>
+                <a:cs typeface="Arial" pitchFamily="34" charset="-120"/>
+              </a:rPr>
+              <a:t>Visa &amp; Permits on SAP BTP</a:t>
+            </a:r>
+            <a:endParaRPr lang="en-US" sz="1250" dirty="0"/>
+          </a:p>
+        </p:txBody>
+      </p:sp>
+      <p:sp>
+        <p:nvSpPr>
+          <p:cNvPr id="19" name="Text 17"/>
+          <p:cNvSpPr txBox="1"/>
+          <p:nvPr/>
+        </p:nvSpPr>
+        <p:spPr>
+          <a:xfrm>
+            <a:off x="749808" y="3236976"/>
+            <a:ext cx="6309360" cy="182880"/>
+          </a:xfrm>
+          <a:prstGeom prst="rect">
+            <a:avLst/>
+          </a:prstGeom>
+          <a:noFill/>
+          <a:ln/>
+        </p:spPr>
+        <p:txBody>
+          <a:bodyPr wrap="square" lIns="0" tIns="0" rIns="0" bIns="0" rtlCol="0" anchor="ctr"/>
+          <a:lstStyle/>
+          <a:p>
+            <a:pPr indent="0" marL="0">
+              <a:buNone/>
+            </a:pPr>
+            <a:r>
+              <a:rPr lang="en-US" sz="880" i="1" dirty="0">
+                <a:solidFill>
+                  <a:srgbClr val="CFEFEB"/>
+                </a:solidFill>
+                <a:latin typeface="Calibri" pitchFamily="34" charset="0"/>
+                <a:ea typeface="Calibri" pitchFamily="34" charset="-122"/>
+                <a:cs typeface="Calibri" pitchFamily="34" charset="-120"/>
+              </a:rPr>
+              <a:t>The governed layer — where the work is actually managed</a:t>
+            </a:r>
+            <a:endParaRPr lang="en-US" sz="880" dirty="0"/>
+          </a:p>
+        </p:txBody>
+      </p:sp>
+      <p:sp>
+        <p:nvSpPr>
+          <p:cNvPr id="20" name="Shape 18"/>
+          <p:cNvSpPr/>
+          <p:nvPr/>
+        </p:nvSpPr>
+        <p:spPr>
+          <a:xfrm>
+            <a:off x="749808" y="3456432"/>
+            <a:ext cx="1775765" cy="237744"/>
+          </a:xfrm>
+          <a:prstGeom prst="roundRect">
+            <a:avLst>
+              <a:gd name="adj" fmla="val 46154"/>
+            </a:avLst>
+          </a:prstGeom>
+          <a:solidFill>
+            <a:srgbClr val="12756F"/>
+          </a:solidFill>
+          <a:ln w="7620">
+            <a:solidFill>
+              <a:srgbClr val="0E5F5A"/>
+            </a:solidFill>
+            <a:prstDash val="solid"/>
+          </a:ln>
+        </p:spPr>
+      </p:sp>
+      <p:sp>
+        <p:nvSpPr>
+          <p:cNvPr id="21" name="Text 19"/>
+          <p:cNvSpPr txBox="1"/>
+          <p:nvPr/>
+        </p:nvSpPr>
+        <p:spPr>
+          <a:xfrm>
+            <a:off x="749808" y="3456432"/>
+            <a:ext cx="1775765" cy="237744"/>
+          </a:xfrm>
+          <a:prstGeom prst="rect">
+            <a:avLst/>
+          </a:prstGeom>
+          <a:noFill/>
+          <a:ln/>
+        </p:spPr>
+        <p:txBody>
+          <a:bodyPr wrap="square" lIns="0" tIns="0" rIns="0" bIns="0" rtlCol="0" anchor="ctr"/>
+          <a:lstStyle/>
+          <a:p>
+            <a:pPr algn="ctr" indent="0" marL="0">
+              <a:buNone/>
+            </a:pPr>
+            <a:r>
+              <a:rPr lang="en-US" sz="860" b="1" dirty="0">
+                <a:solidFill>
+                  <a:srgbClr val="FFFFFF"/>
+                </a:solidFill>
+                <a:latin typeface="Calibri" pitchFamily="34" charset="0"/>
+                <a:ea typeface="Calibri" pitchFamily="34" charset="-122"/>
+                <a:cs typeface="Calibri" pitchFamily="34" charset="-120"/>
+              </a:rPr>
+              <a:t>Workflow &amp; milestones</a:t>
+            </a:r>
+            <a:endParaRPr lang="en-US" sz="860" dirty="0"/>
+          </a:p>
+        </p:txBody>
+      </p:sp>
+      <p:sp>
+        <p:nvSpPr>
+          <p:cNvPr id="22" name="Shape 20"/>
+          <p:cNvSpPr/>
+          <p:nvPr/>
+        </p:nvSpPr>
+        <p:spPr>
+          <a:xfrm>
+            <a:off x="2617013" y="3456432"/>
+            <a:ext cx="1925726" cy="237744"/>
+          </a:xfrm>
+          <a:prstGeom prst="roundRect">
+            <a:avLst>
+              <a:gd name="adj" fmla="val 46154"/>
+            </a:avLst>
+          </a:prstGeom>
+          <a:solidFill>
+            <a:srgbClr val="12756F"/>
+          </a:solidFill>
+          <a:ln w="7620">
+            <a:solidFill>
+              <a:srgbClr val="0E5F5A"/>
+            </a:solidFill>
+            <a:prstDash val="solid"/>
+          </a:ln>
+        </p:spPr>
+      </p:sp>
+      <p:sp>
+        <p:nvSpPr>
+          <p:cNvPr id="23" name="Text 21"/>
+          <p:cNvSpPr txBox="1"/>
+          <p:nvPr/>
+        </p:nvSpPr>
+        <p:spPr>
+          <a:xfrm>
+            <a:off x="2617013" y="3456432"/>
+            <a:ext cx="1925726" cy="237744"/>
+          </a:xfrm>
+          <a:prstGeom prst="rect">
+            <a:avLst/>
+          </a:prstGeom>
+          <a:noFill/>
+          <a:ln/>
+        </p:spPr>
+        <p:txBody>
+          <a:bodyPr wrap="square" lIns="0" tIns="0" rIns="0" bIns="0" rtlCol="0" anchor="ctr"/>
+          <a:lstStyle/>
+          <a:p>
+            <a:pPr algn="ctr" indent="0" marL="0">
+              <a:buNone/>
+            </a:pPr>
+            <a:r>
+              <a:rPr lang="en-US" sz="860" b="1" dirty="0">
+                <a:solidFill>
+                  <a:srgbClr val="FFFFFF"/>
+                </a:solidFill>
+                <a:latin typeface="Calibri" pitchFamily="34" charset="0"/>
+                <a:ea typeface="Calibri" pitchFamily="34" charset="-122"/>
+                <a:cs typeface="Calibri" pitchFamily="34" charset="-120"/>
+              </a:rPr>
+              <a:t>Task inbox &amp; escalation</a:t>
+            </a:r>
+            <a:endParaRPr lang="en-US" sz="860" dirty="0"/>
+          </a:p>
+        </p:txBody>
+      </p:sp>
+      <p:sp>
+        <p:nvSpPr>
+          <p:cNvPr id="24" name="Shape 22"/>
+          <p:cNvSpPr/>
+          <p:nvPr/>
+        </p:nvSpPr>
+        <p:spPr>
+          <a:xfrm>
+            <a:off x="4634179" y="3456432"/>
+            <a:ext cx="875995" cy="237744"/>
+          </a:xfrm>
+          <a:prstGeom prst="roundRect">
+            <a:avLst>
+              <a:gd name="adj" fmla="val 46154"/>
+            </a:avLst>
+          </a:prstGeom>
+          <a:solidFill>
+            <a:srgbClr val="12756F"/>
+          </a:solidFill>
+          <a:ln w="7620">
+            <a:solidFill>
+              <a:srgbClr val="0E5F5A"/>
+            </a:solidFill>
+            <a:prstDash val="solid"/>
+          </a:ln>
+        </p:spPr>
+      </p:sp>
+      <p:sp>
+        <p:nvSpPr>
+          <p:cNvPr id="25" name="Text 23"/>
+          <p:cNvSpPr txBox="1"/>
+          <p:nvPr/>
+        </p:nvSpPr>
+        <p:spPr>
+          <a:xfrm>
+            <a:off x="4634179" y="3456432"/>
+            <a:ext cx="875995" cy="237744"/>
+          </a:xfrm>
+          <a:prstGeom prst="rect">
+            <a:avLst/>
+          </a:prstGeom>
+          <a:noFill/>
+          <a:ln/>
+        </p:spPr>
+        <p:txBody>
+          <a:bodyPr wrap="square" lIns="0" tIns="0" rIns="0" bIns="0" rtlCol="0" anchor="ctr"/>
+          <a:lstStyle/>
+          <a:p>
+            <a:pPr algn="ctr" indent="0" marL="0">
+              <a:buNone/>
+            </a:pPr>
+            <a:r>
+              <a:rPr lang="en-US" sz="860" b="1" dirty="0">
+                <a:solidFill>
+                  <a:srgbClr val="FFFFFF"/>
+                </a:solidFill>
+                <a:latin typeface="Calibri" pitchFamily="34" charset="0"/>
+                <a:ea typeface="Calibri" pitchFamily="34" charset="-122"/>
+                <a:cs typeface="Calibri" pitchFamily="34" charset="-120"/>
+              </a:rPr>
+              <a:t>Documents</a:t>
+            </a:r>
+            <a:endParaRPr lang="en-US" sz="860" dirty="0"/>
+          </a:p>
+        </p:txBody>
+      </p:sp>
+      <p:sp>
+        <p:nvSpPr>
+          <p:cNvPr id="26" name="Shape 24"/>
+          <p:cNvSpPr/>
+          <p:nvPr/>
+        </p:nvSpPr>
+        <p:spPr>
+          <a:xfrm>
+            <a:off x="5601614" y="3456432"/>
+            <a:ext cx="801014" cy="237744"/>
+          </a:xfrm>
+          <a:prstGeom prst="roundRect">
+            <a:avLst>
+              <a:gd name="adj" fmla="val 46154"/>
+            </a:avLst>
+          </a:prstGeom>
+          <a:solidFill>
+            <a:srgbClr val="12756F"/>
+          </a:solidFill>
+          <a:ln w="7620">
+            <a:solidFill>
+              <a:srgbClr val="0E5F5A"/>
+            </a:solidFill>
+            <a:prstDash val="solid"/>
+          </a:ln>
+        </p:spPr>
+      </p:sp>
+      <p:sp>
+        <p:nvSpPr>
+          <p:cNvPr id="27" name="Text 25"/>
+          <p:cNvSpPr txBox="1"/>
+          <p:nvPr/>
+        </p:nvSpPr>
+        <p:spPr>
+          <a:xfrm>
+            <a:off x="5601614" y="3456432"/>
+            <a:ext cx="801014" cy="237744"/>
+          </a:xfrm>
+          <a:prstGeom prst="rect">
+            <a:avLst/>
+          </a:prstGeom>
+          <a:noFill/>
+          <a:ln/>
+        </p:spPr>
+        <p:txBody>
+          <a:bodyPr wrap="square" lIns="0" tIns="0" rIns="0" bIns="0" rtlCol="0" anchor="ctr"/>
+          <a:lstStyle/>
+          <a:p>
+            <a:pPr algn="ctr" indent="0" marL="0">
+              <a:buNone/>
+            </a:pPr>
+            <a:r>
+              <a:rPr lang="en-US" sz="860" b="1" dirty="0">
+                <a:solidFill>
+                  <a:srgbClr val="FFFFFF"/>
+                </a:solidFill>
+                <a:latin typeface="Calibri" pitchFamily="34" charset="0"/>
+                <a:ea typeface="Calibri" pitchFamily="34" charset="-122"/>
+                <a:cs typeface="Calibri" pitchFamily="34" charset="-120"/>
+              </a:rPr>
+              <a:t>Payments</a:t>
+            </a:r>
+            <a:endParaRPr lang="en-US" sz="860" dirty="0"/>
+          </a:p>
+        </p:txBody>
+      </p:sp>
+      <p:sp>
+        <p:nvSpPr>
+          <p:cNvPr id="28" name="Shape 26"/>
+          <p:cNvSpPr/>
+          <p:nvPr/>
+        </p:nvSpPr>
+        <p:spPr>
+          <a:xfrm>
+            <a:off x="749808" y="3730752"/>
+            <a:ext cx="1250899" cy="237744"/>
+          </a:xfrm>
+          <a:prstGeom prst="roundRect">
+            <a:avLst>
+              <a:gd name="adj" fmla="val 46154"/>
+            </a:avLst>
+          </a:prstGeom>
+          <a:solidFill>
+            <a:srgbClr val="12756F"/>
+          </a:solidFill>
+          <a:ln w="7620">
+            <a:solidFill>
+              <a:srgbClr val="0E5F5A"/>
+            </a:solidFill>
+            <a:prstDash val="solid"/>
+          </a:ln>
+        </p:spPr>
+      </p:sp>
+      <p:sp>
+        <p:nvSpPr>
+          <p:cNvPr id="29" name="Text 27"/>
+          <p:cNvSpPr txBox="1"/>
+          <p:nvPr/>
+        </p:nvSpPr>
+        <p:spPr>
+          <a:xfrm>
+            <a:off x="749808" y="3730752"/>
+            <a:ext cx="1250899" cy="237744"/>
+          </a:xfrm>
+          <a:prstGeom prst="rect">
+            <a:avLst/>
+          </a:prstGeom>
+          <a:noFill/>
+          <a:ln/>
+        </p:spPr>
+        <p:txBody>
+          <a:bodyPr wrap="square" lIns="0" tIns="0" rIns="0" bIns="0" rtlCol="0" anchor="ctr"/>
+          <a:lstStyle/>
+          <a:p>
+            <a:pPr algn="ctr" indent="0" marL="0">
+              <a:buNone/>
+            </a:pPr>
+            <a:r>
+              <a:rPr lang="en-US" sz="860" b="1" dirty="0">
+                <a:solidFill>
+                  <a:srgbClr val="FFFFFF"/>
+                </a:solidFill>
+                <a:latin typeface="Calibri" pitchFamily="34" charset="0"/>
+                <a:ea typeface="Calibri" pitchFamily="34" charset="-122"/>
+                <a:cs typeface="Calibri" pitchFamily="34" charset="-120"/>
+              </a:rPr>
+              <a:t>Quota register</a:t>
+            </a:r>
+            <a:endParaRPr lang="en-US" sz="860" dirty="0"/>
+          </a:p>
+        </p:txBody>
+      </p:sp>
+      <p:sp>
+        <p:nvSpPr>
+          <p:cNvPr id="30" name="Shape 28"/>
+          <p:cNvSpPr/>
+          <p:nvPr/>
+        </p:nvSpPr>
+        <p:spPr>
+          <a:xfrm>
+            <a:off x="2092147" y="3730752"/>
+            <a:ext cx="875995" cy="237744"/>
+          </a:xfrm>
+          <a:prstGeom prst="roundRect">
+            <a:avLst>
+              <a:gd name="adj" fmla="val 46154"/>
+            </a:avLst>
+          </a:prstGeom>
+          <a:solidFill>
+            <a:srgbClr val="12756F"/>
+          </a:solidFill>
+          <a:ln w="7620">
+            <a:solidFill>
+              <a:srgbClr val="0E5F5A"/>
+            </a:solidFill>
+            <a:prstDash val="solid"/>
+          </a:ln>
+        </p:spPr>
+      </p:sp>
+      <p:sp>
+        <p:nvSpPr>
+          <p:cNvPr id="31" name="Text 29"/>
+          <p:cNvSpPr txBox="1"/>
+          <p:nvPr/>
+        </p:nvSpPr>
+        <p:spPr>
+          <a:xfrm>
+            <a:off x="2092147" y="3730752"/>
+            <a:ext cx="875995" cy="237744"/>
+          </a:xfrm>
+          <a:prstGeom prst="rect">
+            <a:avLst/>
+          </a:prstGeom>
+          <a:noFill/>
+          <a:ln/>
+        </p:spPr>
+        <p:txBody>
+          <a:bodyPr wrap="square" lIns="0" tIns="0" rIns="0" bIns="0" rtlCol="0" anchor="ctr"/>
+          <a:lstStyle/>
+          <a:p>
+            <a:pPr algn="ctr" indent="0" marL="0">
+              <a:buNone/>
+            </a:pPr>
+            <a:r>
+              <a:rPr lang="en-US" sz="860" b="1" dirty="0">
+                <a:solidFill>
+                  <a:srgbClr val="FFFFFF"/>
+                </a:solidFill>
+                <a:latin typeface="Calibri" pitchFamily="34" charset="0"/>
+                <a:ea typeface="Calibri" pitchFamily="34" charset="-122"/>
+                <a:cs typeface="Calibri" pitchFamily="34" charset="-120"/>
+              </a:rPr>
+              <a:t>Reporting</a:t>
+            </a:r>
+            <a:endParaRPr lang="en-US" sz="860" dirty="0"/>
+          </a:p>
+        </p:txBody>
+      </p:sp>
+      <p:sp>
+        <p:nvSpPr>
+          <p:cNvPr id="32" name="Shape 30"/>
+          <p:cNvSpPr/>
+          <p:nvPr/>
+        </p:nvSpPr>
+        <p:spPr>
+          <a:xfrm rot="5400000">
+            <a:off x="3703320" y="4000500"/>
+            <a:ext cx="566928" cy="201168"/>
+          </a:xfrm>
+          <a:prstGeom prst="chevron">
+            <a:avLst/>
+          </a:prstGeom>
+          <a:solidFill>
+            <a:srgbClr val="C3CDD4"/>
+          </a:solidFill>
+          <a:ln/>
+        </p:spPr>
+      </p:sp>
+      <p:sp>
+        <p:nvSpPr>
+          <p:cNvPr id="33" name="Shape 31"/>
+          <p:cNvSpPr/>
+          <p:nvPr/>
+        </p:nvSpPr>
+        <p:spPr>
+          <a:xfrm>
+            <a:off x="548640" y="4242816"/>
+            <a:ext cx="6903720" cy="859536"/>
+          </a:xfrm>
+          <a:prstGeom prst="roundRect">
+            <a:avLst>
+              <a:gd name="adj" fmla="val 7447"/>
+            </a:avLst>
+          </a:prstGeom>
+          <a:solidFill>
+            <a:srgbClr val="F4F6F7"/>
+          </a:solidFill>
+          <a:ln w="11430">
+            <a:solidFill>
+              <a:srgbClr val="E3E7EA"/>
+            </a:solidFill>
+            <a:prstDash val="solid"/>
+          </a:ln>
+        </p:spPr>
+      </p:sp>
+      <p:sp>
+        <p:nvSpPr>
+          <p:cNvPr id="34" name="Text 32"/>
+          <p:cNvSpPr txBox="1"/>
+          <p:nvPr/>
+        </p:nvSpPr>
+        <p:spPr>
+          <a:xfrm>
+            <a:off x="749808" y="4334256"/>
+            <a:ext cx="4572000" cy="237744"/>
+          </a:xfrm>
+          <a:prstGeom prst="rect">
+            <a:avLst/>
+          </a:prstGeom>
+          <a:noFill/>
+          <a:ln/>
+        </p:spPr>
+        <p:txBody>
+          <a:bodyPr wrap="square" lIns="0" tIns="0" rIns="0" bIns="0" rtlCol="0" anchor="ctr"/>
+          <a:lstStyle/>
+          <a:p>
+            <a:pPr indent="0" marL="0">
+              <a:buNone/>
+            </a:pPr>
+            <a:r>
+              <a:rPr lang="en-US" sz="1250" b="1" dirty="0">
+                <a:solidFill>
+                  <a:srgbClr val="0C1E33"/>
+                </a:solidFill>
+                <a:latin typeface="Arial" pitchFamily="34" charset="0"/>
+                <a:ea typeface="Arial" pitchFamily="34" charset="-122"/>
+                <a:cs typeface="Arial" pitchFamily="34" charset="-120"/>
+              </a:rPr>
+              <a:t>SAP S/4HANA Finance</a:t>
+            </a:r>
+            <a:endParaRPr lang="en-US" sz="1250" dirty="0"/>
+          </a:p>
+        </p:txBody>
+      </p:sp>
+      <p:sp>
+        <p:nvSpPr>
+          <p:cNvPr id="35" name="Text 33"/>
+          <p:cNvSpPr txBox="1"/>
+          <p:nvPr/>
+        </p:nvSpPr>
+        <p:spPr>
+          <a:xfrm>
+            <a:off x="749808" y="4553712"/>
+            <a:ext cx="6309360" cy="182880"/>
+          </a:xfrm>
+          <a:prstGeom prst="rect">
+            <a:avLst/>
+          </a:prstGeom>
+          <a:noFill/>
+          <a:ln/>
+        </p:spPr>
+        <p:txBody>
+          <a:bodyPr wrap="square" lIns="0" tIns="0" rIns="0" bIns="0" rtlCol="0" anchor="ctr"/>
+          <a:lstStyle/>
+          <a:p>
+            <a:pPr indent="0" marL="0">
+              <a:buNone/>
+            </a:pPr>
+            <a:r>
+              <a:rPr lang="en-US" sz="880" i="1" dirty="0">
+                <a:solidFill>
+                  <a:srgbClr val="5A6C82"/>
+                </a:solidFill>
+                <a:latin typeface="Calibri" pitchFamily="34" charset="0"/>
+                <a:ea typeface="Calibri" pitchFamily="34" charset="-122"/>
+                <a:cs typeface="Calibri" pitchFamily="34" charset="-120"/>
+              </a:rPr>
+              <a:t>Permit costs and approved fine deductions post outward</a:t>
+            </a:r>
+            <a:endParaRPr lang="en-US" sz="880" dirty="0"/>
+          </a:p>
+        </p:txBody>
+      </p:sp>
+      <p:sp>
+        <p:nvSpPr>
+          <p:cNvPr id="36" name="Shape 34"/>
+          <p:cNvSpPr/>
+          <p:nvPr/>
+        </p:nvSpPr>
+        <p:spPr>
+          <a:xfrm>
+            <a:off x="749808" y="4773168"/>
+            <a:ext cx="1250899" cy="237744"/>
+          </a:xfrm>
+          <a:prstGeom prst="roundRect">
+            <a:avLst>
+              <a:gd name="adj" fmla="val 46154"/>
+            </a:avLst>
+          </a:prstGeom>
+          <a:solidFill>
+            <a:srgbClr val="FFFFFF"/>
+          </a:solidFill>
+          <a:ln w="7620">
+            <a:solidFill>
+              <a:srgbClr val="E3E7EA"/>
+            </a:solidFill>
+            <a:prstDash val="solid"/>
+          </a:ln>
+        </p:spPr>
+      </p:sp>
+      <p:sp>
+        <p:nvSpPr>
+          <p:cNvPr id="37" name="Text 35"/>
+          <p:cNvSpPr txBox="1"/>
+          <p:nvPr/>
+        </p:nvSpPr>
+        <p:spPr>
+          <a:xfrm>
+            <a:off x="749808" y="4773168"/>
+            <a:ext cx="1250899" cy="237744"/>
+          </a:xfrm>
+          <a:prstGeom prst="rect">
+            <a:avLst/>
+          </a:prstGeom>
+          <a:noFill/>
+          <a:ln/>
+        </p:spPr>
+        <p:txBody>
+          <a:bodyPr wrap="square" lIns="0" tIns="0" rIns="0" bIns="0" rtlCol="0" anchor="ctr"/>
+          <a:lstStyle/>
+          <a:p>
+            <a:pPr algn="ctr" indent="0" marL="0">
+              <a:buNone/>
+            </a:pPr>
+            <a:r>
+              <a:rPr lang="en-US" sz="860" b="1" dirty="0">
+                <a:solidFill>
+                  <a:srgbClr val="12756F"/>
+                </a:solidFill>
+                <a:latin typeface="Calibri" pitchFamily="34" charset="0"/>
+                <a:ea typeface="Calibri" pitchFamily="34" charset="-122"/>
+                <a:cs typeface="Calibri" pitchFamily="34" charset="-120"/>
+              </a:rPr>
+              <a:t>Payments to GL</a:t>
+            </a:r>
+            <a:endParaRPr lang="en-US" sz="860" dirty="0"/>
+          </a:p>
+        </p:txBody>
+      </p:sp>
+      <p:sp>
+        <p:nvSpPr>
+          <p:cNvPr id="38" name="Shape 36"/>
+          <p:cNvSpPr/>
+          <p:nvPr/>
+        </p:nvSpPr>
+        <p:spPr>
+          <a:xfrm>
+            <a:off x="2092147" y="4773168"/>
+            <a:ext cx="1325880" cy="237744"/>
+          </a:xfrm>
+          <a:prstGeom prst="roundRect">
+            <a:avLst>
+              <a:gd name="adj" fmla="val 46154"/>
+            </a:avLst>
+          </a:prstGeom>
+          <a:solidFill>
+            <a:srgbClr val="FFFFFF"/>
+          </a:solidFill>
+          <a:ln w="7620">
+            <a:solidFill>
+              <a:srgbClr val="E3E7EA"/>
+            </a:solidFill>
+            <a:prstDash val="solid"/>
+          </a:ln>
+        </p:spPr>
+      </p:sp>
+      <p:sp>
+        <p:nvSpPr>
+          <p:cNvPr id="39" name="Text 37"/>
+          <p:cNvSpPr txBox="1"/>
+          <p:nvPr/>
+        </p:nvSpPr>
+        <p:spPr>
+          <a:xfrm>
+            <a:off x="2092147" y="4773168"/>
+            <a:ext cx="1325880" cy="237744"/>
+          </a:xfrm>
+          <a:prstGeom prst="rect">
+            <a:avLst/>
+          </a:prstGeom>
+          <a:noFill/>
+          <a:ln/>
+        </p:spPr>
+        <p:txBody>
+          <a:bodyPr wrap="square" lIns="0" tIns="0" rIns="0" bIns="0" rtlCol="0" anchor="ctr"/>
+          <a:lstStyle/>
+          <a:p>
+            <a:pPr algn="ctr" indent="0" marL="0">
+              <a:buNone/>
+            </a:pPr>
+            <a:r>
+              <a:rPr lang="en-US" sz="860" b="1" dirty="0">
+                <a:solidFill>
+                  <a:srgbClr val="12756F"/>
+                </a:solidFill>
+                <a:latin typeface="Calibri" pitchFamily="34" charset="0"/>
+                <a:ea typeface="Calibri" pitchFamily="34" charset="-122"/>
+                <a:cs typeface="Calibri" pitchFamily="34" charset="-120"/>
+              </a:rPr>
+              <a:t>Journal posting</a:t>
+            </a:r>
+            <a:endParaRPr lang="en-US" sz="860" dirty="0"/>
+          </a:p>
+        </p:txBody>
+      </p:sp>
+      <p:sp>
+        <p:nvSpPr>
+          <p:cNvPr id="40" name="Shape 38"/>
+          <p:cNvSpPr/>
+          <p:nvPr/>
+        </p:nvSpPr>
+        <p:spPr>
+          <a:xfrm>
+            <a:off x="3509467" y="4773168"/>
+            <a:ext cx="1550822" cy="237744"/>
+          </a:xfrm>
+          <a:prstGeom prst="roundRect">
+            <a:avLst>
+              <a:gd name="adj" fmla="val 46154"/>
+            </a:avLst>
+          </a:prstGeom>
+          <a:solidFill>
+            <a:srgbClr val="FFFFFF"/>
+          </a:solidFill>
+          <a:ln w="7620">
+            <a:solidFill>
+              <a:srgbClr val="E3E7EA"/>
+            </a:solidFill>
+            <a:prstDash val="solid"/>
+          </a:ln>
+        </p:spPr>
+      </p:sp>
+      <p:sp>
+        <p:nvSpPr>
+          <p:cNvPr id="41" name="Text 39"/>
+          <p:cNvSpPr txBox="1"/>
+          <p:nvPr/>
+        </p:nvSpPr>
+        <p:spPr>
+          <a:xfrm>
+            <a:off x="3509467" y="4773168"/>
+            <a:ext cx="1550822" cy="237744"/>
+          </a:xfrm>
+          <a:prstGeom prst="rect">
+            <a:avLst/>
+          </a:prstGeom>
+          <a:noFill/>
+          <a:ln/>
+        </p:spPr>
+        <p:txBody>
+          <a:bodyPr wrap="square" lIns="0" tIns="0" rIns="0" bIns="0" rtlCol="0" anchor="ctr"/>
+          <a:lstStyle/>
+          <a:p>
+            <a:pPr algn="ctr" indent="0" marL="0">
+              <a:buNone/>
+            </a:pPr>
+            <a:r>
+              <a:rPr lang="en-US" sz="860" b="1" dirty="0">
+                <a:solidFill>
+                  <a:srgbClr val="12756F"/>
+                </a:solidFill>
+                <a:latin typeface="Calibri" pitchFamily="34" charset="0"/>
+                <a:ea typeface="Calibri" pitchFamily="34" charset="-122"/>
+                <a:cs typeface="Calibri" pitchFamily="34" charset="-120"/>
+              </a:rPr>
+              <a:t>Payroll deductions</a:t>
+            </a:r>
+            <a:endParaRPr lang="en-US" sz="860" dirty="0"/>
+          </a:p>
+        </p:txBody>
+      </p:sp>
+      <p:sp>
+        <p:nvSpPr>
+          <p:cNvPr id="42" name="Shape 40"/>
+          <p:cNvSpPr/>
+          <p:nvPr/>
+        </p:nvSpPr>
+        <p:spPr>
+          <a:xfrm>
+            <a:off x="7699248" y="1792224"/>
+            <a:ext cx="3913632" cy="1115568"/>
+          </a:xfrm>
+          <a:prstGeom prst="roundRect">
+            <a:avLst>
+              <a:gd name="adj" fmla="val 5738"/>
+            </a:avLst>
+          </a:prstGeom>
+          <a:solidFill>
+            <a:srgbClr val="0C1E33"/>
+          </a:solidFill>
+          <a:ln w="12700">
+            <a:solidFill>
+              <a:srgbClr val="16304C"/>
+            </a:solidFill>
+            <a:prstDash val="solid"/>
+          </a:ln>
+        </p:spPr>
+      </p:sp>
+      <p:sp>
+        <p:nvSpPr>
+          <p:cNvPr id="43" name="Text 41"/>
+          <p:cNvSpPr txBox="1"/>
+          <p:nvPr/>
+        </p:nvSpPr>
+        <p:spPr>
+          <a:xfrm>
+            <a:off x="7900416" y="1920240"/>
+            <a:ext cx="3566160" cy="237744"/>
+          </a:xfrm>
+          <a:prstGeom prst="rect">
+            <a:avLst/>
+          </a:prstGeom>
+          <a:noFill/>
+          <a:ln/>
+        </p:spPr>
+        <p:txBody>
+          <a:bodyPr wrap="square" lIns="0" tIns="0" rIns="0" bIns="0" rtlCol="0" anchor="ctr"/>
+          <a:lstStyle/>
+          <a:p>
+            <a:pPr indent="0" marL="0">
+              <a:buNone/>
+            </a:pPr>
+            <a:r>
+              <a:rPr lang="en-US" sz="1250" b="1" dirty="0">
+                <a:solidFill>
+                  <a:srgbClr val="FFFFFF"/>
+                </a:solidFill>
+                <a:latin typeface="Arial" pitchFamily="34" charset="0"/>
+                <a:ea typeface="Arial" pitchFamily="34" charset="-122"/>
+                <a:cs typeface="Arial" pitchFamily="34" charset="-120"/>
+              </a:rPr>
+              <a:t>Government portals</a:t>
+            </a:r>
+            <a:endParaRPr lang="en-US" sz="1250" dirty="0"/>
+          </a:p>
+        </p:txBody>
+      </p:sp>
+      <p:sp>
+        <p:nvSpPr>
+          <p:cNvPr id="44" name="Text 42"/>
+          <p:cNvSpPr txBox="1"/>
+          <p:nvPr/>
+        </p:nvSpPr>
+        <p:spPr>
+          <a:xfrm>
+            <a:off x="7900416" y="2176272"/>
+            <a:ext cx="3511296" cy="658368"/>
+          </a:xfrm>
+          <a:prstGeom prst="rect">
+            <a:avLst/>
+          </a:prstGeom>
+          <a:noFill/>
+          <a:ln/>
+        </p:spPr>
+        <p:txBody>
+          <a:bodyPr wrap="square" lIns="0" tIns="0" rIns="0" bIns="0" rtlCol="0" anchor="ctr"/>
+          <a:lstStyle/>
+          <a:p>
+            <a:pPr indent="0" marL="0">
+              <a:lnSpc>
+                <a:spcPts val="1200"/>
+              </a:lnSpc>
+              <a:buNone/>
+            </a:pPr>
+            <a:r>
+              <a:rPr lang="en-US" sz="880" dirty="0">
+                <a:solidFill>
+                  <a:srgbClr val="7FD4CC"/>
+                </a:solidFill>
+                <a:latin typeface="Calibri" pitchFamily="34" charset="0"/>
+                <a:ea typeface="Calibri" pitchFamily="34" charset="-122"/>
+                <a:cs typeface="Calibri" pitchFamily="34" charset="-120"/>
+              </a:rPr>
+              <a:t>Qiwa · Muqeem · Absher · MOHRE · ICP · GDRFA · LMRA · PAM · ADLSA · SCFHS · DHA · DOH</a:t>
+            </a:r>
+            <a:endParaRPr lang="en-US" sz="880" dirty="0"/>
+          </a:p>
+        </p:txBody>
+      </p:sp>
+      <p:sp>
+        <p:nvSpPr>
+          <p:cNvPr id="45" name="Shape 43"/>
+          <p:cNvSpPr/>
+          <p:nvPr/>
+        </p:nvSpPr>
+        <p:spPr>
+          <a:xfrm>
+            <a:off x="7699248" y="3054096"/>
+            <a:ext cx="3913632" cy="3035808"/>
+          </a:xfrm>
+          <a:prstGeom prst="roundRect">
+            <a:avLst>
+              <a:gd name="adj" fmla="val 2108"/>
+            </a:avLst>
+          </a:prstGeom>
+          <a:solidFill>
+            <a:srgbClr val="FCF6E4"/>
+          </a:solidFill>
+          <a:ln w="12700">
+            <a:solidFill>
+              <a:srgbClr val="C9A227"/>
+            </a:solidFill>
+            <a:prstDash val="solid"/>
+          </a:ln>
+        </p:spPr>
+      </p:sp>
+      <p:sp>
+        <p:nvSpPr>
+          <p:cNvPr id="46" name="Text 44"/>
+          <p:cNvSpPr txBox="1"/>
+          <p:nvPr/>
+        </p:nvSpPr>
+        <p:spPr>
+          <a:xfrm>
+            <a:off x="7900416" y="3182112"/>
+            <a:ext cx="3566160" cy="219456"/>
+          </a:xfrm>
+          <a:prstGeom prst="rect">
+            <a:avLst/>
+          </a:prstGeom>
+          <a:noFill/>
+          <a:ln/>
+        </p:spPr>
+        <p:txBody>
+          <a:bodyPr wrap="square" lIns="0" tIns="0" rIns="0" bIns="0" rtlCol="0" anchor="ctr"/>
+          <a:lstStyle/>
+          <a:p>
+            <a:pPr indent="0" marL="0">
+              <a:buNone/>
+            </a:pPr>
+            <a:r>
+              <a:rPr lang="en-US" sz="1200" b="1" dirty="0">
+                <a:solidFill>
+                  <a:srgbClr val="7A6410"/>
+                </a:solidFill>
+                <a:latin typeface="Arial" pitchFamily="34" charset="0"/>
+                <a:ea typeface="Arial" pitchFamily="34" charset="-122"/>
+                <a:cs typeface="Arial" pitchFamily="34" charset="-120"/>
+              </a:rPr>
+              <a:t>About government APIs</a:t>
+            </a:r>
+            <a:endParaRPr lang="en-US" sz="1200" dirty="0"/>
+          </a:p>
+        </p:txBody>
+      </p:sp>
+      <p:sp>
+        <p:nvSpPr>
+          <p:cNvPr id="47" name="Text 45"/>
+          <p:cNvSpPr txBox="1"/>
+          <p:nvPr/>
+        </p:nvSpPr>
+        <p:spPr>
+          <a:xfrm>
+            <a:off x="7900416" y="3456432"/>
+            <a:ext cx="3511296" cy="2523744"/>
+          </a:xfrm>
+          <a:prstGeom prst="rect">
+            <a:avLst/>
+          </a:prstGeom>
+          <a:noFill/>
+          <a:ln/>
+        </p:spPr>
+        <p:txBody>
+          <a:bodyPr wrap="square" lIns="0" tIns="0" rIns="0" bIns="0" rtlCol="0" anchor="ctr"/>
+          <a:lstStyle/>
+          <a:p>
+            <a:pPr indent="0" marL="0">
+              <a:lnSpc>
+                <a:spcPts val="1140"/>
+              </a:lnSpc>
+              <a:buNone/>
+            </a:pPr>
+            <a:r>
+              <a:rPr lang="en-US" sz="840" b="1" dirty="0">
+                <a:solidFill>
+                  <a:srgbClr val="0C1E33"/>
+                </a:solidFill>
+                <a:latin typeface="Calibri" pitchFamily="34" charset="0"/>
+                <a:ea typeface="Calibri" pitchFamily="34" charset="-122"/>
+                <a:cs typeface="Calibri" pitchFamily="34" charset="-120"/>
+              </a:rPr>
+              <a:t>We built this ready for APIs. </a:t>
+            </a:r>
+            <a:pPr indent="0" marL="0">
+              <a:lnSpc>
+                <a:spcPts val="1140"/>
+              </a:lnSpc>
+              <a:buNone/>
+            </a:pPr>
+            <a:r>
+              <a:rPr lang="en-US" sz="840" dirty="0">
+                <a:solidFill>
+                  <a:srgbClr val="5A6C82"/>
+                </a:solidFill>
+                <a:latin typeface="Calibri" pitchFamily="34" charset="0"/>
+                <a:ea typeface="Calibri" pitchFamily="34" charset="-122"/>
+                <a:cs typeface="Calibri" pitchFamily="34" charset="-120"/>
+              </a:rPr>
+              <a:t>Every government-facing step is a service call with a slot waiting behind it, so connecting a portal means plugging it in rather than rebuilding the process.
+</a:t>
+            </a:r>
+            <a:pPr indent="0" marL="0">
+              <a:lnSpc>
+                <a:spcPts val="1140"/>
+              </a:lnSpc>
+              <a:buNone/>
+            </a:pPr>
+            <a:r>
+              <a:rPr lang="en-US" sz="840" b="1" dirty="0">
+                <a:solidFill>
+                  <a:srgbClr val="0C1E33"/>
+                </a:solidFill>
+                <a:latin typeface="Calibri" pitchFamily="34" charset="0"/>
+                <a:ea typeface="Calibri" pitchFamily="34" charset="-122"/>
+                <a:cs typeface="Calibri" pitchFamily="34" charset="-120"/>
+              </a:rPr>
+              <a:t>What we will need from you. </a:t>
+            </a:r>
+            <a:pPr indent="0" marL="0">
+              <a:lnSpc>
+                <a:spcPts val="1140"/>
+              </a:lnSpc>
+              <a:buNone/>
+            </a:pPr>
+            <a:r>
+              <a:rPr lang="en-US" sz="840" dirty="0">
+                <a:solidFill>
+                  <a:srgbClr val="5A6C82"/>
+                </a:solidFill>
+                <a:latin typeface="Calibri" pitchFamily="34" charset="0"/>
+                <a:ea typeface="Calibri" pitchFamily="34" charset="-122"/>
+                <a:cs typeface="Calibri" pitchFamily="34" charset="-120"/>
+              </a:rPr>
+              <a:t>GCC governments do not publish open APIs, and when they do give access they give it to the employer, not to a software vendor. So you go to each authority yourself (Qiwa and Muqeem in Saudi, MOHRE and ICP in the UAE, LMRA in Bahrain) and ask for API credentials, the specification and a sandbox under your own establishment registration. Hand those to us and we build the connector.
+</a:t>
+            </a:r>
+            <a:pPr indent="0" marL="0">
+              <a:lnSpc>
+                <a:spcPts val="1140"/>
+              </a:lnSpc>
+              <a:buNone/>
+            </a:pPr>
+            <a:r>
+              <a:rPr lang="en-US" sz="840" b="1" dirty="0">
+                <a:solidFill>
+                  <a:srgbClr val="0C1E33"/>
+                </a:solidFill>
+                <a:latin typeface="Calibri" pitchFamily="34" charset="0"/>
+                <a:ea typeface="Calibri" pitchFamily="34" charset="-122"/>
+                <a:cs typeface="Calibri" pitchFamily="34" charset="-120"/>
+              </a:rPr>
+              <a:t>Until then </a:t>
+            </a:r>
+            <a:pPr indent="0" marL="0">
+              <a:lnSpc>
+                <a:spcPts val="1140"/>
+              </a:lnSpc>
+              <a:buNone/>
+            </a:pPr>
+            <a:r>
+              <a:rPr lang="en-US" sz="840" dirty="0">
+                <a:solidFill>
+                  <a:srgbClr val="5A6C82"/>
+                </a:solidFill>
+                <a:latin typeface="Calibri" pitchFamily="34" charset="0"/>
+                <a:ea typeface="Calibri" pitchFamily="34" charset="-122"/>
+                <a:cs typeface="Calibri" pitchFamily="34" charset="-120"/>
+              </a:rPr>
+              <a:t>the government step stays a tracked manual PRO activity, with reference number, receipt and status captured in the milestone — which is how the application is designed to operate from day one, with or without a portal connection.</a:t>
+            </a:r>
+            <a:endParaRPr lang="en-US" sz="840" dirty="0"/>
+          </a:p>
+        </p:txBody>
+      </p:sp>
+      <p:sp>
+        <p:nvSpPr>
+          <p:cNvPr id="48" name="Text 46"/>
+          <p:cNvSpPr txBox="1"/>
+          <p:nvPr/>
+        </p:nvSpPr>
+        <p:spPr>
+          <a:xfrm>
+            <a:off x="548640" y="6419088"/>
+            <a:ext cx="8595360" cy="237744"/>
+          </a:xfrm>
+          <a:prstGeom prst="rect">
+            <a:avLst/>
+          </a:prstGeom>
+          <a:noFill/>
+          <a:ln/>
+        </p:spPr>
+        <p:txBody>
+          <a:bodyPr wrap="square" lIns="0" tIns="0" rIns="0" bIns="0" rtlCol="0" anchor="ctr"/>
+          <a:lstStyle/>
+          <a:p>
+            <a:pPr indent="0" marL="0">
+              <a:buNone/>
+            </a:pPr>
+            <a:r>
+              <a:rPr lang="en-US" sz="900" dirty="0">
+                <a:solidFill>
+                  <a:srgbClr val="96A3AE"/>
+                </a:solidFill>
+                <a:latin typeface="Calibri" pitchFamily="34" charset="0"/>
+                <a:ea typeface="Calibri" pitchFamily="34" charset="-122"/>
+                <a:cs typeface="Calibri" pitchFamily="34" charset="-120"/>
+              </a:rPr>
+              <a:t>INK IT Business Solutions  ·  Visa &amp; Permits Management on SAP BTP</a:t>
+            </a:r>
+            <a:endParaRPr lang="en-US" sz="900" dirty="0"/>
+          </a:p>
+        </p:txBody>
+      </p:sp>
+      <p:sp>
+        <p:nvSpPr>
+          <p:cNvPr id="49" name="Text 47"/>
+          <p:cNvSpPr txBox="1"/>
+          <p:nvPr/>
+        </p:nvSpPr>
+        <p:spPr>
+          <a:xfrm>
+            <a:off x="11155680" y="6419088"/>
+            <a:ext cx="457200" cy="237744"/>
+          </a:xfrm>
+          <a:prstGeom prst="rect">
+            <a:avLst/>
+          </a:prstGeom>
+          <a:noFill/>
+          <a:ln/>
+        </p:spPr>
+        <p:txBody>
+          <a:bodyPr wrap="square" lIns="0" tIns="0" rIns="0" bIns="0" rtlCol="0" anchor="ctr"/>
+          <a:lstStyle/>
+          <a:p>
+            <a:pPr algn="r" indent="0" marL="0">
+              <a:buNone/>
+            </a:pPr>
+            <a:r>
+              <a:rPr lang="en-US" sz="900" dirty="0">
+                <a:solidFill>
+                  <a:srgbClr val="96A3AE"/>
+                </a:solidFill>
+                <a:latin typeface="Calibri" pitchFamily="34" charset="0"/>
+                <a:ea typeface="Calibri" pitchFamily="34" charset="-122"/>
+                <a:cs typeface="Calibri" pitchFamily="34" charset="-120"/>
+              </a:rPr>
+              <a:t>10</a:t>
+            </a:r>
+            <a:endParaRPr lang="en-US" sz="900" dirty="0"/>
+          </a:p>
+        </p:txBody>
+      </p:sp>
+    </p:spTree>
+  </p:cSld>
+  <p:clrMapOvr>
+    <a:masterClrMapping/>
+  </p:clrMapOvr>
+</p:sld>
+</file>
+
+<file path=ppt/slides/slide11.xml><?xml version="1.0" encoding="utf-8"?>
+<p:sld xmlns:a="http://schemas.openxmlformats.org/drawingml/2006/main" xmlns:r="http://schemas.openxmlformats.org/officeDocument/2006/relationships" xmlns:p="http://schemas.openxmlformats.org/presentationml/2006/main">
+  <p:cSld name="Slide 11">
+    <p:bg>
+      <p:bgPr>
+        <a:solidFill>
           <a:srgbClr val="0C1E33"/>
         </a:solidFill>
       </p:bgPr>
@@ -15992,7 +17824,7 @@
                 <a:ea typeface="Calibri" pitchFamily="34" charset="-122"/>
                 <a:cs typeface="Calibri" pitchFamily="34" charset="-120"/>
               </a:rPr>
-              <a:t>ARCHITECTURE &amp; INTEGRATION</a:t>
+              <a:t>SOLUTION ARCHITECTURE</a:t>
             </a:r>
             <a:endParaRPr lang="en-US" sz="1100" dirty="0"/>
           </a:p>
@@ -16031,65 +17863,50 @@
                 <a:ea typeface="Arial" pitchFamily="34" charset="-122"/>
                 <a:cs typeface="Arial" pitchFamily="34" charset="-120"/>
               </a:rPr>
-              <a:t>We sit between government and SuccessFactors.</a:t>
+              <a:t>Every system, and what moves between them.</a:t>
             </a:r>
             <a:endParaRPr lang="en-US" sz="3000" dirty="0"/>
           </a:p>
         </p:txBody>
       </p:sp>
-      <p:sp>
-        <p:nvSpPr>
-          <p:cNvPr id="4" name="Text 2"/>
-          <p:cNvSpPr txBox="1"/>
-          <p:nvPr/>
-        </p:nvSpPr>
-        <p:spPr>
-          <a:xfrm>
-            <a:off x="548640" y="1243584"/>
-            <a:ext cx="10424160" cy="420624"/>
-          </a:xfrm>
-          <a:prstGeom prst="rect">
-            <a:avLst/>
-          </a:prstGeom>
-          <a:noFill/>
-          <a:ln/>
-        </p:spPr>
-        <p:txBody>
-          <a:bodyPr wrap="square" lIns="0" tIns="0" rIns="0" bIns="0" rtlCol="0" anchor="ctr"/>
-          <a:lstStyle/>
-          <a:p>
-            <a:pPr indent="0" marL="0">
-              <a:buNone/>
-            </a:pPr>
-            <a:r>
-              <a:rPr lang="en-US" sz="1300" dirty="0">
-                <a:solidFill>
-                  <a:srgbClr val="5A6C82"/>
-                </a:solidFill>
-                <a:latin typeface="Calibri" pitchFamily="34" charset="0"/>
-                <a:ea typeface="Calibri" pitchFamily="34" charset="-122"/>
-                <a:cs typeface="Calibri" pitchFamily="34" charset="-120"/>
-              </a:rPr>
-              <a:t>That gap is where the problem lives. We take candidates from Recruiting, drive the government-facing work, write the permit details back into Employee Central, and send the money to finance.</a:t>
-            </a:r>
-            <a:endParaRPr lang="en-US" sz="1300" dirty="0"/>
-          </a:p>
-        </p:txBody>
-      </p:sp>
-      <p:sp>
-        <p:nvSpPr>
-          <p:cNvPr id="5" name="Shape 3"/>
+      <p:pic>
+        <p:nvPicPr>
+          <p:cNvPr id="4" name="Image 0" descr="./img/architecture.png">    </p:cNvPr>
+          <p:cNvPicPr>
+            <a:picLocks noChangeAspect="1"/>
+          </p:cNvPicPr>
+          <p:nvPr/>
+        </p:nvPicPr>
+        <p:blipFill>
+          <a:blip r:embed="rId1"/>
+          <a:stretch>
+            <a:fillRect/>
+          </a:stretch>
+        </p:blipFill>
+        <p:spPr>
+          <a:xfrm>
+            <a:off x="548640" y="1152144"/>
+            <a:ext cx="7543800" cy="5120640"/>
+          </a:xfrm>
+          <a:prstGeom prst="rect">
+            <a:avLst/>
+          </a:prstGeom>
+        </p:spPr>
+      </p:pic>
+      <p:sp>
+        <p:nvSpPr>
+          <p:cNvPr id="5" name="Shape 2"/>
           <p:cNvSpPr/>
           <p:nvPr/>
         </p:nvSpPr>
         <p:spPr>
           <a:xfrm>
-            <a:off x="548640" y="1792224"/>
-            <a:ext cx="6903720" cy="859536"/>
+            <a:off x="8275320" y="1152144"/>
+            <a:ext cx="3364992" cy="1188720"/>
           </a:xfrm>
           <a:prstGeom prst="roundRect">
             <a:avLst>
-              <a:gd name="adj" fmla="val 7447"/>
+              <a:gd name="adj" fmla="val 5385"/>
             </a:avLst>
           </a:prstGeom>
           <a:solidFill>
@@ -16105,30 +17922,30 @@
       </p:sp>
       <p:sp>
         <p:nvSpPr>
-          <p:cNvPr id="6" name="Text 4"/>
-          <p:cNvSpPr txBox="1"/>
-          <p:nvPr/>
-        </p:nvSpPr>
-        <p:spPr>
-          <a:xfrm>
-            <a:off x="749808" y="1883664"/>
-            <a:ext cx="4572000" cy="237744"/>
-          </a:xfrm>
-          <a:prstGeom prst="rect">
-            <a:avLst/>
-          </a:prstGeom>
-          <a:noFill/>
-          <a:ln/>
-        </p:spPr>
-        <p:txBody>
-          <a:bodyPr wrap="square" lIns="0" tIns="0" rIns="0" bIns="0" rtlCol="0" anchor="ctr"/>
-          <a:lstStyle/>
-          <a:p>
-            <a:pPr indent="0" marL="0">
-              <a:buNone/>
-            </a:pPr>
-            <a:r>
-              <a:rPr lang="en-US" sz="1250" b="1" dirty="0">
+          <p:cNvPr id="6" name="Text 3"/>
+          <p:cNvSpPr txBox="1"/>
+          <p:nvPr/>
+        </p:nvSpPr>
+        <p:spPr>
+          <a:xfrm>
+            <a:off x="8449056" y="1252728"/>
+            <a:ext cx="3017520" cy="219456"/>
+          </a:xfrm>
+          <a:prstGeom prst="rect">
+            <a:avLst/>
+          </a:prstGeom>
+          <a:noFill/>
+          <a:ln/>
+        </p:spPr>
+        <p:txBody>
+          <a:bodyPr wrap="square" lIns="0" tIns="0" rIns="0" bIns="0" rtlCol="0" anchor="ctr"/>
+          <a:lstStyle/>
+          <a:p>
+            <a:pPr indent="0" marL="0">
+              <a:buNone/>
+            </a:pPr>
+            <a:r>
+              <a:rPr lang="en-US" sz="1150" b="1" dirty="0">
                 <a:solidFill>
                   <a:srgbClr val="0C1E33"/>
                 </a:solidFill>
@@ -16136,38 +17953,41 @@
                 <a:ea typeface="Arial" pitchFamily="34" charset="-122"/>
                 <a:cs typeface="Arial" pitchFamily="34" charset="-120"/>
               </a:rPr>
-              <a:t>SAP SuccessFactors</a:t>
-            </a:r>
-            <a:endParaRPr lang="en-US" sz="1250" dirty="0"/>
-          </a:p>
-        </p:txBody>
-      </p:sp>
-      <p:sp>
-        <p:nvSpPr>
-          <p:cNvPr id="7" name="Text 5"/>
-          <p:cNvSpPr txBox="1"/>
-          <p:nvPr/>
-        </p:nvSpPr>
-        <p:spPr>
-          <a:xfrm>
-            <a:off x="749808" y="2103120"/>
-            <a:ext cx="6309360" cy="182880"/>
-          </a:xfrm>
-          <a:prstGeom prst="rect">
-            <a:avLst/>
-          </a:prstGeom>
-          <a:noFill/>
-          <a:ln/>
-        </p:spPr>
-        <p:txBody>
-          <a:bodyPr wrap="square" lIns="0" tIns="0" rIns="0" bIns="0" rtlCol="0" anchor="ctr"/>
-          <a:lstStyle/>
-          <a:p>
-            <a:pPr indent="0" marL="0">
-              <a:buNone/>
-            </a:pPr>
-            <a:r>
-              <a:rPr lang="en-US" sz="880" i="1" dirty="0">
+              <a:t>What flows in</a:t>
+            </a:r>
+            <a:endParaRPr lang="en-US" sz="1150" dirty="0"/>
+          </a:p>
+        </p:txBody>
+      </p:sp>
+      <p:sp>
+        <p:nvSpPr>
+          <p:cNvPr id="7" name="Text 4"/>
+          <p:cNvSpPr txBox="1"/>
+          <p:nvPr/>
+        </p:nvSpPr>
+        <p:spPr>
+          <a:xfrm>
+            <a:off x="8449056" y="1481328"/>
+            <a:ext cx="3035808" cy="786384"/>
+          </a:xfrm>
+          <a:prstGeom prst="rect">
+            <a:avLst/>
+          </a:prstGeom>
+          <a:noFill/>
+          <a:ln/>
+        </p:spPr>
+        <p:txBody>
+          <a:bodyPr wrap="square" lIns="0" tIns="0" rIns="0" bIns="0" rtlCol="0" anchor="ctr"/>
+          <a:lstStyle/>
+          <a:p>
+            <a:pPr indent="0" marL="0">
+              <a:lnSpc>
+                <a:spcPts val="1160"/>
+              </a:lnSpc>
+              <a:buNone/>
+            </a:pPr>
+            <a:r>
+              <a:rPr lang="en-US" sz="860" dirty="0">
                 <a:solidFill>
                   <a:srgbClr val="5A6C82"/>
                 </a:solidFill>
@@ -16175,831 +17995,26 @@
                 <a:ea typeface="Calibri" pitchFamily="34" charset="-122"/>
                 <a:cs typeface="Calibri" pitchFamily="34" charset="-120"/>
               </a:rPr>
-              <a:t>Candidates, employee master, separations and expiry dates flow in</a:t>
-            </a:r>
-            <a:endParaRPr lang="en-US" sz="880" dirty="0"/>
-          </a:p>
-        </p:txBody>
-      </p:sp>
-      <p:sp>
-        <p:nvSpPr>
-          <p:cNvPr id="8" name="Shape 6"/>
+              <a:t>Candidates who accepted an offer, the employee master, separations and the expiry dates that start a renewal. All through SAP Integration Suite, so it is monitored and retried like any other SAP integration.</a:t>
+            </a:r>
+            <a:endParaRPr lang="en-US" sz="860" dirty="0"/>
+          </a:p>
+        </p:txBody>
+      </p:sp>
+      <p:sp>
+        <p:nvSpPr>
+          <p:cNvPr id="8" name="Shape 5"/>
           <p:cNvSpPr/>
           <p:nvPr/>
         </p:nvSpPr>
         <p:spPr>
           <a:xfrm>
-            <a:off x="749808" y="2322576"/>
-            <a:ext cx="1175918" cy="237744"/>
+            <a:off x="8275320" y="2450592"/>
+            <a:ext cx="3364992" cy="1188720"/>
           </a:xfrm>
           <a:prstGeom prst="roundRect">
             <a:avLst>
-              <a:gd name="adj" fmla="val 46154"/>
-            </a:avLst>
-          </a:prstGeom>
-          <a:solidFill>
-            <a:srgbClr val="FFFFFF"/>
-          </a:solidFill>
-          <a:ln w="7620">
-            <a:solidFill>
-              <a:srgbClr val="E3E7EA"/>
-            </a:solidFill>
-            <a:prstDash val="solid"/>
-          </a:ln>
-        </p:spPr>
-      </p:sp>
-      <p:sp>
-        <p:nvSpPr>
-          <p:cNvPr id="9" name="Text 7"/>
-          <p:cNvSpPr txBox="1"/>
-          <p:nvPr/>
-        </p:nvSpPr>
-        <p:spPr>
-          <a:xfrm>
-            <a:off x="749808" y="2322576"/>
-            <a:ext cx="1175918" cy="237744"/>
-          </a:xfrm>
-          <a:prstGeom prst="rect">
-            <a:avLst/>
-          </a:prstGeom>
-          <a:noFill/>
-          <a:ln/>
-        </p:spPr>
-        <p:txBody>
-          <a:bodyPr wrap="square" lIns="0" tIns="0" rIns="0" bIns="0" rtlCol="0" anchor="ctr"/>
-          <a:lstStyle/>
-          <a:p>
-            <a:pPr algn="ctr" indent="0" marL="0">
-              <a:buNone/>
-            </a:pPr>
-            <a:r>
-              <a:rPr lang="en-US" sz="860" b="1" dirty="0">
-                <a:solidFill>
-                  <a:srgbClr val="12756F"/>
-                </a:solidFill>
-                <a:latin typeface="Calibri" pitchFamily="34" charset="0"/>
-                <a:ea typeface="Calibri" pitchFamily="34" charset="-122"/>
-                <a:cs typeface="Calibri" pitchFamily="34" charset="-120"/>
-              </a:rPr>
-              <a:t>SF Recruiting</a:t>
-            </a:r>
-            <a:endParaRPr lang="en-US" sz="860" dirty="0"/>
-          </a:p>
-        </p:txBody>
-      </p:sp>
-      <p:sp>
-        <p:nvSpPr>
-          <p:cNvPr id="10" name="Shape 8"/>
-          <p:cNvSpPr/>
-          <p:nvPr/>
-        </p:nvSpPr>
-        <p:spPr>
-          <a:xfrm>
-            <a:off x="2017166" y="2322576"/>
-            <a:ext cx="1475842" cy="237744"/>
-          </a:xfrm>
-          <a:prstGeom prst="roundRect">
-            <a:avLst>
-              <a:gd name="adj" fmla="val 46154"/>
-            </a:avLst>
-          </a:prstGeom>
-          <a:solidFill>
-            <a:srgbClr val="FFFFFF"/>
-          </a:solidFill>
-          <a:ln w="7620">
-            <a:solidFill>
-              <a:srgbClr val="E3E7EA"/>
-            </a:solidFill>
-            <a:prstDash val="solid"/>
-          </a:ln>
-        </p:spPr>
-      </p:sp>
-      <p:sp>
-        <p:nvSpPr>
-          <p:cNvPr id="11" name="Text 9"/>
-          <p:cNvSpPr txBox="1"/>
-          <p:nvPr/>
-        </p:nvSpPr>
-        <p:spPr>
-          <a:xfrm>
-            <a:off x="2017166" y="2322576"/>
-            <a:ext cx="1475842" cy="237744"/>
-          </a:xfrm>
-          <a:prstGeom prst="rect">
-            <a:avLst/>
-          </a:prstGeom>
-          <a:noFill/>
-          <a:ln/>
-        </p:spPr>
-        <p:txBody>
-          <a:bodyPr wrap="square" lIns="0" tIns="0" rIns="0" bIns="0" rtlCol="0" anchor="ctr"/>
-          <a:lstStyle/>
-          <a:p>
-            <a:pPr algn="ctr" indent="0" marL="0">
-              <a:buNone/>
-            </a:pPr>
-            <a:r>
-              <a:rPr lang="en-US" sz="860" b="1" dirty="0">
-                <a:solidFill>
-                  <a:srgbClr val="12756F"/>
-                </a:solidFill>
-                <a:latin typeface="Calibri" pitchFamily="34" charset="0"/>
-                <a:ea typeface="Calibri" pitchFamily="34" charset="-122"/>
-                <a:cs typeface="Calibri" pitchFamily="34" charset="-120"/>
-              </a:rPr>
-              <a:t>SF Onboarding 2.0</a:t>
-            </a:r>
-            <a:endParaRPr lang="en-US" sz="860" dirty="0"/>
-          </a:p>
-        </p:txBody>
-      </p:sp>
-      <p:sp>
-        <p:nvSpPr>
-          <p:cNvPr id="12" name="Shape 10"/>
-          <p:cNvSpPr/>
-          <p:nvPr/>
-        </p:nvSpPr>
-        <p:spPr>
-          <a:xfrm>
-            <a:off x="3584448" y="2322576"/>
-            <a:ext cx="1400861" cy="237744"/>
-          </a:xfrm>
-          <a:prstGeom prst="roundRect">
-            <a:avLst>
-              <a:gd name="adj" fmla="val 46154"/>
-            </a:avLst>
-          </a:prstGeom>
-          <a:solidFill>
-            <a:srgbClr val="FFFFFF"/>
-          </a:solidFill>
-          <a:ln w="7620">
-            <a:solidFill>
-              <a:srgbClr val="E3E7EA"/>
-            </a:solidFill>
-            <a:prstDash val="solid"/>
-          </a:ln>
-        </p:spPr>
-      </p:sp>
-      <p:sp>
-        <p:nvSpPr>
-          <p:cNvPr id="13" name="Text 11"/>
-          <p:cNvSpPr txBox="1"/>
-          <p:nvPr/>
-        </p:nvSpPr>
-        <p:spPr>
-          <a:xfrm>
-            <a:off x="3584448" y="2322576"/>
-            <a:ext cx="1400861" cy="237744"/>
-          </a:xfrm>
-          <a:prstGeom prst="rect">
-            <a:avLst/>
-          </a:prstGeom>
-          <a:noFill/>
-          <a:ln/>
-        </p:spPr>
-        <p:txBody>
-          <a:bodyPr wrap="square" lIns="0" tIns="0" rIns="0" bIns="0" rtlCol="0" anchor="ctr"/>
-          <a:lstStyle/>
-          <a:p>
-            <a:pPr algn="ctr" indent="0" marL="0">
-              <a:buNone/>
-            </a:pPr>
-            <a:r>
-              <a:rPr lang="en-US" sz="860" b="1" dirty="0">
-                <a:solidFill>
-                  <a:srgbClr val="12756F"/>
-                </a:solidFill>
-                <a:latin typeface="Calibri" pitchFamily="34" charset="0"/>
-                <a:ea typeface="Calibri" pitchFamily="34" charset="-122"/>
-                <a:cs typeface="Calibri" pitchFamily="34" charset="-120"/>
-              </a:rPr>
-              <a:t>Employee Central</a:t>
-            </a:r>
-            <a:endParaRPr lang="en-US" sz="860" dirty="0"/>
-          </a:p>
-        </p:txBody>
-      </p:sp>
-      <p:sp>
-        <p:nvSpPr>
-          <p:cNvPr id="14" name="Shape 12"/>
-          <p:cNvSpPr/>
-          <p:nvPr/>
-        </p:nvSpPr>
-        <p:spPr>
-          <a:xfrm>
-            <a:off x="5076749" y="2322576"/>
-            <a:ext cx="1100938" cy="237744"/>
-          </a:xfrm>
-          <a:prstGeom prst="roundRect">
-            <a:avLst>
-              <a:gd name="adj" fmla="val 46154"/>
-            </a:avLst>
-          </a:prstGeom>
-          <a:solidFill>
-            <a:srgbClr val="FFFFFF"/>
-          </a:solidFill>
-          <a:ln w="7620">
-            <a:solidFill>
-              <a:srgbClr val="E3E7EA"/>
-            </a:solidFill>
-            <a:prstDash val="solid"/>
-          </a:ln>
-        </p:spPr>
-      </p:sp>
-      <p:sp>
-        <p:nvSpPr>
-          <p:cNvPr id="15" name="Text 13"/>
-          <p:cNvSpPr txBox="1"/>
-          <p:nvPr/>
-        </p:nvSpPr>
-        <p:spPr>
-          <a:xfrm>
-            <a:off x="5076749" y="2322576"/>
-            <a:ext cx="1100938" cy="237744"/>
-          </a:xfrm>
-          <a:prstGeom prst="rect">
-            <a:avLst/>
-          </a:prstGeom>
-          <a:noFill/>
-          <a:ln/>
-        </p:spPr>
-        <p:txBody>
-          <a:bodyPr wrap="square" lIns="0" tIns="0" rIns="0" bIns="0" rtlCol="0" anchor="ctr"/>
-          <a:lstStyle/>
-          <a:p>
-            <a:pPr algn="ctr" indent="0" marL="0">
-              <a:buNone/>
-            </a:pPr>
-            <a:r>
-              <a:rPr lang="en-US" sz="860" b="1" dirty="0">
-                <a:solidFill>
-                  <a:srgbClr val="12756F"/>
-                </a:solidFill>
-                <a:latin typeface="Calibri" pitchFamily="34" charset="0"/>
-                <a:ea typeface="Calibri" pitchFamily="34" charset="-122"/>
-                <a:cs typeface="Calibri" pitchFamily="34" charset="-120"/>
-              </a:rPr>
-              <a:t>SF Work Zone</a:t>
-            </a:r>
-            <a:endParaRPr lang="en-US" sz="860" dirty="0"/>
-          </a:p>
-        </p:txBody>
-      </p:sp>
-      <p:sp>
-        <p:nvSpPr>
-          <p:cNvPr id="16" name="Shape 14"/>
-          <p:cNvSpPr/>
-          <p:nvPr/>
-        </p:nvSpPr>
-        <p:spPr>
-          <a:xfrm rot="5400000">
-            <a:off x="3703320" y="2683764"/>
-            <a:ext cx="566928" cy="201168"/>
-          </a:xfrm>
-          <a:prstGeom prst="chevron">
-            <a:avLst/>
-          </a:prstGeom>
-          <a:solidFill>
-            <a:srgbClr val="C3CDD4"/>
-          </a:solidFill>
-          <a:ln/>
-        </p:spPr>
-      </p:sp>
-      <p:sp>
-        <p:nvSpPr>
-          <p:cNvPr id="17" name="Shape 15"/>
-          <p:cNvSpPr/>
-          <p:nvPr/>
-        </p:nvSpPr>
-        <p:spPr>
-          <a:xfrm>
-            <a:off x="548640" y="2926080"/>
-            <a:ext cx="6903720" cy="1042416"/>
-          </a:xfrm>
-          <a:prstGeom prst="roundRect">
-            <a:avLst>
-              <a:gd name="adj" fmla="val 6140"/>
-            </a:avLst>
-          </a:prstGeom>
-          <a:solidFill>
-            <a:srgbClr val="20A098"/>
-          </a:solidFill>
-          <a:ln w="11430">
-            <a:solidFill>
-              <a:srgbClr val="12756F"/>
-            </a:solidFill>
-            <a:prstDash val="solid"/>
-          </a:ln>
-        </p:spPr>
-      </p:sp>
-      <p:sp>
-        <p:nvSpPr>
-          <p:cNvPr id="18" name="Text 16"/>
-          <p:cNvSpPr txBox="1"/>
-          <p:nvPr/>
-        </p:nvSpPr>
-        <p:spPr>
-          <a:xfrm>
-            <a:off x="749808" y="3017520"/>
-            <a:ext cx="4572000" cy="237744"/>
-          </a:xfrm>
-          <a:prstGeom prst="rect">
-            <a:avLst/>
-          </a:prstGeom>
-          <a:noFill/>
-          <a:ln/>
-        </p:spPr>
-        <p:txBody>
-          <a:bodyPr wrap="square" lIns="0" tIns="0" rIns="0" bIns="0" rtlCol="0" anchor="ctr"/>
-          <a:lstStyle/>
-          <a:p>
-            <a:pPr indent="0" marL="0">
-              <a:buNone/>
-            </a:pPr>
-            <a:r>
-              <a:rPr lang="en-US" sz="1250" b="1" dirty="0">
-                <a:solidFill>
-                  <a:srgbClr val="FFFFFF"/>
-                </a:solidFill>
-                <a:latin typeface="Arial" pitchFamily="34" charset="0"/>
-                <a:ea typeface="Arial" pitchFamily="34" charset="-122"/>
-                <a:cs typeface="Arial" pitchFamily="34" charset="-120"/>
-              </a:rPr>
-              <a:t>Visa &amp; Permits on SAP BTP</a:t>
-            </a:r>
-            <a:endParaRPr lang="en-US" sz="1250" dirty="0"/>
-          </a:p>
-        </p:txBody>
-      </p:sp>
-      <p:sp>
-        <p:nvSpPr>
-          <p:cNvPr id="19" name="Text 17"/>
-          <p:cNvSpPr txBox="1"/>
-          <p:nvPr/>
-        </p:nvSpPr>
-        <p:spPr>
-          <a:xfrm>
-            <a:off x="749808" y="3236976"/>
-            <a:ext cx="6309360" cy="182880"/>
-          </a:xfrm>
-          <a:prstGeom prst="rect">
-            <a:avLst/>
-          </a:prstGeom>
-          <a:noFill/>
-          <a:ln/>
-        </p:spPr>
-        <p:txBody>
-          <a:bodyPr wrap="square" lIns="0" tIns="0" rIns="0" bIns="0" rtlCol="0" anchor="ctr"/>
-          <a:lstStyle/>
-          <a:p>
-            <a:pPr indent="0" marL="0">
-              <a:buNone/>
-            </a:pPr>
-            <a:r>
-              <a:rPr lang="en-US" sz="880" i="1" dirty="0">
-                <a:solidFill>
-                  <a:srgbClr val="CFEFEB"/>
-                </a:solidFill>
-                <a:latin typeface="Calibri" pitchFamily="34" charset="0"/>
-                <a:ea typeface="Calibri" pitchFamily="34" charset="-122"/>
-                <a:cs typeface="Calibri" pitchFamily="34" charset="-120"/>
-              </a:rPr>
-              <a:t>The governed layer — where the work is actually managed</a:t>
-            </a:r>
-            <a:endParaRPr lang="en-US" sz="880" dirty="0"/>
-          </a:p>
-        </p:txBody>
-      </p:sp>
-      <p:sp>
-        <p:nvSpPr>
-          <p:cNvPr id="20" name="Shape 18"/>
-          <p:cNvSpPr/>
-          <p:nvPr/>
-        </p:nvSpPr>
-        <p:spPr>
-          <a:xfrm>
-            <a:off x="749808" y="3456432"/>
-            <a:ext cx="1775765" cy="237744"/>
-          </a:xfrm>
-          <a:prstGeom prst="roundRect">
-            <a:avLst>
-              <a:gd name="adj" fmla="val 46154"/>
-            </a:avLst>
-          </a:prstGeom>
-          <a:solidFill>
-            <a:srgbClr val="12756F"/>
-          </a:solidFill>
-          <a:ln w="7620">
-            <a:solidFill>
-              <a:srgbClr val="0E5F5A"/>
-            </a:solidFill>
-            <a:prstDash val="solid"/>
-          </a:ln>
-        </p:spPr>
-      </p:sp>
-      <p:sp>
-        <p:nvSpPr>
-          <p:cNvPr id="21" name="Text 19"/>
-          <p:cNvSpPr txBox="1"/>
-          <p:nvPr/>
-        </p:nvSpPr>
-        <p:spPr>
-          <a:xfrm>
-            <a:off x="749808" y="3456432"/>
-            <a:ext cx="1775765" cy="237744"/>
-          </a:xfrm>
-          <a:prstGeom prst="rect">
-            <a:avLst/>
-          </a:prstGeom>
-          <a:noFill/>
-          <a:ln/>
-        </p:spPr>
-        <p:txBody>
-          <a:bodyPr wrap="square" lIns="0" tIns="0" rIns="0" bIns="0" rtlCol="0" anchor="ctr"/>
-          <a:lstStyle/>
-          <a:p>
-            <a:pPr algn="ctr" indent="0" marL="0">
-              <a:buNone/>
-            </a:pPr>
-            <a:r>
-              <a:rPr lang="en-US" sz="860" b="1" dirty="0">
-                <a:solidFill>
-                  <a:srgbClr val="FFFFFF"/>
-                </a:solidFill>
-                <a:latin typeface="Calibri" pitchFamily="34" charset="0"/>
-                <a:ea typeface="Calibri" pitchFamily="34" charset="-122"/>
-                <a:cs typeface="Calibri" pitchFamily="34" charset="-120"/>
-              </a:rPr>
-              <a:t>Workflow &amp; milestones</a:t>
-            </a:r>
-            <a:endParaRPr lang="en-US" sz="860" dirty="0"/>
-          </a:p>
-        </p:txBody>
-      </p:sp>
-      <p:sp>
-        <p:nvSpPr>
-          <p:cNvPr id="22" name="Shape 20"/>
-          <p:cNvSpPr/>
-          <p:nvPr/>
-        </p:nvSpPr>
-        <p:spPr>
-          <a:xfrm>
-            <a:off x="2617013" y="3456432"/>
-            <a:ext cx="1925726" cy="237744"/>
-          </a:xfrm>
-          <a:prstGeom prst="roundRect">
-            <a:avLst>
-              <a:gd name="adj" fmla="val 46154"/>
-            </a:avLst>
-          </a:prstGeom>
-          <a:solidFill>
-            <a:srgbClr val="12756F"/>
-          </a:solidFill>
-          <a:ln w="7620">
-            <a:solidFill>
-              <a:srgbClr val="0E5F5A"/>
-            </a:solidFill>
-            <a:prstDash val="solid"/>
-          </a:ln>
-        </p:spPr>
-      </p:sp>
-      <p:sp>
-        <p:nvSpPr>
-          <p:cNvPr id="23" name="Text 21"/>
-          <p:cNvSpPr txBox="1"/>
-          <p:nvPr/>
-        </p:nvSpPr>
-        <p:spPr>
-          <a:xfrm>
-            <a:off x="2617013" y="3456432"/>
-            <a:ext cx="1925726" cy="237744"/>
-          </a:xfrm>
-          <a:prstGeom prst="rect">
-            <a:avLst/>
-          </a:prstGeom>
-          <a:noFill/>
-          <a:ln/>
-        </p:spPr>
-        <p:txBody>
-          <a:bodyPr wrap="square" lIns="0" tIns="0" rIns="0" bIns="0" rtlCol="0" anchor="ctr"/>
-          <a:lstStyle/>
-          <a:p>
-            <a:pPr algn="ctr" indent="0" marL="0">
-              <a:buNone/>
-            </a:pPr>
-            <a:r>
-              <a:rPr lang="en-US" sz="860" b="1" dirty="0">
-                <a:solidFill>
-                  <a:srgbClr val="FFFFFF"/>
-                </a:solidFill>
-                <a:latin typeface="Calibri" pitchFamily="34" charset="0"/>
-                <a:ea typeface="Calibri" pitchFamily="34" charset="-122"/>
-                <a:cs typeface="Calibri" pitchFamily="34" charset="-120"/>
-              </a:rPr>
-              <a:t>Task inbox &amp; escalation</a:t>
-            </a:r>
-            <a:endParaRPr lang="en-US" sz="860" dirty="0"/>
-          </a:p>
-        </p:txBody>
-      </p:sp>
-      <p:sp>
-        <p:nvSpPr>
-          <p:cNvPr id="24" name="Shape 22"/>
-          <p:cNvSpPr/>
-          <p:nvPr/>
-        </p:nvSpPr>
-        <p:spPr>
-          <a:xfrm>
-            <a:off x="4634179" y="3456432"/>
-            <a:ext cx="875995" cy="237744"/>
-          </a:xfrm>
-          <a:prstGeom prst="roundRect">
-            <a:avLst>
-              <a:gd name="adj" fmla="val 46154"/>
-            </a:avLst>
-          </a:prstGeom>
-          <a:solidFill>
-            <a:srgbClr val="12756F"/>
-          </a:solidFill>
-          <a:ln w="7620">
-            <a:solidFill>
-              <a:srgbClr val="0E5F5A"/>
-            </a:solidFill>
-            <a:prstDash val="solid"/>
-          </a:ln>
-        </p:spPr>
-      </p:sp>
-      <p:sp>
-        <p:nvSpPr>
-          <p:cNvPr id="25" name="Text 23"/>
-          <p:cNvSpPr txBox="1"/>
-          <p:nvPr/>
-        </p:nvSpPr>
-        <p:spPr>
-          <a:xfrm>
-            <a:off x="4634179" y="3456432"/>
-            <a:ext cx="875995" cy="237744"/>
-          </a:xfrm>
-          <a:prstGeom prst="rect">
-            <a:avLst/>
-          </a:prstGeom>
-          <a:noFill/>
-          <a:ln/>
-        </p:spPr>
-        <p:txBody>
-          <a:bodyPr wrap="square" lIns="0" tIns="0" rIns="0" bIns="0" rtlCol="0" anchor="ctr"/>
-          <a:lstStyle/>
-          <a:p>
-            <a:pPr algn="ctr" indent="0" marL="0">
-              <a:buNone/>
-            </a:pPr>
-            <a:r>
-              <a:rPr lang="en-US" sz="860" b="1" dirty="0">
-                <a:solidFill>
-                  <a:srgbClr val="FFFFFF"/>
-                </a:solidFill>
-                <a:latin typeface="Calibri" pitchFamily="34" charset="0"/>
-                <a:ea typeface="Calibri" pitchFamily="34" charset="-122"/>
-                <a:cs typeface="Calibri" pitchFamily="34" charset="-120"/>
-              </a:rPr>
-              <a:t>Documents</a:t>
-            </a:r>
-            <a:endParaRPr lang="en-US" sz="860" dirty="0"/>
-          </a:p>
-        </p:txBody>
-      </p:sp>
-      <p:sp>
-        <p:nvSpPr>
-          <p:cNvPr id="26" name="Shape 24"/>
-          <p:cNvSpPr/>
-          <p:nvPr/>
-        </p:nvSpPr>
-        <p:spPr>
-          <a:xfrm>
-            <a:off x="5601614" y="3456432"/>
-            <a:ext cx="801014" cy="237744"/>
-          </a:xfrm>
-          <a:prstGeom prst="roundRect">
-            <a:avLst>
-              <a:gd name="adj" fmla="val 46154"/>
-            </a:avLst>
-          </a:prstGeom>
-          <a:solidFill>
-            <a:srgbClr val="12756F"/>
-          </a:solidFill>
-          <a:ln w="7620">
-            <a:solidFill>
-              <a:srgbClr val="0E5F5A"/>
-            </a:solidFill>
-            <a:prstDash val="solid"/>
-          </a:ln>
-        </p:spPr>
-      </p:sp>
-      <p:sp>
-        <p:nvSpPr>
-          <p:cNvPr id="27" name="Text 25"/>
-          <p:cNvSpPr txBox="1"/>
-          <p:nvPr/>
-        </p:nvSpPr>
-        <p:spPr>
-          <a:xfrm>
-            <a:off x="5601614" y="3456432"/>
-            <a:ext cx="801014" cy="237744"/>
-          </a:xfrm>
-          <a:prstGeom prst="rect">
-            <a:avLst/>
-          </a:prstGeom>
-          <a:noFill/>
-          <a:ln/>
-        </p:spPr>
-        <p:txBody>
-          <a:bodyPr wrap="square" lIns="0" tIns="0" rIns="0" bIns="0" rtlCol="0" anchor="ctr"/>
-          <a:lstStyle/>
-          <a:p>
-            <a:pPr algn="ctr" indent="0" marL="0">
-              <a:buNone/>
-            </a:pPr>
-            <a:r>
-              <a:rPr lang="en-US" sz="860" b="1" dirty="0">
-                <a:solidFill>
-                  <a:srgbClr val="FFFFFF"/>
-                </a:solidFill>
-                <a:latin typeface="Calibri" pitchFamily="34" charset="0"/>
-                <a:ea typeface="Calibri" pitchFamily="34" charset="-122"/>
-                <a:cs typeface="Calibri" pitchFamily="34" charset="-120"/>
-              </a:rPr>
-              <a:t>Payments</a:t>
-            </a:r>
-            <a:endParaRPr lang="en-US" sz="860" dirty="0"/>
-          </a:p>
-        </p:txBody>
-      </p:sp>
-      <p:sp>
-        <p:nvSpPr>
-          <p:cNvPr id="28" name="Shape 26"/>
-          <p:cNvSpPr/>
-          <p:nvPr/>
-        </p:nvSpPr>
-        <p:spPr>
-          <a:xfrm>
-            <a:off x="749808" y="3730752"/>
-            <a:ext cx="1250899" cy="237744"/>
-          </a:xfrm>
-          <a:prstGeom prst="roundRect">
-            <a:avLst>
-              <a:gd name="adj" fmla="val 46154"/>
-            </a:avLst>
-          </a:prstGeom>
-          <a:solidFill>
-            <a:srgbClr val="12756F"/>
-          </a:solidFill>
-          <a:ln w="7620">
-            <a:solidFill>
-              <a:srgbClr val="0E5F5A"/>
-            </a:solidFill>
-            <a:prstDash val="solid"/>
-          </a:ln>
-        </p:spPr>
-      </p:sp>
-      <p:sp>
-        <p:nvSpPr>
-          <p:cNvPr id="29" name="Text 27"/>
-          <p:cNvSpPr txBox="1"/>
-          <p:nvPr/>
-        </p:nvSpPr>
-        <p:spPr>
-          <a:xfrm>
-            <a:off x="749808" y="3730752"/>
-            <a:ext cx="1250899" cy="237744"/>
-          </a:xfrm>
-          <a:prstGeom prst="rect">
-            <a:avLst/>
-          </a:prstGeom>
-          <a:noFill/>
-          <a:ln/>
-        </p:spPr>
-        <p:txBody>
-          <a:bodyPr wrap="square" lIns="0" tIns="0" rIns="0" bIns="0" rtlCol="0" anchor="ctr"/>
-          <a:lstStyle/>
-          <a:p>
-            <a:pPr algn="ctr" indent="0" marL="0">
-              <a:buNone/>
-            </a:pPr>
-            <a:r>
-              <a:rPr lang="en-US" sz="860" b="1" dirty="0">
-                <a:solidFill>
-                  <a:srgbClr val="FFFFFF"/>
-                </a:solidFill>
-                <a:latin typeface="Calibri" pitchFamily="34" charset="0"/>
-                <a:ea typeface="Calibri" pitchFamily="34" charset="-122"/>
-                <a:cs typeface="Calibri" pitchFamily="34" charset="-120"/>
-              </a:rPr>
-              <a:t>Quota register</a:t>
-            </a:r>
-            <a:endParaRPr lang="en-US" sz="860" dirty="0"/>
-          </a:p>
-        </p:txBody>
-      </p:sp>
-      <p:sp>
-        <p:nvSpPr>
-          <p:cNvPr id="30" name="Shape 28"/>
-          <p:cNvSpPr/>
-          <p:nvPr/>
-        </p:nvSpPr>
-        <p:spPr>
-          <a:xfrm>
-            <a:off x="2092147" y="3730752"/>
-            <a:ext cx="875995" cy="237744"/>
-          </a:xfrm>
-          <a:prstGeom prst="roundRect">
-            <a:avLst>
-              <a:gd name="adj" fmla="val 46154"/>
-            </a:avLst>
-          </a:prstGeom>
-          <a:solidFill>
-            <a:srgbClr val="12756F"/>
-          </a:solidFill>
-          <a:ln w="7620">
-            <a:solidFill>
-              <a:srgbClr val="0E5F5A"/>
-            </a:solidFill>
-            <a:prstDash val="solid"/>
-          </a:ln>
-        </p:spPr>
-      </p:sp>
-      <p:sp>
-        <p:nvSpPr>
-          <p:cNvPr id="31" name="Text 29"/>
-          <p:cNvSpPr txBox="1"/>
-          <p:nvPr/>
-        </p:nvSpPr>
-        <p:spPr>
-          <a:xfrm>
-            <a:off x="2092147" y="3730752"/>
-            <a:ext cx="875995" cy="237744"/>
-          </a:xfrm>
-          <a:prstGeom prst="rect">
-            <a:avLst/>
-          </a:prstGeom>
-          <a:noFill/>
-          <a:ln/>
-        </p:spPr>
-        <p:txBody>
-          <a:bodyPr wrap="square" lIns="0" tIns="0" rIns="0" bIns="0" rtlCol="0" anchor="ctr"/>
-          <a:lstStyle/>
-          <a:p>
-            <a:pPr algn="ctr" indent="0" marL="0">
-              <a:buNone/>
-            </a:pPr>
-            <a:r>
-              <a:rPr lang="en-US" sz="860" b="1" dirty="0">
-                <a:solidFill>
-                  <a:srgbClr val="FFFFFF"/>
-                </a:solidFill>
-                <a:latin typeface="Calibri" pitchFamily="34" charset="0"/>
-                <a:ea typeface="Calibri" pitchFamily="34" charset="-122"/>
-                <a:cs typeface="Calibri" pitchFamily="34" charset="-120"/>
-              </a:rPr>
-              <a:t>Reporting</a:t>
-            </a:r>
-            <a:endParaRPr lang="en-US" sz="860" dirty="0"/>
-          </a:p>
-        </p:txBody>
-      </p:sp>
-      <p:sp>
-        <p:nvSpPr>
-          <p:cNvPr id="32" name="Shape 30"/>
-          <p:cNvSpPr/>
-          <p:nvPr/>
-        </p:nvSpPr>
-        <p:spPr>
-          <a:xfrm rot="5400000">
-            <a:off x="3703320" y="4000500"/>
-            <a:ext cx="566928" cy="201168"/>
-          </a:xfrm>
-          <a:prstGeom prst="chevron">
-            <a:avLst/>
-          </a:prstGeom>
-          <a:solidFill>
-            <a:srgbClr val="C3CDD4"/>
-          </a:solidFill>
-          <a:ln/>
-        </p:spPr>
-      </p:sp>
-      <p:sp>
-        <p:nvSpPr>
-          <p:cNvPr id="33" name="Shape 31"/>
-          <p:cNvSpPr/>
-          <p:nvPr/>
-        </p:nvSpPr>
-        <p:spPr>
-          <a:xfrm>
-            <a:off x="548640" y="4242816"/>
-            <a:ext cx="6903720" cy="859536"/>
-          </a:xfrm>
-          <a:prstGeom prst="roundRect">
-            <a:avLst>
-              <a:gd name="adj" fmla="val 7447"/>
+              <a:gd name="adj" fmla="val 5385"/>
             </a:avLst>
           </a:prstGeom>
           <a:solidFill>
@@ -17015,30 +18030,30 @@
       </p:sp>
       <p:sp>
         <p:nvSpPr>
-          <p:cNvPr id="34" name="Text 32"/>
-          <p:cNvSpPr txBox="1"/>
-          <p:nvPr/>
-        </p:nvSpPr>
-        <p:spPr>
-          <a:xfrm>
-            <a:off x="749808" y="4334256"/>
-            <a:ext cx="4572000" cy="237744"/>
-          </a:xfrm>
-          <a:prstGeom prst="rect">
-            <a:avLst/>
-          </a:prstGeom>
-          <a:noFill/>
-          <a:ln/>
-        </p:spPr>
-        <p:txBody>
-          <a:bodyPr wrap="square" lIns="0" tIns="0" rIns="0" bIns="0" rtlCol="0" anchor="ctr"/>
-          <a:lstStyle/>
-          <a:p>
-            <a:pPr indent="0" marL="0">
-              <a:buNone/>
-            </a:pPr>
-            <a:r>
-              <a:rPr lang="en-US" sz="1250" b="1" dirty="0">
+          <p:cNvPr id="9" name="Text 6"/>
+          <p:cNvSpPr txBox="1"/>
+          <p:nvPr/>
+        </p:nvSpPr>
+        <p:spPr>
+          <a:xfrm>
+            <a:off x="8449056" y="2551176"/>
+            <a:ext cx="3017520" cy="219456"/>
+          </a:xfrm>
+          <a:prstGeom prst="rect">
+            <a:avLst/>
+          </a:prstGeom>
+          <a:noFill/>
+          <a:ln/>
+        </p:spPr>
+        <p:txBody>
+          <a:bodyPr wrap="square" lIns="0" tIns="0" rIns="0" bIns="0" rtlCol="0" anchor="ctr"/>
+          <a:lstStyle/>
+          <a:p>
+            <a:pPr indent="0" marL="0">
+              <a:buNone/>
+            </a:pPr>
+            <a:r>
+              <a:rPr lang="en-US" sz="1150" b="1" dirty="0">
                 <a:solidFill>
                   <a:srgbClr val="0C1E33"/>
                 </a:solidFill>
@@ -17046,38 +18061,41 @@
                 <a:ea typeface="Arial" pitchFamily="34" charset="-122"/>
                 <a:cs typeface="Arial" pitchFamily="34" charset="-120"/>
               </a:rPr>
-              <a:t>SAP S/4HANA Finance</a:t>
-            </a:r>
-            <a:endParaRPr lang="en-US" sz="1250" dirty="0"/>
-          </a:p>
-        </p:txBody>
-      </p:sp>
-      <p:sp>
-        <p:nvSpPr>
-          <p:cNvPr id="35" name="Text 33"/>
-          <p:cNvSpPr txBox="1"/>
-          <p:nvPr/>
-        </p:nvSpPr>
-        <p:spPr>
-          <a:xfrm>
-            <a:off x="749808" y="4553712"/>
-            <a:ext cx="6309360" cy="182880"/>
-          </a:xfrm>
-          <a:prstGeom prst="rect">
-            <a:avLst/>
-          </a:prstGeom>
-          <a:noFill/>
-          <a:ln/>
-        </p:spPr>
-        <p:txBody>
-          <a:bodyPr wrap="square" lIns="0" tIns="0" rIns="0" bIns="0" rtlCol="0" anchor="ctr"/>
-          <a:lstStyle/>
-          <a:p>
-            <a:pPr indent="0" marL="0">
-              <a:buNone/>
-            </a:pPr>
-            <a:r>
-              <a:rPr lang="en-US" sz="880" i="1" dirty="0">
+              <a:t>What flows back</a:t>
+            </a:r>
+            <a:endParaRPr lang="en-US" sz="1150" dirty="0"/>
+          </a:p>
+        </p:txBody>
+      </p:sp>
+      <p:sp>
+        <p:nvSpPr>
+          <p:cNvPr id="10" name="Text 7"/>
+          <p:cNvSpPr txBox="1"/>
+          <p:nvPr/>
+        </p:nvSpPr>
+        <p:spPr>
+          <a:xfrm>
+            <a:off x="8449056" y="2779776"/>
+            <a:ext cx="3035808" cy="786384"/>
+          </a:xfrm>
+          <a:prstGeom prst="rect">
+            <a:avLst/>
+          </a:prstGeom>
+          <a:noFill/>
+          <a:ln/>
+        </p:spPr>
+        <p:txBody>
+          <a:bodyPr wrap="square" lIns="0" tIns="0" rIns="0" bIns="0" rtlCol="0" anchor="ctr"/>
+          <a:lstStyle/>
+          <a:p>
+            <a:pPr indent="0" marL="0">
+              <a:lnSpc>
+                <a:spcPts val="1160"/>
+              </a:lnSpc>
+              <a:buNone/>
+            </a:pPr>
+            <a:r>
+              <a:rPr lang="en-US" sz="860" dirty="0">
                 <a:solidFill>
                   <a:srgbClr val="5A6C82"/>
                 </a:solidFill>
@@ -17085,32 +18103,32 @@
                 <a:ea typeface="Calibri" pitchFamily="34" charset="-122"/>
                 <a:cs typeface="Calibri" pitchFamily="34" charset="-120"/>
               </a:rPr>
-              <a:t>Permit costs and approved fine deductions post outward</a:t>
-            </a:r>
-            <a:endParaRPr lang="en-US" sz="880" dirty="0"/>
-          </a:p>
-        </p:txBody>
-      </p:sp>
-      <p:sp>
-        <p:nvSpPr>
-          <p:cNvPr id="36" name="Shape 34"/>
+              <a:t>Work permit and labour card numbers, Emirates ID, visa issue and expiry dates, straight into Employee Central. Nobody re-types anything and the two systems cannot disagree.</a:t>
+            </a:r>
+            <a:endParaRPr lang="en-US" sz="860" dirty="0"/>
+          </a:p>
+        </p:txBody>
+      </p:sp>
+      <p:sp>
+        <p:nvSpPr>
+          <p:cNvPr id="11" name="Shape 8"/>
           <p:cNvSpPr/>
           <p:nvPr/>
         </p:nvSpPr>
         <p:spPr>
           <a:xfrm>
-            <a:off x="749808" y="4773168"/>
-            <a:ext cx="1250899" cy="237744"/>
+            <a:off x="8275320" y="3749040"/>
+            <a:ext cx="3364992" cy="1188720"/>
           </a:xfrm>
           <a:prstGeom prst="roundRect">
             <a:avLst>
-              <a:gd name="adj" fmla="val 46154"/>
+              <a:gd name="adj" fmla="val 5385"/>
             </a:avLst>
           </a:prstGeom>
           <a:solidFill>
-            <a:srgbClr val="FFFFFF"/>
+            <a:srgbClr val="F4F6F7"/>
           </a:solidFill>
-          <a:ln w="7620">
+          <a:ln w="11430">
             <a:solidFill>
               <a:srgbClr val="E3E7EA"/>
             </a:solidFill>
@@ -17120,251 +18138,53 @@
       </p:sp>
       <p:sp>
         <p:nvSpPr>
-          <p:cNvPr id="37" name="Text 35"/>
-          <p:cNvSpPr txBox="1"/>
-          <p:nvPr/>
-        </p:nvSpPr>
-        <p:spPr>
-          <a:xfrm>
-            <a:off x="749808" y="4773168"/>
-            <a:ext cx="1250899" cy="237744"/>
-          </a:xfrm>
-          <a:prstGeom prst="rect">
-            <a:avLst/>
-          </a:prstGeom>
-          <a:noFill/>
-          <a:ln/>
-        </p:spPr>
-        <p:txBody>
-          <a:bodyPr wrap="square" lIns="0" tIns="0" rIns="0" bIns="0" rtlCol="0" anchor="ctr"/>
-          <a:lstStyle/>
-          <a:p>
-            <a:pPr algn="ctr" indent="0" marL="0">
-              <a:buNone/>
-            </a:pPr>
-            <a:r>
-              <a:rPr lang="en-US" sz="860" b="1" dirty="0">
-                <a:solidFill>
-                  <a:srgbClr val="12756F"/>
-                </a:solidFill>
-                <a:latin typeface="Calibri" pitchFamily="34" charset="0"/>
-                <a:ea typeface="Calibri" pitchFamily="34" charset="-122"/>
-                <a:cs typeface="Calibri" pitchFamily="34" charset="-120"/>
-              </a:rPr>
-              <a:t>Payments to GL</a:t>
-            </a:r>
-            <a:endParaRPr lang="en-US" sz="860" dirty="0"/>
-          </a:p>
-        </p:txBody>
-      </p:sp>
-      <p:sp>
-        <p:nvSpPr>
-          <p:cNvPr id="38" name="Shape 36"/>
-          <p:cNvSpPr/>
-          <p:nvPr/>
-        </p:nvSpPr>
-        <p:spPr>
-          <a:xfrm>
-            <a:off x="2092147" y="4773168"/>
-            <a:ext cx="1325880" cy="237744"/>
-          </a:xfrm>
-          <a:prstGeom prst="roundRect">
-            <a:avLst>
-              <a:gd name="adj" fmla="val 46154"/>
-            </a:avLst>
-          </a:prstGeom>
-          <a:solidFill>
-            <a:srgbClr val="FFFFFF"/>
-          </a:solidFill>
-          <a:ln w="7620">
-            <a:solidFill>
-              <a:srgbClr val="E3E7EA"/>
-            </a:solidFill>
-            <a:prstDash val="solid"/>
-          </a:ln>
-        </p:spPr>
-      </p:sp>
-      <p:sp>
-        <p:nvSpPr>
-          <p:cNvPr id="39" name="Text 37"/>
-          <p:cNvSpPr txBox="1"/>
-          <p:nvPr/>
-        </p:nvSpPr>
-        <p:spPr>
-          <a:xfrm>
-            <a:off x="2092147" y="4773168"/>
-            <a:ext cx="1325880" cy="237744"/>
-          </a:xfrm>
-          <a:prstGeom prst="rect">
-            <a:avLst/>
-          </a:prstGeom>
-          <a:noFill/>
-          <a:ln/>
-        </p:spPr>
-        <p:txBody>
-          <a:bodyPr wrap="square" lIns="0" tIns="0" rIns="0" bIns="0" rtlCol="0" anchor="ctr"/>
-          <a:lstStyle/>
-          <a:p>
-            <a:pPr algn="ctr" indent="0" marL="0">
-              <a:buNone/>
-            </a:pPr>
-            <a:r>
-              <a:rPr lang="en-US" sz="860" b="1" dirty="0">
-                <a:solidFill>
-                  <a:srgbClr val="12756F"/>
-                </a:solidFill>
-                <a:latin typeface="Calibri" pitchFamily="34" charset="0"/>
-                <a:ea typeface="Calibri" pitchFamily="34" charset="-122"/>
-                <a:cs typeface="Calibri" pitchFamily="34" charset="-120"/>
-              </a:rPr>
-              <a:t>Journal posting</a:t>
-            </a:r>
-            <a:endParaRPr lang="en-US" sz="860" dirty="0"/>
-          </a:p>
-        </p:txBody>
-      </p:sp>
-      <p:sp>
-        <p:nvSpPr>
-          <p:cNvPr id="40" name="Shape 38"/>
-          <p:cNvSpPr/>
-          <p:nvPr/>
-        </p:nvSpPr>
-        <p:spPr>
-          <a:xfrm>
-            <a:off x="3509467" y="4773168"/>
-            <a:ext cx="1550822" cy="237744"/>
-          </a:xfrm>
-          <a:prstGeom prst="roundRect">
-            <a:avLst>
-              <a:gd name="adj" fmla="val 46154"/>
-            </a:avLst>
-          </a:prstGeom>
-          <a:solidFill>
-            <a:srgbClr val="FFFFFF"/>
-          </a:solidFill>
-          <a:ln w="7620">
-            <a:solidFill>
-              <a:srgbClr val="E3E7EA"/>
-            </a:solidFill>
-            <a:prstDash val="solid"/>
-          </a:ln>
-        </p:spPr>
-      </p:sp>
-      <p:sp>
-        <p:nvSpPr>
-          <p:cNvPr id="41" name="Text 39"/>
-          <p:cNvSpPr txBox="1"/>
-          <p:nvPr/>
-        </p:nvSpPr>
-        <p:spPr>
-          <a:xfrm>
-            <a:off x="3509467" y="4773168"/>
-            <a:ext cx="1550822" cy="237744"/>
-          </a:xfrm>
-          <a:prstGeom prst="rect">
-            <a:avLst/>
-          </a:prstGeom>
-          <a:noFill/>
-          <a:ln/>
-        </p:spPr>
-        <p:txBody>
-          <a:bodyPr wrap="square" lIns="0" tIns="0" rIns="0" bIns="0" rtlCol="0" anchor="ctr"/>
-          <a:lstStyle/>
-          <a:p>
-            <a:pPr algn="ctr" indent="0" marL="0">
-              <a:buNone/>
-            </a:pPr>
-            <a:r>
-              <a:rPr lang="en-US" sz="860" b="1" dirty="0">
-                <a:solidFill>
-                  <a:srgbClr val="12756F"/>
-                </a:solidFill>
-                <a:latin typeface="Calibri" pitchFamily="34" charset="0"/>
-                <a:ea typeface="Calibri" pitchFamily="34" charset="-122"/>
-                <a:cs typeface="Calibri" pitchFamily="34" charset="-120"/>
-              </a:rPr>
-              <a:t>Payroll deductions</a:t>
-            </a:r>
-            <a:endParaRPr lang="en-US" sz="860" dirty="0"/>
-          </a:p>
-        </p:txBody>
-      </p:sp>
-      <p:sp>
-        <p:nvSpPr>
-          <p:cNvPr id="42" name="Shape 40"/>
-          <p:cNvSpPr/>
-          <p:nvPr/>
-        </p:nvSpPr>
-        <p:spPr>
-          <a:xfrm>
-            <a:off x="7699248" y="1792224"/>
-            <a:ext cx="3913632" cy="1115568"/>
-          </a:xfrm>
-          <a:prstGeom prst="roundRect">
-            <a:avLst>
-              <a:gd name="adj" fmla="val 5738"/>
-            </a:avLst>
-          </a:prstGeom>
-          <a:solidFill>
-            <a:srgbClr val="0C1E33"/>
-          </a:solidFill>
-          <a:ln w="12700">
-            <a:solidFill>
-              <a:srgbClr val="16304C"/>
-            </a:solidFill>
-            <a:prstDash val="solid"/>
-          </a:ln>
-        </p:spPr>
-      </p:sp>
-      <p:sp>
-        <p:nvSpPr>
-          <p:cNvPr id="43" name="Text 41"/>
-          <p:cNvSpPr txBox="1"/>
-          <p:nvPr/>
-        </p:nvSpPr>
-        <p:spPr>
-          <a:xfrm>
-            <a:off x="7900416" y="1920240"/>
-            <a:ext cx="3566160" cy="237744"/>
-          </a:xfrm>
-          <a:prstGeom prst="rect">
-            <a:avLst/>
-          </a:prstGeom>
-          <a:noFill/>
-          <a:ln/>
-        </p:spPr>
-        <p:txBody>
-          <a:bodyPr wrap="square" lIns="0" tIns="0" rIns="0" bIns="0" rtlCol="0" anchor="ctr"/>
-          <a:lstStyle/>
-          <a:p>
-            <a:pPr indent="0" marL="0">
-              <a:buNone/>
-            </a:pPr>
-            <a:r>
-              <a:rPr lang="en-US" sz="1250" b="1" dirty="0">
-                <a:solidFill>
-                  <a:srgbClr val="FFFFFF"/>
+          <p:cNvPr id="12" name="Text 9"/>
+          <p:cNvSpPr txBox="1"/>
+          <p:nvPr/>
+        </p:nvSpPr>
+        <p:spPr>
+          <a:xfrm>
+            <a:off x="8449056" y="3849624"/>
+            <a:ext cx="3017520" cy="219456"/>
+          </a:xfrm>
+          <a:prstGeom prst="rect">
+            <a:avLst/>
+          </a:prstGeom>
+          <a:noFill/>
+          <a:ln/>
+        </p:spPr>
+        <p:txBody>
+          <a:bodyPr wrap="square" lIns="0" tIns="0" rIns="0" bIns="0" rtlCol="0" anchor="ctr"/>
+          <a:lstStyle/>
+          <a:p>
+            <a:pPr indent="0" marL="0">
+              <a:buNone/>
+            </a:pPr>
+            <a:r>
+              <a:rPr lang="en-US" sz="1150" b="1" dirty="0">
+                <a:solidFill>
+                  <a:srgbClr val="0C1E33"/>
                 </a:solidFill>
                 <a:latin typeface="Arial" pitchFamily="34" charset="0"/>
                 <a:ea typeface="Arial" pitchFamily="34" charset="-122"/>
                 <a:cs typeface="Arial" pitchFamily="34" charset="-120"/>
               </a:rPr>
-              <a:t>Government portals</a:t>
-            </a:r>
-            <a:endParaRPr lang="en-US" sz="1250" dirty="0"/>
-          </a:p>
-        </p:txBody>
-      </p:sp>
-      <p:sp>
-        <p:nvSpPr>
-          <p:cNvPr id="44" name="Text 42"/>
-          <p:cNvSpPr txBox="1"/>
-          <p:nvPr/>
-        </p:nvSpPr>
-        <p:spPr>
-          <a:xfrm>
-            <a:off x="7900416" y="2176272"/>
-            <a:ext cx="3511296" cy="658368"/>
+              <a:t>What flows down</a:t>
+            </a:r>
+            <a:endParaRPr lang="en-US" sz="1150" dirty="0"/>
+          </a:p>
+        </p:txBody>
+      </p:sp>
+      <p:sp>
+        <p:nvSpPr>
+          <p:cNvPr id="13" name="Text 10"/>
+          <p:cNvSpPr txBox="1"/>
+          <p:nvPr/>
+        </p:nvSpPr>
+        <p:spPr>
+          <a:xfrm>
+            <a:off x="8449056" y="4078224"/>
+            <a:ext cx="3035808" cy="786384"/>
           </a:xfrm>
           <a:prstGeom prst="rect">
             <a:avLst/>
@@ -17378,45 +18198,45 @@
           <a:p>
             <a:pPr indent="0" marL="0">
               <a:lnSpc>
-                <a:spcPts val="1200"/>
+                <a:spcPts val="1160"/>
               </a:lnSpc>
               <a:buNone/>
             </a:pPr>
             <a:r>
-              <a:rPr lang="en-US" sz="880" dirty="0">
-                <a:solidFill>
-                  <a:srgbClr val="7FD4CC"/>
-                </a:solidFill>
-                <a:latin typeface="Calibri" pitchFamily="34" charset="0"/>
-                <a:ea typeface="Calibri" pitchFamily="34" charset="-122"/>
-                <a:cs typeface="Calibri" pitchFamily="34" charset="-120"/>
-              </a:rPr>
-              <a:t>Qiwa · Muqeem · Absher · MOHRE · ICP · GDRFA · LMRA · PAM · ADLSA · SCFHS · DHA · DOH</a:t>
-            </a:r>
-            <a:endParaRPr lang="en-US" sz="880" dirty="0"/>
-          </a:p>
-        </p:txBody>
-      </p:sp>
-      <p:sp>
-        <p:nvSpPr>
-          <p:cNvPr id="45" name="Shape 43"/>
+              <a:rPr lang="en-US" sz="860" dirty="0">
+                <a:solidFill>
+                  <a:srgbClr val="5A6C82"/>
+                </a:solidFill>
+                <a:latin typeface="Calibri" pitchFamily="34" charset="0"/>
+                <a:ea typeface="Calibri" pitchFamily="34" charset="-122"/>
+                <a:cs typeface="Calibri" pitchFamily="34" charset="-120"/>
+              </a:rPr>
+              <a:t>Every payment with its amount, VAT, reference, receipt and GL account, posted to S/4HANA as a journal. Approved fines go to payroll as deductions.</a:t>
+            </a:r>
+            <a:endParaRPr lang="en-US" sz="860" dirty="0"/>
+          </a:p>
+        </p:txBody>
+      </p:sp>
+      <p:sp>
+        <p:nvSpPr>
+          <p:cNvPr id="14" name="Shape 11"/>
           <p:cNvSpPr/>
           <p:nvPr/>
         </p:nvSpPr>
         <p:spPr>
           <a:xfrm>
-            <a:off x="7699248" y="3054096"/>
-            <a:ext cx="3913632" cy="3035808"/>
+            <a:off x="8275320" y="5047488"/>
+            <a:ext cx="3364992" cy="1188720"/>
           </a:xfrm>
           <a:prstGeom prst="roundRect">
             <a:avLst>
-              <a:gd name="adj" fmla="val 2108"/>
+              <a:gd name="adj" fmla="val 5385"/>
             </a:avLst>
           </a:prstGeom>
           <a:solidFill>
             <a:srgbClr val="FCF6E4"/>
           </a:solidFill>
-          <a:ln w="12700">
+          <a:ln w="11430">
             <a:solidFill>
               <a:srgbClr val="C9A227"/>
             </a:solidFill>
@@ -17426,30 +18246,30 @@
       </p:sp>
       <p:sp>
         <p:nvSpPr>
-          <p:cNvPr id="46" name="Text 44"/>
-          <p:cNvSpPr txBox="1"/>
-          <p:nvPr/>
-        </p:nvSpPr>
-        <p:spPr>
-          <a:xfrm>
-            <a:off x="7900416" y="3182112"/>
-            <a:ext cx="3566160" cy="219456"/>
-          </a:xfrm>
-          <a:prstGeom prst="rect">
-            <a:avLst/>
-          </a:prstGeom>
-          <a:noFill/>
-          <a:ln/>
-        </p:spPr>
-        <p:txBody>
-          <a:bodyPr wrap="square" lIns="0" tIns="0" rIns="0" bIns="0" rtlCol="0" anchor="ctr"/>
-          <a:lstStyle/>
-          <a:p>
-            <a:pPr indent="0" marL="0">
-              <a:buNone/>
-            </a:pPr>
-            <a:r>
-              <a:rPr lang="en-US" sz="1200" b="1" dirty="0">
+          <p:cNvPr id="15" name="Text 12"/>
+          <p:cNvSpPr txBox="1"/>
+          <p:nvPr/>
+        </p:nvSpPr>
+        <p:spPr>
+          <a:xfrm>
+            <a:off x="8449056" y="5148072"/>
+            <a:ext cx="3017520" cy="219456"/>
+          </a:xfrm>
+          <a:prstGeom prst="rect">
+            <a:avLst/>
+          </a:prstGeom>
+          <a:noFill/>
+          <a:ln/>
+        </p:spPr>
+        <p:txBody>
+          <a:bodyPr wrap="square" lIns="0" tIns="0" rIns="0" bIns="0" rtlCol="0" anchor="ctr"/>
+          <a:lstStyle/>
+          <a:p>
+            <a:pPr indent="0" marL="0">
+              <a:buNone/>
+            </a:pPr>
+            <a:r>
+              <a:rPr lang="en-US" sz="1150" b="1" dirty="0">
                 <a:solidFill>
                   <a:srgbClr val="7A6410"/>
                 </a:solidFill>
@@ -17457,22 +18277,22 @@
                 <a:ea typeface="Arial" pitchFamily="34" charset="-122"/>
                 <a:cs typeface="Arial" pitchFamily="34" charset="-120"/>
               </a:rPr>
-              <a:t>About government APIs</a:t>
-            </a:r>
-            <a:endParaRPr lang="en-US" sz="1200" dirty="0"/>
-          </a:p>
-        </p:txBody>
-      </p:sp>
-      <p:sp>
-        <p:nvSpPr>
-          <p:cNvPr id="47" name="Text 45"/>
-          <p:cNvSpPr txBox="1"/>
-          <p:nvPr/>
-        </p:nvSpPr>
-        <p:spPr>
-          <a:xfrm>
-            <a:off x="7900416" y="3456432"/>
-            <a:ext cx="3511296" cy="2523744"/>
+              <a:t>The dashed arrows</a:t>
+            </a:r>
+            <a:endParaRPr lang="en-US" sz="1150" dirty="0"/>
+          </a:p>
+        </p:txBody>
+      </p:sp>
+      <p:sp>
+        <p:nvSpPr>
+          <p:cNvPr id="16" name="Text 13"/>
+          <p:cNvSpPr txBox="1"/>
+          <p:nvPr/>
+        </p:nvSpPr>
+        <p:spPr>
+          <a:xfrm>
+            <a:off x="8449056" y="5376672"/>
+            <a:ext cx="3035808" cy="786384"/>
           </a:xfrm>
           <a:prstGeom prst="rect">
             <a:avLst/>
@@ -17486,29 +18306,12 @@
           <a:p>
             <a:pPr indent="0" marL="0">
               <a:lnSpc>
-                <a:spcPts val="1140"/>
+                <a:spcPts val="1160"/>
               </a:lnSpc>
               <a:buNone/>
             </a:pPr>
             <a:r>
-              <a:rPr lang="en-US" sz="840" b="1" dirty="0">
-                <a:solidFill>
-                  <a:srgbClr val="0C1E33"/>
-                </a:solidFill>
-                <a:latin typeface="Calibri" pitchFamily="34" charset="0"/>
-                <a:ea typeface="Calibri" pitchFamily="34" charset="-122"/>
-                <a:cs typeface="Calibri" pitchFamily="34" charset="-120"/>
-              </a:rPr>
-              <a:t>We built this ready for APIs. </a:t>
-            </a:r>
-            <a:pPr indent="0" marL="0">
-              <a:lnSpc>
-                <a:spcPts val="1140"/>
-              </a:lnSpc>
-              <a:buNone/>
-            </a:pPr>
-            <a:r>
-              <a:rPr lang="en-US" sz="840" dirty="0">
+              <a:rPr lang="en-US" sz="860" dirty="0">
                 <a:solidFill>
                   <a:srgbClr val="5A6C82"/>
                 </a:solidFill>
@@ -17516,85 +18319,15 @@
                 <a:ea typeface="Calibri" pitchFamily="34" charset="-122"/>
                 <a:cs typeface="Calibri" pitchFamily="34" charset="-120"/>
               </a:rPr>
-              <a:t>Every government-facing step is a service call with a slot waiting behind it, so connecting a portal means plugging it in rather than rebuilding the process.
-</a:t>
-            </a:r>
-            <a:pPr indent="0" marL="0">
-              <a:lnSpc>
-                <a:spcPts val="1140"/>
-              </a:lnSpc>
-              <a:buNone/>
-            </a:pPr>
-            <a:r>
-              <a:rPr lang="en-US" sz="840" b="1" dirty="0">
-                <a:solidFill>
-                  <a:srgbClr val="0C1E33"/>
-                </a:solidFill>
-                <a:latin typeface="Calibri" pitchFamily="34" charset="0"/>
-                <a:ea typeface="Calibri" pitchFamily="34" charset="-122"/>
-                <a:cs typeface="Calibri" pitchFamily="34" charset="-120"/>
-              </a:rPr>
-              <a:t>What we will need from you. </a:t>
-            </a:r>
-            <a:pPr indent="0" marL="0">
-              <a:lnSpc>
-                <a:spcPts val="1140"/>
-              </a:lnSpc>
-              <a:buNone/>
-            </a:pPr>
-            <a:r>
-              <a:rPr lang="en-US" sz="840" dirty="0">
-                <a:solidFill>
-                  <a:srgbClr val="5A6C82"/>
-                </a:solidFill>
-                <a:latin typeface="Calibri" pitchFamily="34" charset="0"/>
-                <a:ea typeface="Calibri" pitchFamily="34" charset="-122"/>
-                <a:cs typeface="Calibri" pitchFamily="34" charset="-120"/>
-              </a:rPr>
-              <a:t>GCC governments do not publish open APIs, and when they do give access they give it to the employer, not to a software vendor. So you go to each authority yourself (Qiwa and Muqeem in Saudi, MOHRE and ICP in the UAE, LMRA in Bahrain) and ask for API credentials, the specification and a sandbox under your own establishment registration. Hand those to us and we build the connector.
-</a:t>
-            </a:r>
-            <a:pPr indent="0" marL="0">
-              <a:lnSpc>
-                <a:spcPts val="1140"/>
-              </a:lnSpc>
-              <a:buNone/>
-            </a:pPr>
-            <a:r>
-              <a:rPr lang="en-US" sz="840" b="1" dirty="0">
-                <a:solidFill>
-                  <a:srgbClr val="0C1E33"/>
-                </a:solidFill>
-                <a:latin typeface="Calibri" pitchFamily="34" charset="0"/>
-                <a:ea typeface="Calibri" pitchFamily="34" charset="-122"/>
-                <a:cs typeface="Calibri" pitchFamily="34" charset="-120"/>
-              </a:rPr>
-              <a:t>Until then </a:t>
-            </a:r>
-            <a:pPr indent="0" marL="0">
-              <a:lnSpc>
-                <a:spcPts val="1140"/>
-              </a:lnSpc>
-              <a:buNone/>
-            </a:pPr>
-            <a:r>
-              <a:rPr lang="en-US" sz="840" dirty="0">
-                <a:solidFill>
-                  <a:srgbClr val="5A6C82"/>
-                </a:solidFill>
-                <a:latin typeface="Calibri" pitchFamily="34" charset="0"/>
-                <a:ea typeface="Calibri" pitchFamily="34" charset="-122"/>
-                <a:cs typeface="Calibri" pitchFamily="34" charset="-120"/>
-              </a:rPr>
-              <a:t>the government step stays a tracked manual PRO activity, with reference number, receipt and status captured in the milestone — which is how the application is designed to operate from day one, with or without a portal connection.</a:t>
-            </a:r>
-            <a:endParaRPr lang="en-US" sz="840" dirty="0"/>
-          </a:p>
-        </p:txBody>
-      </p:sp>
-      <p:sp>
-        <p:nvSpPr>
-          <p:cNvPr id="48" name="Text 46"/>
+              <a:t>The two government arrows are the ones a person still makes. The connectors behind them are built. The day you hand us credentials they go solid, and nothing else in this picture changes.</a:t>
+            </a:r>
+            <a:endParaRPr lang="en-US" sz="860" dirty="0"/>
+          </a:p>
+        </p:txBody>
+      </p:sp>
+      <p:sp>
+        <p:nvSpPr>
+          <p:cNvPr id="17" name="Text 14"/>
           <p:cNvSpPr txBox="1"/>
           <p:nvPr/>
         </p:nvSpPr>
@@ -17633,7 +18366,7 @@
       </p:sp>
       <p:sp>
         <p:nvSpPr>
-          <p:cNvPr id="49" name="Text 47"/>
+          <p:cNvPr id="18" name="Text 15"/>
           <p:cNvSpPr txBox="1"/>
           <p:nvPr/>
         </p:nvSpPr>

--- a/deck/INK_IT_Visa_and_Permits_GCC.pptx
+++ b/deck/INK_IT_Visa_and_Permits_GCC.pptx
@@ -3153,7 +3153,7 @@
                 <a:ea typeface="Calibri" pitchFamily="34" charset="-122"/>
                 <a:cs typeface="Calibri" pitchFamily="34" charset="-120"/>
               </a:rPr>
-              <a:t>The governed layer — where the work is actually managed</a:t>
+              <a:t>The governed layer, where the work is actually managed</a:t>
             </a:r>
             <a:endParaRPr lang="en-US" sz="880" dirty="0"/>
           </a:p>
@@ -4175,7 +4175,7 @@
                 <a:ea typeface="Calibri" pitchFamily="34" charset="-122"/>
                 <a:cs typeface="Calibri" pitchFamily="34" charset="-120"/>
               </a:rPr>
-              <a:t>the government step stays a tracked manual PRO activity, with reference number, receipt and status captured in the milestone — which is how the application is designed to operate from day one, with or without a portal connection.</a:t>
+              <a:t>the government step stays a tracked manual PRO activity, with reference number, receipt and status captured in the milestone. That is how the application is designed to operate from day one, with or without a portal connection.</a:t>
             </a:r>
             <a:endParaRPr lang="en-US" sz="840" dirty="0"/>
           </a:p>
@@ -8439,7 +8439,7 @@
                 <a:ea typeface="Calibri" pitchFamily="34" charset="-122"/>
                 <a:cs typeface="Calibri" pitchFamily="34" charset="-120"/>
               </a:rPr>
-              <a:t>The home dashboard — running, completed and cancelled counts across all three lifecycles, over a queue of initiated cases with priority, status and assigned agent.</a:t>
+              <a:t>The home dashboard: running, completed and cancelled counts across all three lifecycles, over a queue of initiated cases with priority, status and assigned agent.</a:t>
             </a:r>
             <a:endParaRPr lang="en-US" sz="1000" dirty="0"/>
           </a:p>
@@ -9182,7 +9182,7 @@
         <p:spPr>
           <a:xfrm>
             <a:off x="548640" y="1243584"/>
-            <a:ext cx="10424160" cy="420624"/>
+            <a:ext cx="10424160" cy="274320"/>
           </a:xfrm>
           <a:prstGeom prst="rect">
             <a:avLst/>
@@ -9206,7 +9206,7 @@
                 <a:ea typeface="Calibri" pitchFamily="34" charset="-122"/>
                 <a:cs typeface="Calibri" pitchFamily="34" charset="-120"/>
               </a:rPr>
-              <a:t>Each role only sees what is actually theirs, with a due date on it. That is how the PRO desk, recruitment, onboarding and employee relations stay in step.</a:t>
+              <a:t>Each role sees only what is theirs, with a due date on it. That is how the PRO desk, recruitment and onboarding stay in step.</a:t>
             </a:r>
             <a:endParaRPr lang="en-US" sz="1300" dirty="0"/>
           </a:p>
@@ -9221,11 +9221,11 @@
         <p:spPr>
           <a:xfrm>
             <a:off x="548640" y="1828800"/>
-            <a:ext cx="10424160" cy="548640"/>
+            <a:ext cx="10424160" cy="603504"/>
           </a:xfrm>
           <a:prstGeom prst="roundRect">
             <a:avLst>
-              <a:gd name="adj" fmla="val 10000"/>
+              <a:gd name="adj" fmla="val 9091"/>
             </a:avLst>
           </a:prstGeom>
           <a:solidFill>
@@ -9384,27 +9384,28 @@
         </p:nvSpPr>
         <p:spPr>
           <a:xfrm>
-            <a:off x="3246120" y="1883664"/>
-            <a:ext cx="4846320" cy="438912"/>
-          </a:xfrm>
-          <a:prstGeom prst="rect">
-            <a:avLst/>
-          </a:prstGeom>
-          <a:noFill/>
-          <a:ln/>
-        </p:spPr>
-        <p:txBody>
-          <a:bodyPr wrap="square" lIns="0" tIns="0" rIns="0" bIns="0" rtlCol="0" anchor="ctr"/>
-          <a:lstStyle/>
-          <a:p>
-            <a:pPr indent="0" marL="0">
+            <a:off x="3200400" y="1897380"/>
+            <a:ext cx="4956048" cy="475488"/>
+          </a:xfrm>
+          <a:prstGeom prst="rect">
+            <a:avLst/>
+          </a:prstGeom>
+          <a:noFill/>
+          <a:ln/>
+        </p:spPr>
+        <p:txBody>
+          <a:bodyPr wrap="square" lIns="0" tIns="0" rIns="0" bIns="0" rtlCol="0" anchor="ctr"/>
+          <a:lstStyle/>
+          <a:p>
+            <a:pPr marL="342900" indent="-342900">
               <a:lnSpc>
-                <a:spcPts val="1250"/>
+                <a:spcPts val="1100"/>
               </a:lnSpc>
-              <a:buNone/>
-            </a:pPr>
-            <a:r>
-              <a:rPr lang="en-US" sz="950" dirty="0">
+              <a:buSzPct val="100000"/>
+              <a:buChar char="•"/>
+            </a:pPr>
+            <a:r>
+              <a:rPr lang="en-US" sz="860" dirty="0">
                 <a:solidFill>
                   <a:srgbClr val="5A6C82"/>
                 </a:solidFill>
@@ -9412,9 +9413,51 @@
                 <a:ea typeface="Calibri" pitchFamily="34" charset="-122"/>
                 <a:cs typeface="Calibri" pitchFamily="34" charset="-120"/>
               </a:rPr>
-              <a:t>Claims cases from the queue; files MOHRE / Qiwa applications; records every payment and receipt; books medicals and biometrics; tracks stamping to ID collection; maintains quota.</a:t>
-            </a:r>
-            <a:endParaRPr lang="en-US" sz="950" dirty="0"/>
+              <a:t>Claims cases from the queue and files them with the authority</a:t>
+            </a:r>
+            <a:endParaRPr lang="en-US" sz="860" dirty="0"/>
+          </a:p>
+          <a:p>
+            <a:pPr marL="342900" indent="-342900">
+              <a:lnSpc>
+                <a:spcPts val="1100"/>
+              </a:lnSpc>
+              <a:buSzPct val="100000"/>
+              <a:buChar char="•"/>
+            </a:pPr>
+            <a:r>
+              <a:rPr lang="en-US" sz="860" dirty="0">
+                <a:solidFill>
+                  <a:srgbClr val="5A6C82"/>
+                </a:solidFill>
+                <a:latin typeface="Calibri" pitchFamily="34" charset="0"/>
+                <a:ea typeface="Calibri" pitchFamily="34" charset="-122"/>
+                <a:cs typeface="Calibri" pitchFamily="34" charset="-120"/>
+              </a:rPr>
+              <a:t>Records every payment and receipt as it happens</a:t>
+            </a:r>
+            <a:endParaRPr lang="en-US" sz="860" dirty="0"/>
+          </a:p>
+          <a:p>
+            <a:pPr marL="342900" indent="-342900">
+              <a:lnSpc>
+                <a:spcPts val="1100"/>
+              </a:lnSpc>
+              <a:buSzPct val="100000"/>
+              <a:buChar char="•"/>
+            </a:pPr>
+            <a:r>
+              <a:rPr lang="en-US" sz="860" dirty="0">
+                <a:solidFill>
+                  <a:srgbClr val="5A6C82"/>
+                </a:solidFill>
+                <a:latin typeface="Calibri" pitchFamily="34" charset="0"/>
+                <a:ea typeface="Calibri" pitchFamily="34" charset="-122"/>
+                <a:cs typeface="Calibri" pitchFamily="34" charset="-120"/>
+              </a:rPr>
+              <a:t>Books medicals and biometrics, tracks stamping to ID collection</a:t>
+            </a:r>
+            <a:endParaRPr lang="en-US" sz="860" dirty="0"/>
           </a:p>
         </p:txBody>
       </p:sp>
@@ -9426,8 +9469,8 @@
         </p:nvSpPr>
         <p:spPr>
           <a:xfrm>
-            <a:off x="8229600" y="1883664"/>
-            <a:ext cx="2615184" cy="438912"/>
+            <a:off x="8229600" y="1897380"/>
+            <a:ext cx="2615184" cy="475488"/>
           </a:xfrm>
           <a:prstGeom prst="rect">
             <a:avLst/>
@@ -9441,12 +9484,12 @@
           <a:p>
             <a:pPr indent="0" marL="0">
               <a:lnSpc>
-                <a:spcPts val="1250"/>
+                <a:spcPts val="1160"/>
               </a:lnSpc>
               <a:buNone/>
             </a:pPr>
             <a:r>
-              <a:rPr lang="en-US" sz="950" b="1" i="1" dirty="0">
+              <a:rPr lang="en-US" sz="930" b="1" i="1" dirty="0">
                 <a:solidFill>
                   <a:srgbClr val="17795E"/>
                 </a:solidFill>
@@ -9456,7 +9499,7 @@
               </a:rPr>
               <a:t>A queue with priorities, due dates and proof of what was done.</a:t>
             </a:r>
-            <a:endParaRPr lang="en-US" sz="950" dirty="0"/>
+            <a:endParaRPr lang="en-US" sz="930" dirty="0"/>
           </a:p>
         </p:txBody>
       </p:sp>
@@ -9468,12 +9511,12 @@
         </p:nvSpPr>
         <p:spPr>
           <a:xfrm>
-            <a:off x="548640" y="2414016"/>
-            <a:ext cx="10424160" cy="548640"/>
+            <a:off x="548640" y="2473452"/>
+            <a:ext cx="10424160" cy="603504"/>
           </a:xfrm>
           <a:prstGeom prst="roundRect">
             <a:avLst>
-              <a:gd name="adj" fmla="val 10000"/>
+              <a:gd name="adj" fmla="val 9091"/>
             </a:avLst>
           </a:prstGeom>
           <a:solidFill>
@@ -9495,7 +9538,7 @@
         </p:nvSpPr>
         <p:spPr>
           <a:xfrm>
-            <a:off x="694944" y="2514600"/>
+            <a:off x="694944" y="2574036"/>
             <a:ext cx="347472" cy="347472"/>
           </a:xfrm>
           <a:prstGeom prst="ellipse">
@@ -9515,7 +9558,7 @@
         </p:nvSpPr>
         <p:spPr>
           <a:xfrm>
-            <a:off x="694944" y="2514600"/>
+            <a:off x="694944" y="2574036"/>
             <a:ext cx="347472" cy="347472"/>
           </a:xfrm>
           <a:prstGeom prst="rect">
@@ -9554,7 +9597,7 @@
         </p:nvSpPr>
         <p:spPr>
           <a:xfrm>
-            <a:off x="1152144" y="2468880"/>
+            <a:off x="1152144" y="2528316"/>
             <a:ext cx="1965960" cy="219456"/>
           </a:xfrm>
           <a:prstGeom prst="rect">
@@ -9593,7 +9636,7 @@
         </p:nvSpPr>
         <p:spPr>
           <a:xfrm>
-            <a:off x="1152144" y="2688336"/>
+            <a:off x="1152144" y="2747772"/>
             <a:ext cx="1965960" cy="182880"/>
           </a:xfrm>
           <a:prstGeom prst="rect">
@@ -9632,27 +9675,28 @@
         </p:nvSpPr>
         <p:spPr>
           <a:xfrm>
-            <a:off x="3246120" y="2468880"/>
-            <a:ext cx="4846320" cy="438912"/>
-          </a:xfrm>
-          <a:prstGeom prst="rect">
-            <a:avLst/>
-          </a:prstGeom>
-          <a:noFill/>
-          <a:ln/>
-        </p:spPr>
-        <p:txBody>
-          <a:bodyPr wrap="square" lIns="0" tIns="0" rIns="0" bIns="0" rtlCol="0" anchor="ctr"/>
-          <a:lstStyle/>
-          <a:p>
-            <a:pPr indent="0" marL="0">
+            <a:off x="3200400" y="2542032"/>
+            <a:ext cx="4956048" cy="475488"/>
+          </a:xfrm>
+          <a:prstGeom prst="rect">
+            <a:avLst/>
+          </a:prstGeom>
+          <a:noFill/>
+          <a:ln/>
+        </p:spPr>
+        <p:txBody>
+          <a:bodyPr wrap="square" lIns="0" tIns="0" rIns="0" bIns="0" rtlCol="0" anchor="ctr"/>
+          <a:lstStyle/>
+          <a:p>
+            <a:pPr marL="342900" indent="-342900">
               <a:lnSpc>
-                <a:spcPts val="1250"/>
+                <a:spcPts val="1100"/>
               </a:lnSpc>
-              <a:buNone/>
-            </a:pPr>
-            <a:r>
-              <a:rPr lang="en-US" sz="950" dirty="0">
+              <a:buSzPct val="100000"/>
+              <a:buChar char="•"/>
+            </a:pPr>
+            <a:r>
+              <a:rPr lang="en-US" sz="860" dirty="0">
                 <a:solidFill>
                   <a:srgbClr val="5A6C82"/>
                 </a:solidFill>
@@ -9660,9 +9704,51 @@
                 <a:ea typeface="Calibri" pitchFamily="34" charset="-122"/>
                 <a:cs typeface="Calibri" pitchFamily="34" charset="-120"/>
               </a:rPr>
-              <a:t>Completes the candidate file and document checklist; releases accepted candidates into the permit process; aligns profession and work-location codes with the PRO.</a:t>
-            </a:r>
-            <a:endParaRPr lang="en-US" sz="950" dirty="0"/>
+              <a:t>Completes the candidate file and document checklist</a:t>
+            </a:r>
+            <a:endParaRPr lang="en-US" sz="860" dirty="0"/>
+          </a:p>
+          <a:p>
+            <a:pPr marL="342900" indent="-342900">
+              <a:lnSpc>
+                <a:spcPts val="1100"/>
+              </a:lnSpc>
+              <a:buSzPct val="100000"/>
+              <a:buChar char="•"/>
+            </a:pPr>
+            <a:r>
+              <a:rPr lang="en-US" sz="860" dirty="0">
+                <a:solidFill>
+                  <a:srgbClr val="5A6C82"/>
+                </a:solidFill>
+                <a:latin typeface="Calibri" pitchFamily="34" charset="0"/>
+                <a:ea typeface="Calibri" pitchFamily="34" charset="-122"/>
+                <a:cs typeface="Calibri" pitchFamily="34" charset="-120"/>
+              </a:rPr>
+              <a:t>Releases accepted candidates into the permit process</a:t>
+            </a:r>
+            <a:endParaRPr lang="en-US" sz="860" dirty="0"/>
+          </a:p>
+          <a:p>
+            <a:pPr marL="342900" indent="-342900">
+              <a:lnSpc>
+                <a:spcPts val="1100"/>
+              </a:lnSpc>
+              <a:buSzPct val="100000"/>
+              <a:buChar char="•"/>
+            </a:pPr>
+            <a:r>
+              <a:rPr lang="en-US" sz="860" dirty="0">
+                <a:solidFill>
+                  <a:srgbClr val="5A6C82"/>
+                </a:solidFill>
+                <a:latin typeface="Calibri" pitchFamily="34" charset="0"/>
+                <a:ea typeface="Calibri" pitchFamily="34" charset="-122"/>
+                <a:cs typeface="Calibri" pitchFamily="34" charset="-120"/>
+              </a:rPr>
+              <a:t>Aligns profession and work-location codes with the PRO</a:t>
+            </a:r>
+            <a:endParaRPr lang="en-US" sz="860" dirty="0"/>
           </a:p>
         </p:txBody>
       </p:sp>
@@ -9674,8 +9760,8 @@
         </p:nvSpPr>
         <p:spPr>
           <a:xfrm>
-            <a:off x="8229600" y="2468880"/>
-            <a:ext cx="2615184" cy="438912"/>
+            <a:off x="8229600" y="2542032"/>
+            <a:ext cx="2615184" cy="475488"/>
           </a:xfrm>
           <a:prstGeom prst="rect">
             <a:avLst/>
@@ -9689,12 +9775,12 @@
           <a:p>
             <a:pPr indent="0" marL="0">
               <a:lnSpc>
-                <a:spcPts val="1250"/>
+                <a:spcPts val="1160"/>
               </a:lnSpc>
               <a:buNone/>
             </a:pPr>
             <a:r>
-              <a:rPr lang="en-US" sz="950" b="1" i="1" dirty="0">
+              <a:rPr lang="en-US" sz="930" b="1" i="1" dirty="0">
                 <a:solidFill>
                   <a:srgbClr val="17795E"/>
                 </a:solidFill>
@@ -9704,7 +9790,7 @@
               </a:rPr>
               <a:t>Joining dates based on real progress, not optimism.</a:t>
             </a:r>
-            <a:endParaRPr lang="en-US" sz="950" dirty="0"/>
+            <a:endParaRPr lang="en-US" sz="930" dirty="0"/>
           </a:p>
         </p:txBody>
       </p:sp>
@@ -9716,12 +9802,12 @@
         </p:nvSpPr>
         <p:spPr>
           <a:xfrm>
-            <a:off x="548640" y="2999232"/>
-            <a:ext cx="10424160" cy="548640"/>
+            <a:off x="548640" y="3118104"/>
+            <a:ext cx="10424160" cy="603504"/>
           </a:xfrm>
           <a:prstGeom prst="roundRect">
             <a:avLst>
-              <a:gd name="adj" fmla="val 10000"/>
+              <a:gd name="adj" fmla="val 9091"/>
             </a:avLst>
           </a:prstGeom>
           <a:solidFill>
@@ -9743,7 +9829,7 @@
         </p:nvSpPr>
         <p:spPr>
           <a:xfrm>
-            <a:off x="694944" y="3099816"/>
+            <a:off x="694944" y="3218688"/>
             <a:ext cx="347472" cy="347472"/>
           </a:xfrm>
           <a:prstGeom prst="ellipse">
@@ -9763,7 +9849,7 @@
         </p:nvSpPr>
         <p:spPr>
           <a:xfrm>
-            <a:off x="694944" y="3099816"/>
+            <a:off x="694944" y="3218688"/>
             <a:ext cx="347472" cy="347472"/>
           </a:xfrm>
           <a:prstGeom prst="rect">
@@ -9802,7 +9888,7 @@
         </p:nvSpPr>
         <p:spPr>
           <a:xfrm>
-            <a:off x="1152144" y="3054096"/>
+            <a:off x="1152144" y="3172968"/>
             <a:ext cx="1965960" cy="219456"/>
           </a:xfrm>
           <a:prstGeom prst="rect">
@@ -9841,7 +9927,7 @@
         </p:nvSpPr>
         <p:spPr>
           <a:xfrm>
-            <a:off x="1152144" y="3273552"/>
+            <a:off x="1152144" y="3392424"/>
             <a:ext cx="1965960" cy="182880"/>
           </a:xfrm>
           <a:prstGeom prst="rect">
@@ -9880,27 +9966,28 @@
         </p:nvSpPr>
         <p:spPr>
           <a:xfrm>
-            <a:off x="3246120" y="3054096"/>
-            <a:ext cx="4846320" cy="438912"/>
-          </a:xfrm>
-          <a:prstGeom prst="rect">
-            <a:avLst/>
-          </a:prstGeom>
-          <a:noFill/>
-          <a:ln/>
-        </p:spPr>
-        <p:txBody>
-          <a:bodyPr wrap="square" lIns="0" tIns="0" rIns="0" bIns="0" rtlCol="0" anchor="ctr"/>
-          <a:lstStyle/>
-          <a:p>
-            <a:pPr indent="0" marL="0">
+            <a:off x="3200400" y="3186684"/>
+            <a:ext cx="4956048" cy="475488"/>
+          </a:xfrm>
+          <a:prstGeom prst="rect">
+            <a:avLst/>
+          </a:prstGeom>
+          <a:noFill/>
+          <a:ln/>
+        </p:spPr>
+        <p:txBody>
+          <a:bodyPr wrap="square" lIns="0" tIns="0" rIns="0" bIns="0" rtlCol="0" anchor="ctr"/>
+          <a:lstStyle/>
+          <a:p>
+            <a:pPr marL="342900" indent="-342900">
               <a:lnSpc>
-                <a:spcPts val="1250"/>
+                <a:spcPts val="1100"/>
               </a:lnSpc>
-              <a:buNone/>
-            </a:pPr>
-            <a:r>
-              <a:rPr lang="en-US" sz="950" dirty="0">
+              <a:buSzPct val="100000"/>
+              <a:buChar char="•"/>
+            </a:pPr>
+            <a:r>
+              <a:rPr lang="en-US" sz="860" dirty="0">
                 <a:solidFill>
                   <a:srgbClr val="5A6C82"/>
                 </a:solidFill>
@@ -9908,9 +9995,51 @@
                 <a:ea typeface="Calibri" pitchFamily="34" charset="-122"/>
                 <a:cs typeface="Calibri" pitchFamily="34" charset="-120"/>
               </a:rPr>
-              <a:t>Initiates the permit; checks quota; chases signed offers, contracts and medical receipts; sends biometric appointments; handles national-hire pension steps.</a:t>
-            </a:r>
-            <a:endParaRPr lang="en-US" sz="950" dirty="0"/>
+              <a:t>Initiates the permit and checks quota before it goes out</a:t>
+            </a:r>
+            <a:endParaRPr lang="en-US" sz="860" dirty="0"/>
+          </a:p>
+          <a:p>
+            <a:pPr marL="342900" indent="-342900">
+              <a:lnSpc>
+                <a:spcPts val="1100"/>
+              </a:lnSpc>
+              <a:buSzPct val="100000"/>
+              <a:buChar char="•"/>
+            </a:pPr>
+            <a:r>
+              <a:rPr lang="en-US" sz="860" dirty="0">
+                <a:solidFill>
+                  <a:srgbClr val="5A6C82"/>
+                </a:solidFill>
+                <a:latin typeface="Calibri" pitchFamily="34" charset="0"/>
+                <a:ea typeface="Calibri" pitchFamily="34" charset="-122"/>
+                <a:cs typeface="Calibri" pitchFamily="34" charset="-120"/>
+              </a:rPr>
+              <a:t>Chases signed offers, contracts and medical receipts</a:t>
+            </a:r>
+            <a:endParaRPr lang="en-US" sz="860" dirty="0"/>
+          </a:p>
+          <a:p>
+            <a:pPr marL="342900" indent="-342900">
+              <a:lnSpc>
+                <a:spcPts val="1100"/>
+              </a:lnSpc>
+              <a:buSzPct val="100000"/>
+              <a:buChar char="•"/>
+            </a:pPr>
+            <a:r>
+              <a:rPr lang="en-US" sz="860" dirty="0">
+                <a:solidFill>
+                  <a:srgbClr val="5A6C82"/>
+                </a:solidFill>
+                <a:latin typeface="Calibri" pitchFamily="34" charset="0"/>
+                <a:ea typeface="Calibri" pitchFamily="34" charset="-122"/>
+                <a:cs typeface="Calibri" pitchFamily="34" charset="-120"/>
+              </a:rPr>
+              <a:t>Sends biometric appointments and handles pension steps</a:t>
+            </a:r>
+            <a:endParaRPr lang="en-US" sz="860" dirty="0"/>
           </a:p>
         </p:txBody>
       </p:sp>
@@ -9922,8 +10051,8 @@
         </p:nvSpPr>
         <p:spPr>
           <a:xfrm>
-            <a:off x="8229600" y="3054096"/>
-            <a:ext cx="2615184" cy="438912"/>
+            <a:off x="8229600" y="3186684"/>
+            <a:ext cx="2615184" cy="475488"/>
           </a:xfrm>
           <a:prstGeom prst="rect">
             <a:avLst/>
@@ -9937,12 +10066,12 @@
           <a:p>
             <a:pPr indent="0" marL="0">
               <a:lnSpc>
-                <a:spcPts val="1250"/>
+                <a:spcPts val="1160"/>
               </a:lnSpc>
               <a:buNone/>
             </a:pPr>
             <a:r>
-              <a:rPr lang="en-US" sz="950" b="1" i="1" dirty="0">
+              <a:rPr lang="en-US" sz="930" b="1" i="1" dirty="0">
                 <a:solidFill>
                   <a:srgbClr val="17795E"/>
                 </a:solidFill>
@@ -9952,7 +10081,7 @@
               </a:rPr>
               <a:t>No joiner arrives without the paperwork that makes them legal.</a:t>
             </a:r>
-            <a:endParaRPr lang="en-US" sz="950" dirty="0"/>
+            <a:endParaRPr lang="en-US" sz="930" dirty="0"/>
           </a:p>
         </p:txBody>
       </p:sp>
@@ -9964,12 +10093,12 @@
         </p:nvSpPr>
         <p:spPr>
           <a:xfrm>
-            <a:off x="548640" y="3584448"/>
-            <a:ext cx="10424160" cy="548640"/>
+            <a:off x="548640" y="3762756"/>
+            <a:ext cx="10424160" cy="603504"/>
           </a:xfrm>
           <a:prstGeom prst="roundRect">
             <a:avLst>
-              <a:gd name="adj" fmla="val 10000"/>
+              <a:gd name="adj" fmla="val 9091"/>
             </a:avLst>
           </a:prstGeom>
           <a:solidFill>
@@ -9991,7 +10120,7 @@
         </p:nvSpPr>
         <p:spPr>
           <a:xfrm>
-            <a:off x="694944" y="3685032"/>
+            <a:off x="694944" y="3863340"/>
             <a:ext cx="347472" cy="347472"/>
           </a:xfrm>
           <a:prstGeom prst="ellipse">
@@ -10011,7 +10140,7 @@
         </p:nvSpPr>
         <p:spPr>
           <a:xfrm>
-            <a:off x="694944" y="3685032"/>
+            <a:off x="694944" y="3863340"/>
             <a:ext cx="347472" cy="347472"/>
           </a:xfrm>
           <a:prstGeom prst="rect">
@@ -10050,7 +10179,7 @@
         </p:nvSpPr>
         <p:spPr>
           <a:xfrm>
-            <a:off x="1152144" y="3639312"/>
+            <a:off x="1152144" y="3817620"/>
             <a:ext cx="1965960" cy="219456"/>
           </a:xfrm>
           <a:prstGeom prst="rect">
@@ -10089,7 +10218,7 @@
         </p:nvSpPr>
         <p:spPr>
           <a:xfrm>
-            <a:off x="1152144" y="3858768"/>
+            <a:off x="1152144" y="4037076"/>
             <a:ext cx="1965960" cy="182880"/>
           </a:xfrm>
           <a:prstGeom prst="rect">
@@ -10128,27 +10257,28 @@
         </p:nvSpPr>
         <p:spPr>
           <a:xfrm>
-            <a:off x="3246120" y="3639312"/>
-            <a:ext cx="4846320" cy="438912"/>
-          </a:xfrm>
-          <a:prstGeom prst="rect">
-            <a:avLst/>
-          </a:prstGeom>
-          <a:noFill/>
-          <a:ln/>
-        </p:spPr>
-        <p:txBody>
-          <a:bodyPr wrap="square" lIns="0" tIns="0" rIns="0" bIns="0" rtlCol="0" anchor="ctr"/>
-          <a:lstStyle/>
-          <a:p>
-            <a:pPr indent="0" marL="0">
+            <a:off x="3200400" y="3831336"/>
+            <a:ext cx="4956048" cy="475488"/>
+          </a:xfrm>
+          <a:prstGeom prst="rect">
+            <a:avLst/>
+          </a:prstGeom>
+          <a:noFill/>
+          <a:ln/>
+        </p:spPr>
+        <p:txBody>
+          <a:bodyPr wrap="square" lIns="0" tIns="0" rIns="0" bIns="0" rtlCol="0" anchor="ctr"/>
+          <a:lstStyle/>
+          <a:p>
+            <a:pPr marL="342900" indent="-342900">
               <a:lnSpc>
-                <a:spcPts val="1250"/>
+                <a:spcPts val="1100"/>
               </a:lnSpc>
-              <a:buNone/>
-            </a:pPr>
-            <a:r>
-              <a:rPr lang="en-US" sz="950" dirty="0">
+              <a:buSzPct val="100000"/>
+              <a:buChar char="•"/>
+            </a:pPr>
+            <a:r>
+              <a:rPr lang="en-US" sz="860" dirty="0">
                 <a:solidFill>
                   <a:srgbClr val="5A6C82"/>
                 </a:solidFill>
@@ -10156,9 +10286,51 @@
                 <a:ea typeface="Calibri" pitchFamily="34" charset="-122"/>
                 <a:cs typeface="Calibri" pitchFamily="34" charset="-120"/>
               </a:rPr>
-              <a:t>Verifies renewal contracts; approves visa allocation for senior grades; initiates cancellation after end-of-service; reviews fines before payroll deduction.</a:t>
-            </a:r>
-            <a:endParaRPr lang="en-US" sz="950" dirty="0"/>
+              <a:t>Verifies renewal contracts and approves senior allocations</a:t>
+            </a:r>
+            <a:endParaRPr lang="en-US" sz="860" dirty="0"/>
+          </a:p>
+          <a:p>
+            <a:pPr marL="342900" indent="-342900">
+              <a:lnSpc>
+                <a:spcPts val="1100"/>
+              </a:lnSpc>
+              <a:buSzPct val="100000"/>
+              <a:buChar char="•"/>
+            </a:pPr>
+            <a:r>
+              <a:rPr lang="en-US" sz="860" dirty="0">
+                <a:solidFill>
+                  <a:srgbClr val="5A6C82"/>
+                </a:solidFill>
+                <a:latin typeface="Calibri" pitchFamily="34" charset="0"/>
+                <a:ea typeface="Calibri" pitchFamily="34" charset="-122"/>
+                <a:cs typeface="Calibri" pitchFamily="34" charset="-120"/>
+              </a:rPr>
+              <a:t>Initiates cancellation once end-of-service is agreed</a:t>
+            </a:r>
+            <a:endParaRPr lang="en-US" sz="860" dirty="0"/>
+          </a:p>
+          <a:p>
+            <a:pPr marL="342900" indent="-342900">
+              <a:lnSpc>
+                <a:spcPts val="1100"/>
+              </a:lnSpc>
+              <a:buSzPct val="100000"/>
+              <a:buChar char="•"/>
+            </a:pPr>
+            <a:r>
+              <a:rPr lang="en-US" sz="860" dirty="0">
+                <a:solidFill>
+                  <a:srgbClr val="5A6C82"/>
+                </a:solidFill>
+                <a:latin typeface="Calibri" pitchFamily="34" charset="0"/>
+                <a:ea typeface="Calibri" pitchFamily="34" charset="-122"/>
+                <a:cs typeface="Calibri" pitchFamily="34" charset="-120"/>
+              </a:rPr>
+              <a:t>Reviews fines before anything reaches payroll</a:t>
+            </a:r>
+            <a:endParaRPr lang="en-US" sz="860" dirty="0"/>
           </a:p>
         </p:txBody>
       </p:sp>
@@ -10170,8 +10342,8 @@
         </p:nvSpPr>
         <p:spPr>
           <a:xfrm>
-            <a:off x="8229600" y="3639312"/>
-            <a:ext cx="2615184" cy="438912"/>
+            <a:off x="8229600" y="3831336"/>
+            <a:ext cx="2615184" cy="475488"/>
           </a:xfrm>
           <a:prstGeom prst="rect">
             <a:avLst/>
@@ -10185,12 +10357,12 @@
           <a:p>
             <a:pPr indent="0" marL="0">
               <a:lnSpc>
-                <a:spcPts val="1250"/>
+                <a:spcPts val="1160"/>
               </a:lnSpc>
               <a:buNone/>
             </a:pPr>
             <a:r>
-              <a:rPr lang="en-US" sz="950" b="1" i="1" dirty="0">
+              <a:rPr lang="en-US" sz="930" b="1" i="1" dirty="0">
                 <a:solidFill>
                   <a:srgbClr val="17795E"/>
                 </a:solidFill>
@@ -10200,7 +10372,7 @@
               </a:rPr>
               <a:t>Escalations arrive before the fine, not after it.</a:t>
             </a:r>
-            <a:endParaRPr lang="en-US" sz="950" dirty="0"/>
+            <a:endParaRPr lang="en-US" sz="930" dirty="0"/>
           </a:p>
         </p:txBody>
       </p:sp>
@@ -10212,12 +10384,12 @@
         </p:nvSpPr>
         <p:spPr>
           <a:xfrm>
-            <a:off x="548640" y="4169664"/>
-            <a:ext cx="10424160" cy="548640"/>
+            <a:off x="548640" y="4407408"/>
+            <a:ext cx="10424160" cy="603504"/>
           </a:xfrm>
           <a:prstGeom prst="roundRect">
             <a:avLst>
-              <a:gd name="adj" fmla="val 10000"/>
+              <a:gd name="adj" fmla="val 9091"/>
             </a:avLst>
           </a:prstGeom>
           <a:solidFill>
@@ -10239,7 +10411,7 @@
         </p:nvSpPr>
         <p:spPr>
           <a:xfrm>
-            <a:off x="694944" y="4270248"/>
+            <a:off x="694944" y="4507992"/>
             <a:ext cx="347472" cy="347472"/>
           </a:xfrm>
           <a:prstGeom prst="ellipse">
@@ -10259,7 +10431,7 @@
         </p:nvSpPr>
         <p:spPr>
           <a:xfrm>
-            <a:off x="694944" y="4270248"/>
+            <a:off x="694944" y="4507992"/>
             <a:ext cx="347472" cy="347472"/>
           </a:xfrm>
           <a:prstGeom prst="rect">
@@ -10298,7 +10470,7 @@
         </p:nvSpPr>
         <p:spPr>
           <a:xfrm>
-            <a:off x="1152144" y="4224528"/>
+            <a:off x="1152144" y="4462272"/>
             <a:ext cx="1965960" cy="219456"/>
           </a:xfrm>
           <a:prstGeom prst="rect">
@@ -10337,7 +10509,7 @@
         </p:nvSpPr>
         <p:spPr>
           <a:xfrm>
-            <a:off x="1152144" y="4443984"/>
+            <a:off x="1152144" y="4681728"/>
             <a:ext cx="1965960" cy="182880"/>
           </a:xfrm>
           <a:prstGeom prst="rect">
@@ -10376,27 +10548,28 @@
         </p:nvSpPr>
         <p:spPr>
           <a:xfrm>
-            <a:off x="3246120" y="4224528"/>
-            <a:ext cx="4846320" cy="438912"/>
-          </a:xfrm>
-          <a:prstGeom prst="rect">
-            <a:avLst/>
-          </a:prstGeom>
-          <a:noFill/>
-          <a:ln/>
-        </p:spPr>
-        <p:txBody>
-          <a:bodyPr wrap="square" lIns="0" tIns="0" rIns="0" bIns="0" rtlCol="0" anchor="ctr"/>
-          <a:lstStyle/>
-          <a:p>
-            <a:pPr indent="0" marL="0">
+            <a:off x="3200400" y="4475988"/>
+            <a:ext cx="4956048" cy="475488"/>
+          </a:xfrm>
+          <a:prstGeom prst="rect">
+            <a:avLst/>
+          </a:prstGeom>
+          <a:noFill/>
+          <a:ln/>
+        </p:spPr>
+        <p:txBody>
+          <a:bodyPr wrap="square" lIns="0" tIns="0" rIns="0" bIns="0" rtlCol="0" anchor="ctr"/>
+          <a:lstStyle/>
+          <a:p>
+            <a:pPr marL="342900" indent="-342900">
               <a:lnSpc>
-                <a:spcPts val="1250"/>
+                <a:spcPts val="1100"/>
               </a:lnSpc>
-              <a:buNone/>
-            </a:pPr>
-            <a:r>
-              <a:rPr lang="en-US" sz="950" dirty="0">
+              <a:buSzPct val="100000"/>
+              <a:buChar char="•"/>
+            </a:pPr>
+            <a:r>
+              <a:rPr lang="en-US" sz="860" dirty="0">
                 <a:solidFill>
                   <a:srgbClr val="5A6C82"/>
                 </a:solidFill>
@@ -10404,9 +10577,51 @@
                 <a:ea typeface="Calibri" pitchFamily="34" charset="-122"/>
                 <a:cs typeface="Calibri" pitchFamily="34" charset="-120"/>
               </a:rPr>
-              <a:t>Acknowledges and uploads signed contracts; confirms in-country or out-of-country status; confirms medical completion, insurance enrolment and ID receipt.</a:t>
-            </a:r>
-            <a:endParaRPr lang="en-US" sz="950" dirty="0"/>
+              <a:t>Acknowledges and uploads the signed contract</a:t>
+            </a:r>
+            <a:endParaRPr lang="en-US" sz="860" dirty="0"/>
+          </a:p>
+          <a:p>
+            <a:pPr marL="342900" indent="-342900">
+              <a:lnSpc>
+                <a:spcPts val="1100"/>
+              </a:lnSpc>
+              <a:buSzPct val="100000"/>
+              <a:buChar char="•"/>
+            </a:pPr>
+            <a:r>
+              <a:rPr lang="en-US" sz="860" dirty="0">
+                <a:solidFill>
+                  <a:srgbClr val="5A6C82"/>
+                </a:solidFill>
+                <a:latin typeface="Calibri" pitchFamily="34" charset="0"/>
+                <a:ea typeface="Calibri" pitchFamily="34" charset="-122"/>
+                <a:cs typeface="Calibri" pitchFamily="34" charset="-120"/>
+              </a:rPr>
+              <a:t>Confirms in-country or out-of-country status</a:t>
+            </a:r>
+            <a:endParaRPr lang="en-US" sz="860" dirty="0"/>
+          </a:p>
+          <a:p>
+            <a:pPr marL="342900" indent="-342900">
+              <a:lnSpc>
+                <a:spcPts val="1100"/>
+              </a:lnSpc>
+              <a:buSzPct val="100000"/>
+              <a:buChar char="•"/>
+            </a:pPr>
+            <a:r>
+              <a:rPr lang="en-US" sz="860" dirty="0">
+                <a:solidFill>
+                  <a:srgbClr val="5A6C82"/>
+                </a:solidFill>
+                <a:latin typeface="Calibri" pitchFamily="34" charset="0"/>
+                <a:ea typeface="Calibri" pitchFamily="34" charset="-122"/>
+                <a:cs typeface="Calibri" pitchFamily="34" charset="-120"/>
+              </a:rPr>
+              <a:t>Confirms medical, insurance enrolment and ID receipt</a:t>
+            </a:r>
+            <a:endParaRPr lang="en-US" sz="860" dirty="0"/>
           </a:p>
         </p:txBody>
       </p:sp>
@@ -10418,8 +10633,8 @@
         </p:nvSpPr>
         <p:spPr>
           <a:xfrm>
-            <a:off x="8229600" y="4224528"/>
-            <a:ext cx="2615184" cy="438912"/>
+            <a:off x="8229600" y="4475988"/>
+            <a:ext cx="2615184" cy="475488"/>
           </a:xfrm>
           <a:prstGeom prst="rect">
             <a:avLst/>
@@ -10433,12 +10648,12 @@
           <a:p>
             <a:pPr indent="0" marL="0">
               <a:lnSpc>
-                <a:spcPts val="1250"/>
+                <a:spcPts val="1160"/>
               </a:lnSpc>
               <a:buNone/>
             </a:pPr>
             <a:r>
-              <a:rPr lang="en-US" sz="950" b="1" i="1" dirty="0">
+              <a:rPr lang="en-US" sz="930" b="1" i="1" dirty="0">
                 <a:solidFill>
                   <a:srgbClr val="17795E"/>
                 </a:solidFill>
@@ -10448,7 +10663,7 @@
               </a:rPr>
               <a:t>Knows exactly what is pending from them, and by when.</a:t>
             </a:r>
-            <a:endParaRPr lang="en-US" sz="950" dirty="0"/>
+            <a:endParaRPr lang="en-US" sz="930" dirty="0"/>
           </a:p>
         </p:txBody>
       </p:sp>
@@ -10460,12 +10675,12 @@
         </p:nvSpPr>
         <p:spPr>
           <a:xfrm>
-            <a:off x="548640" y="4754880"/>
-            <a:ext cx="10424160" cy="548640"/>
+            <a:off x="548640" y="5052060"/>
+            <a:ext cx="10424160" cy="603504"/>
           </a:xfrm>
           <a:prstGeom prst="roundRect">
             <a:avLst>
-              <a:gd name="adj" fmla="val 10000"/>
+              <a:gd name="adj" fmla="val 9091"/>
             </a:avLst>
           </a:prstGeom>
           <a:solidFill>
@@ -10487,7 +10702,7 @@
         </p:nvSpPr>
         <p:spPr>
           <a:xfrm>
-            <a:off x="694944" y="4855464"/>
+            <a:off x="694944" y="5152644"/>
             <a:ext cx="347472" cy="347472"/>
           </a:xfrm>
           <a:prstGeom prst="ellipse">
@@ -10507,7 +10722,7 @@
         </p:nvSpPr>
         <p:spPr>
           <a:xfrm>
-            <a:off x="694944" y="4855464"/>
+            <a:off x="694944" y="5152644"/>
             <a:ext cx="347472" cy="347472"/>
           </a:xfrm>
           <a:prstGeom prst="rect">
@@ -10546,7 +10761,7 @@
         </p:nvSpPr>
         <p:spPr>
           <a:xfrm>
-            <a:off x="1152144" y="4809744"/>
+            <a:off x="1152144" y="5106924"/>
             <a:ext cx="1965960" cy="219456"/>
           </a:xfrm>
           <a:prstGeom prst="rect">
@@ -10585,7 +10800,7 @@
         </p:nvSpPr>
         <p:spPr>
           <a:xfrm>
-            <a:off x="1152144" y="5029200"/>
+            <a:off x="1152144" y="5326380"/>
             <a:ext cx="1965960" cy="182880"/>
           </a:xfrm>
           <a:prstGeom prst="rect">
@@ -10624,27 +10839,28 @@
         </p:nvSpPr>
         <p:spPr>
           <a:xfrm>
-            <a:off x="3246120" y="4809744"/>
-            <a:ext cx="4846320" cy="438912"/>
-          </a:xfrm>
-          <a:prstGeom prst="rect">
-            <a:avLst/>
-          </a:prstGeom>
-          <a:noFill/>
-          <a:ln/>
-        </p:spPr>
-        <p:txBody>
-          <a:bodyPr wrap="square" lIns="0" tIns="0" rIns="0" bIns="0" rtlCol="0" anchor="ctr"/>
-          <a:lstStyle/>
-          <a:p>
-            <a:pPr indent="0" marL="0">
+            <a:off x="3200400" y="5120640"/>
+            <a:ext cx="4956048" cy="475488"/>
+          </a:xfrm>
+          <a:prstGeom prst="rect">
+            <a:avLst/>
+          </a:prstGeom>
+          <a:noFill/>
+          <a:ln/>
+        </p:spPr>
+        <p:txBody>
+          <a:bodyPr wrap="square" lIns="0" tIns="0" rIns="0" bIns="0" rtlCol="0" anchor="ctr"/>
+          <a:lstStyle/>
+          <a:p>
+            <a:pPr marL="342900" indent="-342900">
               <a:lnSpc>
-                <a:spcPts val="1250"/>
+                <a:spcPts val="1100"/>
               </a:lnSpc>
-              <a:buNone/>
-            </a:pPr>
-            <a:r>
-              <a:rPr lang="en-US" sz="950" dirty="0">
+              <a:buSzPct val="100000"/>
+              <a:buChar char="•"/>
+            </a:pPr>
+            <a:r>
+              <a:rPr lang="en-US" sz="860" dirty="0">
                 <a:solidFill>
                   <a:srgbClr val="5A6C82"/>
                 </a:solidFill>
@@ -10652,9 +10868,51 @@
                 <a:ea typeface="Calibri" pitchFamily="34" charset="-122"/>
                 <a:cs typeface="Calibri" pitchFamily="34" charset="-120"/>
               </a:rPr>
-              <a:t>Reconciles government fees against receipts; posts permit costs to GL accounts; reviews card-holder spend for reimbursement; approves fine deductions.</a:t>
-            </a:r>
-            <a:endParaRPr lang="en-US" sz="950" dirty="0"/>
+              <a:t>Reconciles government fees against receipts</a:t>
+            </a:r>
+            <a:endParaRPr lang="en-US" sz="860" dirty="0"/>
+          </a:p>
+          <a:p>
+            <a:pPr marL="342900" indent="-342900">
+              <a:lnSpc>
+                <a:spcPts val="1100"/>
+              </a:lnSpc>
+              <a:buSzPct val="100000"/>
+              <a:buChar char="•"/>
+            </a:pPr>
+            <a:r>
+              <a:rPr lang="en-US" sz="860" dirty="0">
+                <a:solidFill>
+                  <a:srgbClr val="5A6C82"/>
+                </a:solidFill>
+                <a:latin typeface="Calibri" pitchFamily="34" charset="0"/>
+                <a:ea typeface="Calibri" pitchFamily="34" charset="-122"/>
+                <a:cs typeface="Calibri" pitchFamily="34" charset="-120"/>
+              </a:rPr>
+              <a:t>Posts permit cost to the right GL account</a:t>
+            </a:r>
+            <a:endParaRPr lang="en-US" sz="860" dirty="0"/>
+          </a:p>
+          <a:p>
+            <a:pPr marL="342900" indent="-342900">
+              <a:lnSpc>
+                <a:spcPts val="1100"/>
+              </a:lnSpc>
+              <a:buSzPct val="100000"/>
+              <a:buChar char="•"/>
+            </a:pPr>
+            <a:r>
+              <a:rPr lang="en-US" sz="860" dirty="0">
+                <a:solidFill>
+                  <a:srgbClr val="5A6C82"/>
+                </a:solidFill>
+                <a:latin typeface="Calibri" pitchFamily="34" charset="0"/>
+                <a:ea typeface="Calibri" pitchFamily="34" charset="-122"/>
+                <a:cs typeface="Calibri" pitchFamily="34" charset="-120"/>
+              </a:rPr>
+              <a:t>Reviews card-holder spend and approves fine deductions</a:t>
+            </a:r>
+            <a:endParaRPr lang="en-US" sz="860" dirty="0"/>
           </a:p>
         </p:txBody>
       </p:sp>
@@ -10666,8 +10924,8 @@
         </p:nvSpPr>
         <p:spPr>
           <a:xfrm>
-            <a:off x="8229600" y="4809744"/>
-            <a:ext cx="2615184" cy="438912"/>
+            <a:off x="8229600" y="5120640"/>
+            <a:ext cx="2615184" cy="475488"/>
           </a:xfrm>
           <a:prstGeom prst="rect">
             <a:avLst/>
@@ -10681,12 +10939,12 @@
           <a:p>
             <a:pPr indent="0" marL="0">
               <a:lnSpc>
-                <a:spcPts val="1250"/>
+                <a:spcPts val="1160"/>
               </a:lnSpc>
               <a:buNone/>
             </a:pPr>
             <a:r>
-              <a:rPr lang="en-US" sz="950" b="1" i="1" dirty="0">
+              <a:rPr lang="en-US" sz="930" b="1" i="1" dirty="0">
                 <a:solidFill>
                   <a:srgbClr val="17795E"/>
                 </a:solidFill>
@@ -10696,7 +10954,7 @@
               </a:rPr>
               <a:t>One export instead of days of reconciliation.</a:t>
             </a:r>
-            <a:endParaRPr lang="en-US" sz="950" dirty="0"/>
+            <a:endParaRPr lang="en-US" sz="930" dirty="0"/>
           </a:p>
         </p:txBody>
       </p:sp>
@@ -10708,12 +10966,12 @@
         </p:nvSpPr>
         <p:spPr>
           <a:xfrm>
-            <a:off x="548640" y="5340096"/>
-            <a:ext cx="10424160" cy="548640"/>
+            <a:off x="548640" y="5696712"/>
+            <a:ext cx="10424160" cy="603504"/>
           </a:xfrm>
           <a:prstGeom prst="roundRect">
             <a:avLst>
-              <a:gd name="adj" fmla="val 10000"/>
+              <a:gd name="adj" fmla="val 9091"/>
             </a:avLst>
           </a:prstGeom>
           <a:solidFill>
@@ -10735,7 +10993,7 @@
         </p:nvSpPr>
         <p:spPr>
           <a:xfrm>
-            <a:off x="694944" y="5440680"/>
+            <a:off x="694944" y="5797296"/>
             <a:ext cx="347472" cy="347472"/>
           </a:xfrm>
           <a:prstGeom prst="ellipse">
@@ -10755,7 +11013,7 @@
         </p:nvSpPr>
         <p:spPr>
           <a:xfrm>
-            <a:off x="694944" y="5440680"/>
+            <a:off x="694944" y="5797296"/>
             <a:ext cx="347472" cy="347472"/>
           </a:xfrm>
           <a:prstGeom prst="rect">
@@ -10794,7 +11052,7 @@
         </p:nvSpPr>
         <p:spPr>
           <a:xfrm>
-            <a:off x="1152144" y="5394960"/>
+            <a:off x="1152144" y="5751576"/>
             <a:ext cx="1965960" cy="219456"/>
           </a:xfrm>
           <a:prstGeom prst="rect">
@@ -10833,7 +11091,7 @@
         </p:nvSpPr>
         <p:spPr>
           <a:xfrm>
-            <a:off x="1152144" y="5614416"/>
+            <a:off x="1152144" y="5971032"/>
             <a:ext cx="1965960" cy="182880"/>
           </a:xfrm>
           <a:prstGeom prst="rect">
@@ -10872,27 +11130,28 @@
         </p:nvSpPr>
         <p:spPr>
           <a:xfrm>
-            <a:off x="3246120" y="5394960"/>
-            <a:ext cx="4846320" cy="438912"/>
-          </a:xfrm>
-          <a:prstGeom prst="rect">
-            <a:avLst/>
-          </a:prstGeom>
-          <a:noFill/>
-          <a:ln/>
-        </p:spPr>
-        <p:txBody>
-          <a:bodyPr wrap="square" lIns="0" tIns="0" rIns="0" bIns="0" rtlCol="0" anchor="ctr"/>
-          <a:lstStyle/>
-          <a:p>
-            <a:pPr indent="0" marL="0">
+            <a:off x="3200400" y="5765292"/>
+            <a:ext cx="4956048" cy="475488"/>
+          </a:xfrm>
+          <a:prstGeom prst="rect">
+            <a:avLst/>
+          </a:prstGeom>
+          <a:noFill/>
+          <a:ln/>
+        </p:spPr>
+        <p:txBody>
+          <a:bodyPr wrap="square" lIns="0" tIns="0" rIns="0" bIns="0" rtlCol="0" anchor="ctr"/>
+          <a:lstStyle/>
+          <a:p>
+            <a:pPr marL="342900" indent="-342900">
               <a:lnSpc>
-                <a:spcPts val="1250"/>
+                <a:spcPts val="1100"/>
               </a:lnSpc>
-              <a:buNone/>
-            </a:pPr>
-            <a:r>
-              <a:rPr lang="en-US" sz="950" dirty="0">
+              <a:buSzPct val="100000"/>
+              <a:buChar char="•"/>
+            </a:pPr>
+            <a:r>
+              <a:rPr lang="en-US" sz="860" dirty="0">
                 <a:solidFill>
                   <a:srgbClr val="5A6C82"/>
                 </a:solidFill>
@@ -10900,9 +11159,51 @@
                 <a:ea typeface="Calibri" pitchFamily="34" charset="-122"/>
                 <a:cs typeface="Calibri" pitchFamily="34" charset="-120"/>
               </a:rPr>
-              <a:t>Monitors quota utilisation and Saudization or Emiratisation ratios; reviews compliance exposure by entity and country; signs off permit cost budgets.</a:t>
-            </a:r>
-            <a:endParaRPr lang="en-US" sz="950" dirty="0"/>
+              <a:t>Monitors quota use and Saudization or Emiratisation ratios</a:t>
+            </a:r>
+            <a:endParaRPr lang="en-US" sz="860" dirty="0"/>
+          </a:p>
+          <a:p>
+            <a:pPr marL="342900" indent="-342900">
+              <a:lnSpc>
+                <a:spcPts val="1100"/>
+              </a:lnSpc>
+              <a:buSzPct val="100000"/>
+              <a:buChar char="•"/>
+            </a:pPr>
+            <a:r>
+              <a:rPr lang="en-US" sz="860" dirty="0">
+                <a:solidFill>
+                  <a:srgbClr val="5A6C82"/>
+                </a:solidFill>
+                <a:latin typeface="Calibri" pitchFamily="34" charset="0"/>
+                <a:ea typeface="Calibri" pitchFamily="34" charset="-122"/>
+                <a:cs typeface="Calibri" pitchFamily="34" charset="-120"/>
+              </a:rPr>
+              <a:t>Reviews compliance exposure by entity and by country</a:t>
+            </a:r>
+            <a:endParaRPr lang="en-US" sz="860" dirty="0"/>
+          </a:p>
+          <a:p>
+            <a:pPr marL="342900" indent="-342900">
+              <a:lnSpc>
+                <a:spcPts val="1100"/>
+              </a:lnSpc>
+              <a:buSzPct val="100000"/>
+              <a:buChar char="•"/>
+            </a:pPr>
+            <a:r>
+              <a:rPr lang="en-US" sz="860" dirty="0">
+                <a:solidFill>
+                  <a:srgbClr val="5A6C82"/>
+                </a:solidFill>
+                <a:latin typeface="Calibri" pitchFamily="34" charset="0"/>
+                <a:ea typeface="Calibri" pitchFamily="34" charset="-122"/>
+                <a:cs typeface="Calibri" pitchFamily="34" charset="-120"/>
+              </a:rPr>
+              <a:t>Signs off permit cost budgets for the year</a:t>
+            </a:r>
+            <a:endParaRPr lang="en-US" sz="860" dirty="0"/>
           </a:p>
         </p:txBody>
       </p:sp>
@@ -10914,8 +11215,8 @@
         </p:nvSpPr>
         <p:spPr>
           <a:xfrm>
-            <a:off x="8229600" y="5394960"/>
-            <a:ext cx="2615184" cy="438912"/>
+            <a:off x="8229600" y="5765292"/>
+            <a:ext cx="2615184" cy="475488"/>
           </a:xfrm>
           <a:prstGeom prst="rect">
             <a:avLst/>
@@ -10929,12 +11230,12 @@
           <a:p>
             <a:pPr indent="0" marL="0">
               <a:lnSpc>
-                <a:spcPts val="1250"/>
+                <a:spcPts val="1160"/>
               </a:lnSpc>
               <a:buNone/>
             </a:pPr>
             <a:r>
-              <a:rPr lang="en-US" sz="950" b="1" i="1" dirty="0">
+              <a:rPr lang="en-US" sz="930" b="1" i="1" dirty="0">
                 <a:solidFill>
                   <a:srgbClr val="17795E"/>
                 </a:solidFill>
@@ -10944,7 +11245,7 @@
               </a:rPr>
               <a:t>Compliance risk as a dashboard, not a fire drill.</a:t>
             </a:r>
-            <a:endParaRPr lang="en-US" sz="950" dirty="0"/>
+            <a:endParaRPr lang="en-US" sz="930" dirty="0"/>
           </a:p>
         </p:txBody>
       </p:sp>
@@ -12083,7 +12384,7 @@
                 <a:ea typeface="Calibri" pitchFamily="34" charset="-122"/>
                 <a:cs typeface="Calibri" pitchFamily="34" charset="-120"/>
               </a:rPr>
-              <a:t>The officer’s inbox — pending tasks with type and due date on the left, the task itself on the right: assignee, due date, comment thread and the document that must come back before it can be submitted.</a:t>
+              <a:t>The officer’s inbox. Pending tasks with type and due date on the left, the task itself on the right: assignee, due date, comment thread and the document that must come back before it can be submitted.</a:t>
             </a:r>
             <a:endParaRPr lang="en-US" sz="980" dirty="0"/>
           </a:p>
@@ -12169,7 +12470,7 @@
                 <a:ea typeface="Calibri" pitchFamily="34" charset="-122"/>
                 <a:cs typeface="Calibri" pitchFamily="34" charset="-120"/>
               </a:rPr>
-              <a:t>The system shows where the wait actually is — the unsigned contract, the unbooked medical, the government step pending. The bottleneck has an address.</a:t>
+              <a:t>The system shows where the wait actually is: the unsigned contract, the unbooked medical, the government step pending. The bottleneck has an address.</a:t>
             </a:r>
             <a:endParaRPr lang="en-US" sz="930" dirty="0"/>
           </a:p>
@@ -13891,7 +14192,7 @@
                 <a:ea typeface="Calibri" pitchFamily="34" charset="-122"/>
                 <a:cs typeface="Calibri" pitchFamily="34" charset="-120"/>
               </a:rPr>
-              <a:t>Every row is auditable: amount, VAT, payment reference, payment document number, GL account and status — with the original receipt one click away under Download.</a:t>
+              <a:t>Every row is auditable: amount, VAT, payment reference, payment document number, GL account and status, with the original receipt one click away under Download.</a:t>
             </a:r>
             <a:endParaRPr lang="en-US" sz="980" dirty="0"/>
           </a:p>
@@ -14116,7 +14417,7 @@
         <p:spPr>
           <a:xfrm>
             <a:off x="548640" y="1243584"/>
-            <a:ext cx="10424160" cy="329184"/>
+            <a:ext cx="10424160" cy="237744"/>
           </a:xfrm>
           <a:prstGeom prst="rect">
             <a:avLst/>
@@ -14140,7 +14441,7 @@
                 <a:ea typeface="Calibri" pitchFamily="34" charset="-122"/>
                 <a:cs typeface="Calibri" pitchFamily="34" charset="-120"/>
               </a:rPr>
-              <a:t>Labour law is national, so the process has to be too. The engine underneath stays the same everywhere. What changes country by country is the steps, the authorities, the document checklist and when the alerts fire.</a:t>
+              <a:t>The engine stays the same everywhere. What changes per country is the steps, the authorities, the checklist and when alerts fire.</a:t>
             </a:r>
             <a:endParaRPr lang="en-US" sz="1250" dirty="0"/>
           </a:p>
@@ -15793,7 +16094,7 @@
                 <a:ea typeface="Calibri" pitchFamily="34" charset="-122"/>
                 <a:cs typeface="Calibri" pitchFamily="34" charset="-120"/>
               </a:rPr>
-              <a:t> = the country’s statutory flow expressed as configuration on the shared engine — milestones, authorities, document checklist, mandatory fields, payment types and alert thresholds. Pre-built rather than custom-developed, with a localisation workshop confirming document names, fees and thresholds before go-live.</a:t>
+              <a:t> = the country’s statutory flow expressed as configuration on the shared engine: milestones, authorities, document checklist, mandatory fields, payment types and alert thresholds. Pre-built rather than custom-developed, with a localisation workshop confirming document names, fees and thresholds before go-live.</a:t>
             </a:r>
             <a:endParaRPr lang="en-US" sz="950" dirty="0"/>
           </a:p>
@@ -16252,7 +16553,7 @@
                 <a:ea typeface="Calibri" pitchFamily="34" charset="-122"/>
                 <a:cs typeface="Calibri" pitchFamily="34" charset="-120"/>
               </a:rPr>
-              <a:t>Renewal driven by CME hours — 90-day alerts, 15-day escalations</a:t>
+              <a:t>Renewal driven by CME hours, with 90-day alerts and 15-day escalations</a:t>
             </a:r>
             <a:endParaRPr lang="en-US" sz="1050" dirty="0"/>
           </a:p>
@@ -16460,7 +16761,7 @@
                 <a:ea typeface="Calibri" pitchFamily="34" charset="-122"/>
                 <a:cs typeface="Calibri" pitchFamily="34" charset="-120"/>
               </a:rPr>
-              <a:t>Licence and visa expiry drift apart — one lapses, the other is fine</a:t>
+              <a:t>Licence and visa expiry drift apart, so one lapses while the other is fine</a:t>
             </a:r>
             <a:endParaRPr lang="en-US" sz="1050" dirty="0"/>
           </a:p>
